--- a/presentation/final_presentation.pptx
+++ b/presentation/final_presentation.pptx
@@ -615,7 +615,7 @@
           <a:p>
             <a:r>
               <a:rPr sz="1200"/>
-              <a:t>[slide 10  ·  39s  ·  ends 8:32 of 10:00  ·  85 words ≈ 36s at 140 wpm]</a:t>
+              <a:t>[slide 10  ·  39s  ·  ends 8:39 of 10:00  ·  85 words ≈ 36s at 140 wpm]</a:t>
             </a:r>
           </a:p>
           <a:p/>
@@ -709,7 +709,7 @@
           <a:p>
             <a:r>
               <a:rPr sz="1200"/>
-              <a:t>[slide 11  ·  46s  ·  ends 9:18 of 10:00  ·  101 words ≈ 43s at 140 wpm]</a:t>
+              <a:t>[slide 11  ·  46s  ·  ends 9:25 of 10:00  ·  101 words ≈ 43s at 140 wpm]</a:t>
             </a:r>
           </a:p>
           <a:p/>
@@ -803,7 +803,7 @@
           <a:p>
             <a:r>
               <a:rPr sz="1200"/>
-              <a:t>[slide 12  ·  33s  ·  ends 9:51 of 10:00  ·  70 words ≈ 30s at 140 wpm]</a:t>
+              <a:t>[slide 12  ·  33s  ·  ends 9:58 of 10:00  ·  70 words ≈ 30s at 140 wpm]</a:t>
             </a:r>
           </a:p>
           <a:p/>
@@ -1549,14 +1549,14 @@
           <a:p>
             <a:r>
               <a:rPr sz="1200"/>
-              <a:t>[slide 2  ·  48s  ·  ends 1:08 of 10:00  ·  104 words ≈ 45s at 140 wpm]</a:t>
+              <a:t>[slide 2  ·  43s  ·  ends 1:03 of 10:00  ·  93 words ≈ 40s at 140 wpm]</a:t>
             </a:r>
           </a:p>
           <a:p/>
           <a:p>
             <a:r>
               <a:rPr sz="1200"/>
-              <a:t>London Zoo tells its 81 Humboldt penguins apart with coloured flipper bands, read off this laminated sheet. Bands work, but they can be hidden by posture or by another bird — and in king penguins, ten years of banding cost survival and breeding success. That does not transfer directly to captive Humboldts; it just says a marker is not automatically neutral. The alternative is already on the bird. Humboldts have been told apart by their breast spots since 1989, and African penguins use ventral dot patterns to recognise each other. So I am asking a model to read a cue the species already reads.</a:t>
+              <a:t>London Zoo tells its 81 Humboldt penguins apart with coloured flipper bands, read off this laminated sheet. Bands work, but they can be hidden by posture or by another bird — and in king penguins, ten years of banding cost survival and breeding success. That does not transfer directly to captive Humboldts; it just says a marker is not automatically neutral. The alternative is already on the bird: African penguins use their ventral dot patterns to recognise each other, so I am asking a model to read a cue the species already reads.</a:t>
             </a:r>
           </a:p>
         </p:txBody>
@@ -1737,7 +1737,7 @@
           <a:p>
             <a:r>
               <a:rPr sz="1200"/>
-              <a:t>[slide 3  ·  47s  ·  ends 1:55 of 10:00  ·  103 words ≈ 44s at 140 wpm]</a:t>
+              <a:t>[slide 3  ·  47s  ·  ends 1:50 of 10:00  ·  103 words ≈ 44s at 140 wpm]</a:t>
             </a:r>
           </a:p>
           <a:p/>
@@ -1831,7 +1831,7 @@
           <a:p>
             <a:r>
               <a:rPr sz="1200"/>
-              <a:t>[slide 4  ·  72s  ·  ends 3:07 of 10:00  ·  162 words ≈ 69s at 140 wpm]</a:t>
+              <a:t>[slide 4  ·  72s  ·  ends 3:02 of 10:00  ·  162 words ≈ 69s at 140 wpm]</a:t>
             </a:r>
           </a:p>
           <a:p/>
@@ -1925,7 +1925,7 @@
           <a:p>
             <a:r>
               <a:rPr sz="1200"/>
-              <a:t>[slide 5  ·  49s  ·  ends 3:56 of 10:00  ·  108 words ≈ 46s at 140 wpm]</a:t>
+              <a:t>[slide 5  ·  49s  ·  ends 3:51 of 10:00  ·  108 words ≈ 46s at 140 wpm]</a:t>
             </a:r>
           </a:p>
           <a:p/>
@@ -2019,14 +2019,14 @@
           <a:p>
             <a:r>
               <a:rPr sz="1200"/>
-              <a:t>[slide 6  ·  54s  ·  ends 4:50 of 10:00  ·  119 words ≈ 51s at 140 wpm]</a:t>
+              <a:t>[slide 6  ·  57s  ·  ends 4:48 of 10:00  ·  127 words ≈ 54s at 140 wpm]</a:t>
             </a:r>
           </a:p>
           <a:p/>
           <a:p>
             <a:r>
               <a:rPr sz="1200"/>
-              <a:t>Under that protocol I ran a full two-by-two: objective crossed with augmentation, five folds each, twenty runs. The baseline scores 0.390 — essentially the single-split figure of 0.389, so cross-validation itself introduced no bias. Strong augmentation is worth plus 0.141; ArcFace on its own plus 0.096. They are sub-additive: once strong augmentation is there, ArcFace adds only 0.029, and that interval crosses zero. At 35 candidates I cannot claim the loss is doing significant work. But widen the gallery to all 81 colony members — the right-hand panel — and ArcFace is worth plus 0.116, clear of zero, because metric learning shapes the embedding geometry rather than the top-one call. That is the regime a real colony is in.</a:t>
+              <a:t>Under that protocol I ran a full two-by-two: objective crossed with augmentation, five folds each, twenty runs. The baseline scores 0.390, numerically close to the single-split 0.389 — though those runs used different recipes, so I would not read that as a validation. Strong augmentation is worth plus 0.141; ArcFace alone plus 0.096. They are sub-additive: once strong augmentation is there, ArcFace adds only 0.029 and that interval crosses zero, so at 35 candidates I cannot claim the loss is doing significant work. But widen the gallery to all 81 colony members — the right-hand panel — and ArcFace is worth plus 0.116, clear of zero, because metric learning shapes the embedding geometry rather than the top-one call. That is the regime a real colony is in.</a:t>
             </a:r>
           </a:p>
         </p:txBody>
@@ -2113,14 +2113,14 @@
           <a:p>
             <a:r>
               <a:rPr sz="1200"/>
-              <a:t>[slide 7  ·  66s  ·  ends 5:56 of 10:00  ·  146 words ≈ 63s at 140 wpm]</a:t>
+              <a:t>[slide 7  ·  75s  ·  ends 6:03 of 10:00  ·  167 words ≈ 72s at 140 wpm]</a:t>
             </a:r>
           </a:p>
           <a:p/>
           <a:p>
             <a:r>
               <a:rPr sz="1200"/>
-              <a:t>This is the finding I care most about. Group the 35 birds by how many separate occasions they were photographed on: the eight with three sessions score 0.186; the thirteen with four to six score 0.618; the fourteen with seven or more score 0.717. The ordering holds in all four configurations — and the best configuration on a three-session bird still loses to the worst configuration on a seven-session bird, 0.186 against 0.535. Nicki and Gonzo make it concrete: 53 photographs against 52, but three sessions against thirteen, and 19% against 83%. That pair is an illustration, not the evidence. Sessions and photograph count are themselves correlated at rho 0.663 — so I partial one out. Sessions survive at 0.518, P equals 0.002; photograph count falls to 0.224 and is not significant. Extra frames inside a burst you already have add nothing. A new day does.</a:t>
+              <a:t>This is the finding I care most about. Group the 35 birds by how many separate occasions they were photographed on: the eight with three sessions score 0.186; the thirteen with four to six score 0.618; the fourteen with seven or more score 0.717. The same ordering holds in all four training configurations. Nicki and Gonzo make it concrete: 53 photographs against 52, but three sessions against thirteen, and 19% against 83%. That pair is an illustration, not the evidence. Sessions and photograph count are correlated at rho 0.663, so I partial one out. Sessions survive at 0.518, P equals 0.002; photograph count falls to 0.224 and does not reach significance — with 35 birds I cannot exclude a modest photograph effect, only say sessions are the stronger one. One caution I will give you myself: a three-session bird's prototype is built from only one or two gallery sessions, so part of this gradient is design rather than biology. It still points the same way for collection.</a:t>
             </a:r>
           </a:p>
         </p:txBody>
@@ -2207,7 +2207,7 @@
           <a:p>
             <a:r>
               <a:rPr sz="1200"/>
-              <a:t>[slide 8  ·  63s  ·  ends 6:59 of 10:00  ·  139 words ≈ 60s at 140 wpm]</a:t>
+              <a:t>[slide 8  ·  63s  ·  ends 7:06 of 10:00  ·  139 words ≈ 60s at 140 wpm]</a:t>
             </a:r>
           </a:p>
           <a:p/>
@@ -2301,7 +2301,7 @@
           <a:p>
             <a:r>
               <a:rPr sz="1200"/>
-              <a:t>[slide 9  ·  54s  ·  ends 7:53 of 10:00  ·  120 words ≈ 51s at 140 wpm]</a:t>
+              <a:t>[slide 9  ·  54s  ·  ends 8:00 of 10:00  ·  120 words ≈ 51s at 140 wpm]</a:t>
             </a:r>
           </a:p>
           <a:p/>
@@ -13316,7 +13316,7 @@
                 <a:ea typeface="Cambria" pitchFamily="34" charset="-122"/>
                 <a:cs typeface="Cambria" pitchFamily="34" charset="-120"/>
               </a:rPr>
-              <a:t>Identifiability is set by how many days a bird was</a:t>
+              <a:t>Identifiability tracks how many days a bird was</a:t>
             </a:r>
             <a:endParaRPr lang="en-US" sz="2500" dirty="0"/>
           </a:p>
@@ -13336,7 +13336,7 @@
                 <a:ea typeface="Cambria" pitchFamily="34" charset="-122"/>
                 <a:cs typeface="Cambria" pitchFamily="34" charset="-120"/>
               </a:rPr>
-              <a:t>photographed, not by how many photographs exist</a:t>
+              <a:t>photographed, not how many photographs exist</a:t>
             </a:r>
             <a:endParaRPr lang="en-US" sz="2500" dirty="0"/>
           </a:p>
@@ -14120,7 +14120,7 @@
                 <a:ea typeface="Calibri" pitchFamily="34" charset="-122"/>
                 <a:cs typeface="Calibri" pitchFamily="34" charset="-120"/>
               </a:rPr>
-              <a:t>Each figure is the fraction of that bird's photographs identified correctly. Illustration, not evidence — the evidence is the partial rank correlation across all 35 birds: holding photograph count constant, sessions still predict accuracy (ρ = 0.518, P = 0.002); holding sessions constant, photograph count does not (ρ = 0.224, P = 0.203).</a:t>
+              <a:t>Each figure is the fraction of that bird's photographs identified correctly. Illustration, not evidence — the evidence is the partial rank correlation across all 35 birds: holding photograph count constant, sessions still predict accuracy (ρ = 0.518, P = 0.002); holding sessions constant, photograph count does not reach significance (ρ = 0.224, P = 0.203) — which does not exclude a modest effect this study is underpowered to detect.</a:t>
             </a:r>
             <a:endParaRPr lang="en-US" sz="1000" dirty="0"/>
           </a:p>
@@ -15335,7 +15335,7 @@
                 <a:ea typeface="Calibri" pitchFamily="34" charset="-122"/>
                 <a:cs typeface="Calibri" pitchFamily="34" charset="-120"/>
               </a:rPr>
-              <a:t>A five-candidate shortlist still contains the right bird 78.2% of the time (35 candidates).</a:t>
+              <a:t>The deployed configuration's five-candidate shortlist contains the right bird 78.2% of the time (35 candidates; softmax + strong is better at rank-5, at 0.809).</a:t>
             </a:r>
             <a:endParaRPr lang="en-US" sz="1050" dirty="0"/>
           </a:p>
@@ -16418,7 +16418,7 @@
                 <a:ea typeface="Calibri" pitchFamily="34" charset="-122"/>
                 <a:cs typeface="Calibri" pitchFamily="34" charset="-120"/>
               </a:rPr>
-              <a:t>Smew and Skunk have one and two photographs. They were never trained on — they are in the gallery, and they are searchable. A softmax head would need a new output layer and a full retrain for each arrival.</a:t>
+              <a:t>Smew and Skunk have one and two photographs. Never trained on, in the gallery, searchable. A softmax head would need a new output layer and a full retrain for each arrival. The deployed model has no held-out partition of its own — the cross-validated 0.559 is its estimate.</a:t>
             </a:r>
             <a:endParaRPr lang="en-US" sz="1150" dirty="0"/>
           </a:p>

--- a/presentation/final_presentation.pptx
+++ b/presentation/final_presentation.pptx
@@ -521,7 +521,7 @@
           <a:p>
             <a:r>
               <a:rPr sz="1200"/>
-              <a:t>[slide 1  ·  20s  ·  ends 0:20 of 10:00  ·  40 words ≈ 17s at 140 wpm]</a:t>
+              <a:t>[slide 1  ·  20s  ·  ends 0:20 of 10:00  ·  40 words ≈ 18s at 130 wpm]</a:t>
             </a:r>
           </a:p>
           <a:p/>
@@ -615,14 +615,14 @@
           <a:p>
             <a:r>
               <a:rPr sz="1200"/>
-              <a:t>[slide 10  ·  39s  ·  ends 8:39 of 10:00  ·  85 words ≈ 36s at 140 wpm]</a:t>
+              <a:t>[slide 10  ·  41s  ·  ends 8:22 of 10:00  ·  84 words ≈ 39s at 130 wpm]</a:t>
             </a:r>
           </a:p>
           <a:p/>
           <a:p>
             <a:r>
               <a:rPr sz="1200"/>
-              <a:t>Four things this does not show, quickly. There is no end-to-end test — no detector in the deployed path, so every claim is conditional on inputs like the archive. The operating threshold was transferred from the cross-validated models, not recalibrated, and it has never been tested against blurred or rear-facing photographs. The evaluated set is the better-photographed 43% of the colony, and the rest are probably harder. And there is one backbone and one reconstructed session rule — so 0.559 is not an upper limit.</a:t>
+              <a:t>Four things this does not show, quickly. There is no end-to-end test — no detector in the deployed path, so every claim is conditional on inputs like the archive. The operating threshold was transferred from the cross-validated models, not recalibrated, and has never been tested against blurred or rear-facing photographs. The evaluated set is the better-photographed 43% of the colony, and the rest are probably harder. And there is one backbone and one reconstructed session rule — so 0.559 is not an upper limit.</a:t>
             </a:r>
           </a:p>
         </p:txBody>
@@ -709,14 +709,14 @@
           <a:p>
             <a:r>
               <a:rPr sz="1200"/>
-              <a:t>[slide 11  ·  46s  ·  ends 9:25 of 10:00  ·  101 words ≈ 43s at 140 wpm]</a:t>
+              <a:t>[slide 11  ·  45s  ·  ends 9:07 of 10:00  ·  93 words ≈ 43s at 130 wpm]</a:t>
             </a:r>
           </a:p>
           <a:p/>
           <a:p>
             <a:r>
               <a:rPr sz="1200"/>
-              <a:t>So the recommendation is a collection protocol, not an architecture. Applying my session rule to the whole colony: 335 sessions across 81 birds, very unevenly spread. Only 28 reach four separate occasions; 53 fall short. Four is provisional — I grouped four, five and six sessions together and did not assign effort experimentally, so it is a starting point for prospective validation, not a validated threshold. But it is costable: 116 further individual encounters, about eight outings at fifteen birds each, on different days, deliberately varying viewpoint, light and distance. Eight mornings with a camera is something a zoo can approve.</a:t>
+              <a:t>So the recommendation is a collection protocol, not an architecture. Applying my session rule to the whole colony: 335 sessions across 81 birds, very unevenly spread. Only 28 reach four separate occasions; 53 fall short. Four is provisional — I grouped four, five and six sessions together and did not assign effort experimentally, so it is a starting point, not a validated threshold. But it is costable: 116 further encounters, about eight outings, on different days, deliberately varying viewpoint, light and distance. Eight mornings with a camera is something a zoo can approve.</a:t>
             </a:r>
           </a:p>
         </p:txBody>
@@ -803,7 +803,7 @@
           <a:p>
             <a:r>
               <a:rPr sz="1200"/>
-              <a:t>[slide 12  ·  33s  ·  ends 9:58 of 10:00  ·  70 words ≈ 30s at 140 wpm]</a:t>
+              <a:t>[slide 12  ·  34s  ·  ends 9:41 of 10:00  ·  70 words ≈ 32s at 130 wpm]</a:t>
             </a:r>
           </a:p>
           <a:p/>
@@ -1549,14 +1549,14 @@
           <a:p>
             <a:r>
               <a:rPr sz="1200"/>
-              <a:t>[slide 2  ·  43s  ·  ends 1:03 of 10:00  ·  93 words ≈ 40s at 140 wpm]</a:t>
+              <a:t>[slide 2  ·  44s  ·  ends 1:04 of 10:00  ·  92 words ≈ 42s at 130 wpm]</a:t>
             </a:r>
           </a:p>
           <a:p/>
           <a:p>
             <a:r>
               <a:rPr sz="1200"/>
-              <a:t>London Zoo tells its 81 Humboldt penguins apart with coloured flipper bands, read off this laminated sheet. Bands work, but they can be hidden by posture or by another bird — and in king penguins, ten years of banding cost survival and breeding success. That does not transfer directly to captive Humboldts; it just says a marker is not automatically neutral. The alternative is already on the bird: African penguins use their ventral dot patterns to recognise each other, so I am asking a model to read a cue the species already reads.</a:t>
+              <a:t>London Zoo tells its 81 Humboldt penguins apart with coloured flipper bands, read off this laminated sheet. Bands work, but they can be hidden by posture or another bird — and in king penguins, ten years of banding cost survival and breeding success. That does not transfer directly to captive Humboldts; it just says a marker is not automatically neutral. The alternative is already on the bird: African penguins use their ventral dot patterns to recognise each other, so I am asking a model to read a cue the species already reads.</a:t>
             </a:r>
           </a:p>
         </p:txBody>
@@ -1737,14 +1737,14 @@
           <a:p>
             <a:r>
               <a:rPr sz="1200"/>
-              <a:t>[slide 3  ·  47s  ·  ends 1:50 of 10:00  ·  103 words ≈ 44s at 140 wpm]</a:t>
+              <a:t>[slide 3  ·  43s  ·  ends 1:47 of 10:00  ·  88 words ≈ 41s at 130 wpm]</a:t>
             </a:r>
           </a:p>
           <a:p/>
           <a:p>
             <a:r>
               <a:rPr sz="1200"/>
-              <a:t>2,307 photographs of all 81 birds, taken by volunteers during husbandry, not to a research protocol — counts run from 1 to 291. Thirty-five birds clear both inclusion rules, and those are the birds I evaluate: the better-photographed 43% of the colony. The other 46 are never queries — they are gallery distractors and, later, genuine strangers. The definition at the bottom is the one that matters. A capture session is one photographic encounter with one bird, inferred from the camera's own frame numbering and checked against EXIF. Frames inside a session share lighting, background and posture, so they are not independent samples.</a:t>
+              <a:t>2,307 photographs of all 81 birds, taken by volunteers during husbandry, not to a research protocol — counts run from 1 to 291. Thirty-five birds clear both inclusion rules: the better-photographed 43% of the colony. The other 46 are never queries; they are gallery distractors and, later, genuine strangers. The definition at the bottom is what matters. A capture session is one photographic encounter with one bird, inferred from the camera's frame numbering. Frames inside a session share lighting, background and posture, so they are not independent samples.</a:t>
             </a:r>
           </a:p>
         </p:txBody>
@@ -1831,14 +1831,14 @@
           <a:p>
             <a:r>
               <a:rPr sz="1200"/>
-              <a:t>[slide 4  ·  72s  ·  ends 3:02 of 10:00  ·  162 words ≈ 69s at 140 wpm]</a:t>
+              <a:t>[slide 4  ·  60s  ·  ends 2:47 of 10:00  ·  125 words ≈ 58s at 130 wpm]</a:t>
             </a:r>
           </a:p>
           <a:p/>
           <a:p>
             <a:r>
               <a:rPr sz="1200"/>
-              <a:t>Here is the experiment the whole project turns on. I held everything constant — the same 35 birds, the same 1,743 photographs, the same number of photographs per bird on each side, the same training recipe — and changed exactly one thing: whether a test photograph is allowed to come from a capture session the gallery has already seen. Under the conventional random split, macro rank-one accuracy is 0.920. Under the session-disjoint split, it is 0.389. That is an inflation of 0.531 attributable to the partitioning rule alone. Rank-five and nearest-neighbour move the same way, so this is not a quirk of one metric. And I can show the entanglement without reference to any model: 97.8% of the randomly assigned test photographs shared a capture session with a gallery photograph, and 13.8% had a near-duplicate — found with perceptual hashing, pixel correlation and EXIF timestamps. So the random split was measuring recognition of a familiar encounter, not identification on a new occasion.</a:t>
+              <a:t>Here is the experiment the whole project turns on. Birds, photographs, per-bird counts and training recipe all held fixed, and exactly one thing changed: whether a test photograph may come from a capture session the gallery has already seen. Under the conventional random split, rank-one accuracy — every bird weighted equally — is 0.920. Under the session-disjoint split, it is 0.389: an inflation of 0.531 attributable to the partitioning rule alone. Rank-five and nearest-neighbour move with it. And I can show the entanglement without reference to any model: 97.8% of the randomly assigned test photographs shared a capture session with a gallery photograph, and 13.8% had a near-duplicate. So the random split was measuring recognition of a familiar encounter, not identification on a new occasion.</a:t>
             </a:r>
           </a:p>
         </p:txBody>
@@ -1925,14 +1925,14 @@
           <a:p>
             <a:r>
               <a:rPr sz="1200"/>
-              <a:t>[slide 5  ·  49s  ·  ends 3:51 of 10:00  ·  108 words ≈ 46s at 140 wpm]</a:t>
+              <a:t>[slide 5  ·  47s  ·  ends 3:34 of 10:00  ·  97 words ≈ 45s at 130 wpm]</a:t>
             </a:r>
           </a:p>
           <a:p/>
           <a:p>
             <a:r>
               <a:rPr sz="1200"/>
-              <a:t>So what replaces it. Three things. First, session-wise five-fold cross-validation: complete sessions are dealt to folds, so no session is ever split, and every one of the 1,743 photographs is tested exactly once by a model that never saw its session. That is not a claim in prose — the evaluation script asserts it and refuses to run without the session map. Second, every number is macro, because success on the most-photographed penguin cannot compensate for failing on another colony member. Third, the intervals resample capture sessions rather than photographs, and apply the same resampled sessions to both arms of a comparison — so these are paired differences.</a:t>
+              <a:t>So what replaces it. Three things. First, session-wise five-fold cross-validation: complete sessions are dealt to folds, so no session is ever split, and every one of the 1,743 photographs is tested exactly once by a model that never saw its session. That is not a claim in prose — the evaluation script asserts it and refuses to run without the session map. Second, every number is macro: one bird, one vote. Third, the intervals resample capture sessions rather than photographs, and apply the same resampled sessions to both arms of a comparison, so these are paired differences.</a:t>
             </a:r>
           </a:p>
         </p:txBody>
@@ -2019,14 +2019,14 @@
           <a:p>
             <a:r>
               <a:rPr sz="1200"/>
-              <a:t>[slide 6  ·  57s  ·  ends 4:48 of 10:00  ·  127 words ≈ 54s at 140 wpm]</a:t>
+              <a:t>[slide 6  ·  55s  ·  ends 4:29 of 10:00  ·  115 words ≈ 53s at 130 wpm]</a:t>
             </a:r>
           </a:p>
           <a:p/>
           <a:p>
             <a:r>
               <a:rPr sz="1200"/>
-              <a:t>Under that protocol I ran a full two-by-two: objective crossed with augmentation, five folds each, twenty runs. The baseline scores 0.390, numerically close to the single-split 0.389 — though those runs used different recipes, so I would not read that as a validation. Strong augmentation is worth plus 0.141; ArcFace alone plus 0.096. They are sub-additive: once strong augmentation is there, ArcFace adds only 0.029 and that interval crosses zero, so at 35 candidates I cannot claim the loss is doing significant work. But widen the gallery to all 81 colony members — the right-hand panel — and ArcFace is worth plus 0.116, clear of zero, because metric learning shapes the embedding geometry rather than the top-one call. That is the regime a real colony is in.</a:t>
+              <a:t>Under that protocol I ran a full two-by-two: objective crossed with augmentation, five folds each, twenty runs. The baseline scores 0.390, close to the single-split 0.389 — but different recipes, so not a validation. Strong augmentation is worth plus 0.141; ArcFace alone plus 0.096. They are sub-additive: once strong augmentation is there, ArcFace adds only 0.029 and that interval crosses zero, so at 35 candidates I cannot claim the loss is doing significant work. Widen the gallery to all 81 — the right-hand panel — and ArcFace is worth plus 0.116, clear of zero, because metric learning shapes the embedding geometry rather than the top-one call. That is the regime a real colony is in.</a:t>
             </a:r>
           </a:p>
         </p:txBody>
@@ -2113,14 +2113,14 @@
           <a:p>
             <a:r>
               <a:rPr sz="1200"/>
-              <a:t>[slide 7  ·  75s  ·  ends 6:03 of 10:00  ·  167 words ≈ 72s at 140 wpm]</a:t>
+              <a:t>[slide 7  ·  73s  ·  ends 5:42 of 10:00  ·  154 words ≈ 71s at 130 wpm]</a:t>
             </a:r>
           </a:p>
           <a:p/>
           <a:p>
             <a:r>
               <a:rPr sz="1200"/>
-              <a:t>This is the finding I care most about. Group the 35 birds by how many separate occasions they were photographed on: the eight with three sessions score 0.186; the thirteen with four to six score 0.618; the fourteen with seven or more score 0.717. The same ordering holds in all four training configurations. Nicki and Gonzo make it concrete: 53 photographs against 52, but three sessions against thirteen, and 19% against 83%. That pair is an illustration, not the evidence. Sessions and photograph count are correlated at rho 0.663, so I partial one out. Sessions survive at 0.518, P equals 0.002; photograph count falls to 0.224 and does not reach significance — with 35 birds I cannot exclude a modest photograph effect, only say sessions are the stronger one. One caution I will give you myself: a three-session bird's prototype is built from only one or two gallery sessions, so part of this gradient is design rather than biology. It still points the same way for collection.</a:t>
+              <a:t>This is the finding I care most about. Group the 35 birds by how many separate occasions they were photographed on: three sessions, 0.186; four to six, 0.618; seven or more, 0.717. The same ordering holds in all four configurations. Nicki and Gonzo make it concrete: 53 photographs against 52, but three sessions against thirteen, and 19% against 83%. That pair is an illustration, not the evidence. Sessions and photograph count are correlated at rho 0.663, so I partial one out. Sessions survive at 0.518; photograph count falls to 0.224 and does not reach significance — with 35 birds I cannot exclude a modest photograph effect, only say sessions are the stronger one. And one caution I will give you myself: a three-session bird's prototype is built from one or two gallery sessions, so part of this gradient is my design rather than the birds. It points the same way for collection either way.</a:t>
             </a:r>
           </a:p>
         </p:txBody>
@@ -2207,14 +2207,14 @@
           <a:p>
             <a:r>
               <a:rPr sz="1200"/>
-              <a:t>[slide 8  ·  63s  ·  ends 7:06 of 10:00  ·  139 words ≈ 60s at 140 wpm]</a:t>
+              <a:t>[slide 8  ·  64s  ·  ends 6:46 of 10:00  ·  135 words ≈ 62s at 130 wpm]</a:t>
             </a:r>
           </a:p>
           <a:p/>
           <a:p>
             <a:r>
               <a:rPr sz="1200"/>
-              <a:t>I want to be the one who tells you how good this is not. The leaky number was 0.920. Honestly evaluated, the best of four configurations reaches 0.559 against 35 candidates. Rank the same queries against all 81 colony identities and it falls to 0.477 — that is how often the right bird outranks eighty alternatives, not accuracy across all 81 birds. Then the real test: the system must be able to refuse. Using the 564 photographs of 46 birds the models never trained on, at a one percent false-accept rate only 12.3% of enrolled birds are both accepted and correctly named. Had I simulated the strangers instead — the conventional shortcut — I would have reported 0.230, an overstatement of 87%. Both numbers come from the same run. The number that describes deployment readiness is 0.123, not 0.559.</a:t>
+              <a:t>I want to be the one who tells you how good this is not. These are the same five models asked three questions. Against 35 candidates, closed set, the best configuration reaches 0.559. Rank the same queries against all 81 colony identities and it falls to 0.477 — how often the right bird outranks eighty alternatives, not accuracy across all 81 birds. Then the real test: it must be able to refuse. Using the 564 photographs of 46 birds the models never trained on, at a one percent false-accept rate only 12.3% of photographs of enrolled birds are both accepted and correctly named. Simulate the strangers instead — the conventional shortcut — and it reports 0.230, an 87% overstatement. Both come from the same run. The number that describes deployment readiness is 0.123, not 0.559.</a:t>
             </a:r>
           </a:p>
         </p:txBody>
@@ -2301,14 +2301,14 @@
           <a:p>
             <a:r>
               <a:rPr sz="1200"/>
-              <a:t>[slide 9  ·  54s  ·  ends 8:00 of 10:00  ·  120 words ≈ 51s at 140 wpm]</a:t>
+              <a:t>[slide 9  ·  55s  ·  ends 7:41 of 10:00  ·  115 words ≈ 53s at 130 wpm]</a:t>
             </a:r>
           </a:p>
           <a:p/>
           <a:p>
             <a:r>
               <a:rPr sz="1200"/>
-              <a:t>What exists is a retrieval system, not a classifier. A photograph becomes a 512-dimensional vector, compared by cosine similarity against one prototype per enrolled identity. I chose retrieval for two properties a softmax head does not have. First, enrolment without retraining: the deployed model trained on 79 birds, but the gallery holds all 81. Smew and Skunk, with one and two photographs, were never trained on — and they are searchable. Second, a principled way to say I don't know. A softmax head must spread probability over the identities it knows, so it names something whatever walks past. Here, below the threshold the answer is a refusal, and a narrow top-two margin returns a shortlist for the keeper to confirm.</a:t>
+              <a:t>What exists is a retrieval system, not a classifier. A photograph becomes a 512-dimensional vector, compared by cosine similarity against one prototype per enrolled identity. I chose retrieval for two properties a softmax head does not have. First, enrolment without retraining: the deployed model trained on 79 birds, but the gallery holds all 81. Smew and Skunk, with one and two photographs, were never trained on — and they are searchable. Second, a principled way to say I don't know. A softmax head must name something, whatever walks past. Here, below 0.938 — that five-per-cent point — the answer is a refusal, and a narrow top-two margin returns a shortlist for the keeper to confirm.</a:t>
             </a:r>
           </a:p>
         </p:txBody>
@@ -12455,8 +12455,8 @@
         </p:blipFill>
         <p:spPr>
           <a:xfrm>
-            <a:off x="566928" y="1853583"/>
-            <a:ext cx="7811719" cy="3653754"/>
+            <a:off x="639697" y="1783080"/>
+            <a:ext cx="7666182" cy="3794760"/>
           </a:xfrm>
           <a:prstGeom prst="rect">
             <a:avLst/>
@@ -13316,7 +13316,7 @@
                 <a:ea typeface="Cambria" pitchFamily="34" charset="-122"/>
                 <a:cs typeface="Cambria" pitchFamily="34" charset="-120"/>
               </a:rPr>
-              <a:t>Identifiability tracks how many days a bird was</a:t>
+              <a:t>Identifiability tracks how many separate occasions a bird</a:t>
             </a:r>
             <a:endParaRPr lang="en-US" sz="2500" dirty="0"/>
           </a:p>
@@ -13336,7 +13336,7 @@
                 <a:ea typeface="Cambria" pitchFamily="34" charset="-122"/>
                 <a:cs typeface="Cambria" pitchFamily="34" charset="-120"/>
               </a:rPr>
-              <a:t>photographed, not how many photographs exist</a:t>
+              <a:t>was photographed on, not how many photographs exist</a:t>
             </a:r>
             <a:endParaRPr lang="en-US" sz="2500" dirty="0"/>
           </a:p>
@@ -13358,8 +13358,8 @@
         </p:blipFill>
         <p:spPr>
           <a:xfrm>
-            <a:off x="566928" y="1935099"/>
-            <a:ext cx="7040880" cy="3536442"/>
+            <a:off x="566928" y="1781480"/>
+            <a:ext cx="7040880" cy="3843680"/>
           </a:xfrm>
           <a:prstGeom prst="rect">
             <a:avLst/>
@@ -14284,7 +14284,7 @@
         <p:spPr>
           <a:xfrm>
             <a:off x="566928" y="384048"/>
-            <a:ext cx="11057839" cy="658368"/>
+            <a:ext cx="11057839" cy="1097280"/>
           </a:xfrm>
           <a:prstGeom prst="rect">
             <a:avLst/>
@@ -14303,7 +14303,7 @@
               <a:buNone/>
             </a:pPr>
             <a:r>
-              <a:rPr lang="en-US" sz="2700" b="1" dirty="0">
+              <a:rPr lang="en-US" sz="2500" b="1" dirty="0">
                 <a:solidFill>
                   <a:srgbClr val="0E2A47"/>
                 </a:solidFill>
@@ -14311,190 +14311,42 @@
                 <a:ea typeface="Cambria" pitchFamily="34" charset="-122"/>
                 <a:cs typeface="Cambria" pitchFamily="34" charset="-120"/>
               </a:rPr>
-              <a:t>The more honest the question, the lower the answer</a:t>
-            </a:r>
-            <a:endParaRPr lang="en-US" sz="2700" dirty="0"/>
-          </a:p>
-        </p:txBody>
-      </p:sp>
-      <p:sp>
-        <p:nvSpPr>
-          <p:cNvPr id="4" name="Shape 2"/>
-          <p:cNvSpPr/>
-          <p:nvPr/>
-        </p:nvSpPr>
-        <p:spPr>
-          <a:xfrm>
-            <a:off x="566928" y="1325880"/>
-            <a:ext cx="1618488" cy="3291840"/>
-          </a:xfrm>
-          <a:prstGeom prst="rect">
-            <a:avLst/>
-          </a:prstGeom>
-          <a:solidFill>
-            <a:srgbClr val="A9AEB5"/>
-          </a:solidFill>
-          <a:ln w="12700">
-            <a:solidFill>
-              <a:srgbClr val="A9AEB5"/>
-            </a:solidFill>
-            <a:prstDash val="solid"/>
-          </a:ln>
-        </p:spPr>
-      </p:sp>
-      <p:sp>
-        <p:nvSpPr>
-          <p:cNvPr id="5" name="Text 3"/>
-          <p:cNvSpPr txBox="1"/>
-          <p:nvPr/>
-        </p:nvSpPr>
-        <p:spPr>
-          <a:xfrm>
-            <a:off x="566928" y="905256"/>
-            <a:ext cx="1618488" cy="384048"/>
-          </a:xfrm>
-          <a:prstGeom prst="rect">
-            <a:avLst/>
-          </a:prstGeom>
-          <a:noFill/>
-          <a:ln/>
-        </p:spPr>
-        <p:txBody>
-          <a:bodyPr wrap="square" lIns="0" tIns="0" rIns="0" bIns="0" rtlCol="0" anchor="b"/>
-          <a:lstStyle/>
-          <a:p>
-            <a:pPr algn="ctr" indent="0" marL="0">
-              <a:buNone/>
-            </a:pPr>
-            <a:r>
-              <a:rPr lang="en-US" sz="2400" b="1" dirty="0">
-                <a:solidFill>
-                  <a:srgbClr val="A9AEB5"/>
+              <a:t>One set of models, three questions — and only one of them</a:t>
+            </a:r>
+            <a:endParaRPr lang="en-US" sz="2500" dirty="0"/>
+          </a:p>
+          <a:p>
+            <a:pPr algn="l" indent="0" marL="0">
+              <a:lnSpc>
+                <a:spcPct val="95000"/>
+              </a:lnSpc>
+              <a:buNone/>
+            </a:pPr>
+            <a:r>
+              <a:rPr lang="en-US" sz="2500" b="1" dirty="0">
+                <a:solidFill>
+                  <a:srgbClr val="0E2A47"/>
                 </a:solidFill>
                 <a:latin typeface="Cambria" pitchFamily="34" charset="0"/>
                 <a:ea typeface="Cambria" pitchFamily="34" charset="-122"/>
                 <a:cs typeface="Cambria" pitchFamily="34" charset="-120"/>
               </a:rPr>
-              <a:t>0.920</a:t>
-            </a:r>
-            <a:endParaRPr lang="en-US" sz="2400" dirty="0"/>
-          </a:p>
-        </p:txBody>
-      </p:sp>
-      <p:sp>
-        <p:nvSpPr>
-          <p:cNvPr id="6" name="Text 4"/>
-          <p:cNvSpPr txBox="1"/>
-          <p:nvPr/>
-        </p:nvSpPr>
-        <p:spPr>
-          <a:xfrm>
-            <a:off x="566928" y="4709160"/>
-            <a:ext cx="1618488" cy="566928"/>
-          </a:xfrm>
-          <a:prstGeom prst="rect">
-            <a:avLst/>
-          </a:prstGeom>
-          <a:noFill/>
-          <a:ln/>
-        </p:spPr>
-        <p:txBody>
-          <a:bodyPr wrap="square" lIns="0" tIns="0" rIns="0" bIns="0" rtlCol="0" anchor="t"/>
-          <a:lstStyle/>
-          <a:p>
-            <a:pPr algn="ctr" indent="0" marL="0">
-              <a:lnSpc>
-                <a:spcPct val="95000"/>
-              </a:lnSpc>
-              <a:buNone/>
-            </a:pPr>
-            <a:r>
-              <a:rPr lang="en-US" sz="1200" b="1" dirty="0">
-                <a:solidFill>
-                  <a:srgbClr val="24303C"/>
-                </a:solidFill>
-                <a:latin typeface="Calibri" pitchFamily="34" charset="0"/>
-                <a:ea typeface="Calibri" pitchFamily="34" charset="-122"/>
-                <a:cs typeface="Calibri" pitchFamily="34" charset="-120"/>
-              </a:rPr>
-              <a:t>Random split</a:t>
-            </a:r>
-            <a:endParaRPr lang="en-US" sz="1200" dirty="0"/>
-          </a:p>
-        </p:txBody>
-      </p:sp>
-      <p:sp>
-        <p:nvSpPr>
-          <p:cNvPr id="7" name="Text 5"/>
-          <p:cNvSpPr txBox="1"/>
-          <p:nvPr/>
-        </p:nvSpPr>
-        <p:spPr>
-          <a:xfrm>
-            <a:off x="566928" y="5294376"/>
-            <a:ext cx="1618488" cy="640080"/>
-          </a:xfrm>
-          <a:prstGeom prst="rect">
-            <a:avLst/>
-          </a:prstGeom>
-          <a:noFill/>
-          <a:ln/>
-        </p:spPr>
-        <p:txBody>
-          <a:bodyPr wrap="square" lIns="0" tIns="0" rIns="0" bIns="0" rtlCol="0" anchor="t"/>
-          <a:lstStyle/>
-          <a:p>
-            <a:pPr algn="ctr" indent="0" marL="0">
-              <a:lnSpc>
-                <a:spcPct val="95000"/>
-              </a:lnSpc>
-              <a:buNone/>
-            </a:pPr>
-            <a:r>
-              <a:rPr lang="en-US" sz="950" dirty="0">
-                <a:solidFill>
-                  <a:srgbClr val="6E7681"/>
-                </a:solidFill>
-                <a:latin typeface="Calibri" pitchFamily="34" charset="0"/>
-                <a:ea typeface="Calibri" pitchFamily="34" charset="-122"/>
-                <a:cs typeface="Calibri" pitchFamily="34" charset="-120"/>
-              </a:rPr>
-              <a:t>leaky — the error,</a:t>
-            </a:r>
-            <a:endParaRPr lang="en-US" sz="950" dirty="0"/>
-          </a:p>
-          <a:p>
-            <a:pPr algn="ctr" indent="0" marL="0">
-              <a:lnSpc>
-                <a:spcPct val="95000"/>
-              </a:lnSpc>
-              <a:buNone/>
-            </a:pPr>
-            <a:r>
-              <a:rPr lang="en-US" sz="950" dirty="0">
-                <a:solidFill>
-                  <a:srgbClr val="6E7681"/>
-                </a:solidFill>
-                <a:latin typeface="Calibri" pitchFamily="34" charset="0"/>
-                <a:ea typeface="Calibri" pitchFamily="34" charset="-122"/>
-                <a:cs typeface="Calibri" pitchFamily="34" charset="-120"/>
-              </a:rPr>
-              <a:t>not the achievement</a:t>
-            </a:r>
-            <a:endParaRPr lang="en-US" sz="950" dirty="0"/>
-          </a:p>
-        </p:txBody>
-      </p:sp>
-      <p:sp>
-        <p:nvSpPr>
-          <p:cNvPr id="8" name="Shape 6"/>
+              <a:t>describes deployment</a:t>
+            </a:r>
+            <a:endParaRPr lang="en-US" sz="2500" dirty="0"/>
+          </a:p>
+        </p:txBody>
+      </p:sp>
+      <p:sp>
+        <p:nvSpPr>
+          <p:cNvPr id="4" name="Shape 2"/>
           <p:cNvSpPr/>
           <p:nvPr/>
         </p:nvSpPr>
         <p:spPr>
           <a:xfrm>
-            <a:off x="2313432" y="2617569"/>
-            <a:ext cx="1618488" cy="2000151"/>
+            <a:off x="566928" y="1874520"/>
+            <a:ext cx="2200656" cy="2606040"/>
           </a:xfrm>
           <a:prstGeom prst="rect">
             <a:avLst/>
@@ -14512,14 +14364,14 @@
       </p:sp>
       <p:sp>
         <p:nvSpPr>
-          <p:cNvPr id="9" name="Text 7"/>
-          <p:cNvSpPr txBox="1"/>
-          <p:nvPr/>
-        </p:nvSpPr>
-        <p:spPr>
-          <a:xfrm>
-            <a:off x="2313432" y="2196945"/>
-            <a:ext cx="1618488" cy="384048"/>
+          <p:cNvPr id="5" name="Text 3"/>
+          <p:cNvSpPr txBox="1"/>
+          <p:nvPr/>
+        </p:nvSpPr>
+        <p:spPr>
+          <a:xfrm>
+            <a:off x="566928" y="1453896"/>
+            <a:ext cx="2200656" cy="384048"/>
           </a:xfrm>
           <a:prstGeom prst="rect">
             <a:avLst/>
@@ -14551,14 +14403,14 @@
       </p:sp>
       <p:sp>
         <p:nvSpPr>
-          <p:cNvPr id="10" name="Text 8"/>
-          <p:cNvSpPr txBox="1"/>
-          <p:nvPr/>
-        </p:nvSpPr>
-        <p:spPr>
-          <a:xfrm>
-            <a:off x="2313432" y="4709160"/>
-            <a:ext cx="1618488" cy="566928"/>
+          <p:cNvPr id="6" name="Text 4"/>
+          <p:cNvSpPr txBox="1"/>
+          <p:nvPr/>
+        </p:nvSpPr>
+        <p:spPr>
+          <a:xfrm>
+            <a:off x="566928" y="4572000"/>
+            <a:ext cx="2200656" cy="566928"/>
           </a:xfrm>
           <a:prstGeom prst="rect">
             <a:avLst/>
@@ -14613,14 +14465,14 @@
       </p:sp>
       <p:sp>
         <p:nvSpPr>
-          <p:cNvPr id="11" name="Text 9"/>
-          <p:cNvSpPr txBox="1"/>
-          <p:nvPr/>
-        </p:nvSpPr>
-        <p:spPr>
-          <a:xfrm>
-            <a:off x="2313432" y="5294376"/>
-            <a:ext cx="1618488" cy="640080"/>
+          <p:cNvPr id="7" name="Text 5"/>
+          <p:cNvSpPr txBox="1"/>
+          <p:nvPr/>
+        </p:nvSpPr>
+        <p:spPr>
+          <a:xfrm>
+            <a:off x="566928" y="5157216"/>
+            <a:ext cx="2200656" cy="640080"/>
           </a:xfrm>
           <a:prstGeom prst="rect">
             <a:avLst/>
@@ -14647,7 +14499,7 @@
                 <a:ea typeface="Calibri" pitchFamily="34" charset="-122"/>
                 <a:cs typeface="Calibri" pitchFamily="34" charset="-120"/>
               </a:rPr>
-              <a:t>highest of four</a:t>
+              <a:t>the reference —</a:t>
             </a:r>
             <a:endParaRPr lang="en-US" sz="950" dirty="0"/>
           </a:p>
@@ -14667,6 +14519,26 @@
                 <a:ea typeface="Calibri" pitchFamily="34" charset="-122"/>
                 <a:cs typeface="Calibri" pitchFamily="34" charset="-120"/>
               </a:rPr>
+              <a:t>highest of the four</a:t>
+            </a:r>
+            <a:endParaRPr lang="en-US" sz="950" dirty="0"/>
+          </a:p>
+          <a:p>
+            <a:pPr algn="ctr" indent="0" marL="0">
+              <a:lnSpc>
+                <a:spcPct val="95000"/>
+              </a:lnSpc>
+              <a:buNone/>
+            </a:pPr>
+            <a:r>
+              <a:rPr lang="en-US" sz="950" dirty="0">
+                <a:solidFill>
+                  <a:srgbClr val="6E7681"/>
+                </a:solidFill>
+                <a:latin typeface="Calibri" pitchFamily="34" charset="0"/>
+                <a:ea typeface="Calibri" pitchFamily="34" charset="-122"/>
+                <a:cs typeface="Calibri" pitchFamily="34" charset="-120"/>
+              </a:rPr>
               <a:t>configurations</a:t>
             </a:r>
             <a:endParaRPr lang="en-US" sz="950" dirty="0"/>
@@ -14675,14 +14547,14 @@
       </p:sp>
       <p:sp>
         <p:nvSpPr>
-          <p:cNvPr id="12" name="Shape 10"/>
+          <p:cNvPr id="8" name="Shape 6"/>
           <p:cNvSpPr/>
           <p:nvPr/>
         </p:nvSpPr>
         <p:spPr>
           <a:xfrm>
-            <a:off x="4059936" y="2910973"/>
-            <a:ext cx="1618488" cy="1706747"/>
+            <a:off x="2895600" y="2256801"/>
+            <a:ext cx="2200656" cy="2223759"/>
           </a:xfrm>
           <a:prstGeom prst="rect">
             <a:avLst/>
@@ -14700,14 +14572,14 @@
       </p:sp>
       <p:sp>
         <p:nvSpPr>
-          <p:cNvPr id="13" name="Text 11"/>
-          <p:cNvSpPr txBox="1"/>
-          <p:nvPr/>
-        </p:nvSpPr>
-        <p:spPr>
-          <a:xfrm>
-            <a:off x="4059936" y="2490349"/>
-            <a:ext cx="1618488" cy="384048"/>
+          <p:cNvPr id="9" name="Text 7"/>
+          <p:cNvSpPr txBox="1"/>
+          <p:nvPr/>
+        </p:nvSpPr>
+        <p:spPr>
+          <a:xfrm>
+            <a:off x="2895600" y="1836177"/>
+            <a:ext cx="2200656" cy="384048"/>
           </a:xfrm>
           <a:prstGeom prst="rect">
             <a:avLst/>
@@ -14739,14 +14611,14 @@
       </p:sp>
       <p:sp>
         <p:nvSpPr>
-          <p:cNvPr id="14" name="Text 12"/>
-          <p:cNvSpPr txBox="1"/>
-          <p:nvPr/>
-        </p:nvSpPr>
-        <p:spPr>
-          <a:xfrm>
-            <a:off x="4059936" y="4709160"/>
-            <a:ext cx="1618488" cy="566928"/>
+          <p:cNvPr id="10" name="Text 8"/>
+          <p:cNvSpPr txBox="1"/>
+          <p:nvPr/>
+        </p:nvSpPr>
+        <p:spPr>
+          <a:xfrm>
+            <a:off x="2895600" y="4572000"/>
+            <a:ext cx="2200656" cy="566928"/>
           </a:xfrm>
           <a:prstGeom prst="rect">
             <a:avLst/>
@@ -14773,7 +14645,7 @@
                 <a:ea typeface="Calibri" pitchFamily="34" charset="-122"/>
                 <a:cs typeface="Calibri" pitchFamily="34" charset="-120"/>
               </a:rPr>
-              <a:t>All 81 colony</a:t>
+              <a:t>…now rank against</a:t>
             </a:r>
             <a:endParaRPr lang="en-US" sz="1200" dirty="0"/>
           </a:p>
@@ -14793,32 +14665,10 @@
                 <a:ea typeface="Calibri" pitchFamily="34" charset="-122"/>
                 <a:cs typeface="Calibri" pitchFamily="34" charset="-120"/>
               </a:rPr>
-              <a:t>candidates</a:t>
+              <a:t>all 81 colony</a:t>
             </a:r>
             <a:endParaRPr lang="en-US" sz="1200" dirty="0"/>
           </a:p>
-        </p:txBody>
-      </p:sp>
-      <p:sp>
-        <p:nvSpPr>
-          <p:cNvPr id="15" name="Text 13"/>
-          <p:cNvSpPr txBox="1"/>
-          <p:nvPr/>
-        </p:nvSpPr>
-        <p:spPr>
-          <a:xfrm>
-            <a:off x="4059936" y="5294376"/>
-            <a:ext cx="1618488" cy="640080"/>
-          </a:xfrm>
-          <a:prstGeom prst="rect">
-            <a:avLst/>
-          </a:prstGeom>
-          <a:noFill/>
-          <a:ln/>
-        </p:spPr>
-        <p:txBody>
-          <a:bodyPr wrap="square" lIns="0" tIns="0" rIns="0" bIns="0" rtlCol="0" anchor="t"/>
-          <a:lstStyle/>
           <a:p>
             <a:pPr algn="ctr" indent="0" marL="0">
               <a:lnSpc>
@@ -14827,18 +14677,40 @@
               <a:buNone/>
             </a:pPr>
             <a:r>
-              <a:rPr lang="en-US" sz="950" dirty="0">
-                <a:solidFill>
-                  <a:srgbClr val="6E7681"/>
-                </a:solidFill>
-                <a:latin typeface="Calibri" pitchFamily="34" charset="0"/>
-                <a:ea typeface="Calibri" pitchFamily="34" charset="-122"/>
-                <a:cs typeface="Calibri" pitchFamily="34" charset="-120"/>
-              </a:rPr>
-              <a:t>same queries, 46</a:t>
-            </a:r>
-            <a:endParaRPr lang="en-US" sz="950" dirty="0"/>
-          </a:p>
+              <a:rPr lang="en-US" sz="1200" b="1" dirty="0">
+                <a:solidFill>
+                  <a:srgbClr val="24303C"/>
+                </a:solidFill>
+                <a:latin typeface="Calibri" pitchFamily="34" charset="0"/>
+                <a:ea typeface="Calibri" pitchFamily="34" charset="-122"/>
+                <a:cs typeface="Calibri" pitchFamily="34" charset="-120"/>
+              </a:rPr>
+              <a:t>candidates</a:t>
+            </a:r>
+            <a:endParaRPr lang="en-US" sz="1200" dirty="0"/>
+          </a:p>
+        </p:txBody>
+      </p:sp>
+      <p:sp>
+        <p:nvSpPr>
+          <p:cNvPr id="11" name="Text 9"/>
+          <p:cNvSpPr txBox="1"/>
+          <p:nvPr/>
+        </p:nvSpPr>
+        <p:spPr>
+          <a:xfrm>
+            <a:off x="2895600" y="5157216"/>
+            <a:ext cx="2200656" cy="640080"/>
+          </a:xfrm>
+          <a:prstGeom prst="rect">
+            <a:avLst/>
+          </a:prstGeom>
+          <a:noFill/>
+          <a:ln/>
+        </p:spPr>
+        <p:txBody>
+          <a:bodyPr wrap="square" lIns="0" tIns="0" rIns="0" bIns="0" rtlCol="0" anchor="t"/>
+          <a:lstStyle/>
           <a:p>
             <a:pPr algn="ctr" indent="0" marL="0">
               <a:lnSpc>
@@ -14855,7 +14727,7 @@
                 <a:ea typeface="Calibri" pitchFamily="34" charset="-122"/>
                 <a:cs typeface="Calibri" pitchFamily="34" charset="-120"/>
               </a:rPr>
-              <a:t>identities added as</a:t>
+              <a:t>same 1,743 queries;</a:t>
             </a:r>
             <a:endParaRPr lang="en-US" sz="950" dirty="0"/>
           </a:p>
@@ -14875,22 +14747,42 @@
                 <a:ea typeface="Calibri" pitchFamily="34" charset="-122"/>
                 <a:cs typeface="Calibri" pitchFamily="34" charset="-120"/>
               </a:rPr>
-              <a:t>distractors</a:t>
+              <a:t>46 identities added</a:t>
             </a:r>
             <a:endParaRPr lang="en-US" sz="950" dirty="0"/>
           </a:p>
-        </p:txBody>
-      </p:sp>
-      <p:sp>
-        <p:nvSpPr>
-          <p:cNvPr id="16" name="Shape 14"/>
+          <a:p>
+            <a:pPr algn="ctr" indent="0" marL="0">
+              <a:lnSpc>
+                <a:spcPct val="95000"/>
+              </a:lnSpc>
+              <a:buNone/>
+            </a:pPr>
+            <a:r>
+              <a:rPr lang="en-US" sz="950" dirty="0">
+                <a:solidFill>
+                  <a:srgbClr val="6E7681"/>
+                </a:solidFill>
+                <a:latin typeface="Calibri" pitchFamily="34" charset="0"/>
+                <a:ea typeface="Calibri" pitchFamily="34" charset="-122"/>
+                <a:cs typeface="Calibri" pitchFamily="34" charset="-120"/>
+              </a:rPr>
+              <a:t>as distractors</a:t>
+            </a:r>
+            <a:endParaRPr lang="en-US" sz="950" dirty="0"/>
+          </a:p>
+        </p:txBody>
+      </p:sp>
+      <p:sp>
+        <p:nvSpPr>
+          <p:cNvPr id="12" name="Shape 10"/>
           <p:cNvSpPr/>
           <p:nvPr/>
         </p:nvSpPr>
         <p:spPr>
           <a:xfrm>
-            <a:off x="5806440" y="4177615"/>
-            <a:ext cx="1618488" cy="440105"/>
+            <a:off x="5224272" y="3907138"/>
+            <a:ext cx="2200656" cy="573422"/>
           </a:xfrm>
           <a:prstGeom prst="rect">
             <a:avLst/>
@@ -14908,14 +14800,14 @@
       </p:sp>
       <p:sp>
         <p:nvSpPr>
-          <p:cNvPr id="17" name="Text 15"/>
-          <p:cNvSpPr txBox="1"/>
-          <p:nvPr/>
-        </p:nvSpPr>
-        <p:spPr>
-          <a:xfrm>
-            <a:off x="5806440" y="3756991"/>
-            <a:ext cx="1618488" cy="384048"/>
+          <p:cNvPr id="13" name="Text 11"/>
+          <p:cNvSpPr txBox="1"/>
+          <p:nvPr/>
+        </p:nvSpPr>
+        <p:spPr>
+          <a:xfrm>
+            <a:off x="5224272" y="3486514"/>
+            <a:ext cx="2200656" cy="384048"/>
           </a:xfrm>
           <a:prstGeom prst="rect">
             <a:avLst/>
@@ -14947,14 +14839,14 @@
       </p:sp>
       <p:sp>
         <p:nvSpPr>
-          <p:cNvPr id="18" name="Text 16"/>
-          <p:cNvSpPr txBox="1"/>
-          <p:nvPr/>
-        </p:nvSpPr>
-        <p:spPr>
-          <a:xfrm>
-            <a:off x="5806440" y="4709160"/>
-            <a:ext cx="1618488" cy="566928"/>
+          <p:cNvPr id="14" name="Text 12"/>
+          <p:cNvSpPr txBox="1"/>
+          <p:nvPr/>
+        </p:nvSpPr>
+        <p:spPr>
+          <a:xfrm>
+            <a:off x="5224272" y="4572000"/>
+            <a:ext cx="2200656" cy="566928"/>
           </a:xfrm>
           <a:prstGeom prst="rect">
             <a:avLst/>
@@ -14981,7 +14873,7 @@
                 <a:ea typeface="Calibri" pitchFamily="34" charset="-122"/>
                 <a:cs typeface="Calibri" pitchFamily="34" charset="-120"/>
               </a:rPr>
-              <a:t>Strangers must be</a:t>
+              <a:t>…now strangers must</a:t>
             </a:r>
             <a:endParaRPr lang="en-US" sz="1200" dirty="0"/>
           </a:p>
@@ -15001,7 +14893,7 @@
                 <a:ea typeface="Calibri" pitchFamily="34" charset="-122"/>
                 <a:cs typeface="Calibri" pitchFamily="34" charset="-120"/>
               </a:rPr>
-              <a:t>refused 99% of</a:t>
+              <a:t>be refused 99% of</a:t>
             </a:r>
             <a:endParaRPr lang="en-US" sz="1200" dirty="0"/>
           </a:p>
@@ -15029,14 +14921,14 @@
       </p:sp>
       <p:sp>
         <p:nvSpPr>
-          <p:cNvPr id="19" name="Text 17"/>
-          <p:cNvSpPr txBox="1"/>
-          <p:nvPr/>
-        </p:nvSpPr>
-        <p:spPr>
-          <a:xfrm>
-            <a:off x="5806440" y="5294376"/>
-            <a:ext cx="1618488" cy="640080"/>
+          <p:cNvPr id="15" name="Text 13"/>
+          <p:cNvSpPr txBox="1"/>
+          <p:nvPr/>
+        </p:nvSpPr>
+        <p:spPr>
+          <a:xfrm>
+            <a:off x="5224272" y="5157216"/>
+            <a:ext cx="2200656" cy="640080"/>
           </a:xfrm>
           <a:prstGeom prst="rect">
             <a:avLst/>
@@ -15083,7 +14975,7 @@
                 <a:ea typeface="Calibri" pitchFamily="34" charset="-122"/>
                 <a:cs typeface="Calibri" pitchFamily="34" charset="-120"/>
               </a:rPr>
-              <a:t>against 564 photos of 46</a:t>
+              <a:t>against 564 photographs</a:t>
             </a:r>
             <a:endParaRPr lang="en-US" sz="950" dirty="0"/>
           </a:p>
@@ -15103,7 +14995,7 @@
                 <a:ea typeface="Calibri" pitchFamily="34" charset="-122"/>
                 <a:cs typeface="Calibri" pitchFamily="34" charset="-120"/>
               </a:rPr>
-              <a:t>never-trained birds</a:t>
+              <a:t>of 46 never-trained birds</a:t>
             </a:r>
             <a:endParaRPr lang="en-US" sz="950" dirty="0"/>
           </a:p>
@@ -15111,13 +15003,55 @@
       </p:sp>
       <p:sp>
         <p:nvSpPr>
-          <p:cNvPr id="20" name="Shape 18"/>
+          <p:cNvPr id="16" name="Text 14"/>
+          <p:cNvSpPr txBox="1"/>
+          <p:nvPr/>
+        </p:nvSpPr>
+        <p:spPr>
+          <a:xfrm>
+            <a:off x="566928" y="5870448"/>
+            <a:ext cx="6858000" cy="457200"/>
+          </a:xfrm>
+          <a:prstGeom prst="rect">
+            <a:avLst/>
+          </a:prstGeom>
+          <a:noFill/>
+          <a:ln/>
+        </p:spPr>
+        <p:txBody>
+          <a:bodyPr wrap="square" lIns="0" tIns="0" rIns="0" bIns="0" rtlCol="0" anchor="t"/>
+          <a:lstStyle/>
+          <a:p>
+            <a:pPr algn="l" indent="0" marL="0">
+              <a:lnSpc>
+                <a:spcPct val="95000"/>
+              </a:lnSpc>
+              <a:buNone/>
+            </a:pPr>
+            <a:r>
+              <a:rPr lang="en-US" sz="1050" dirty="0">
+                <a:solidFill>
+                  <a:srgbClr val="6E7681"/>
+                </a:solidFill>
+                <a:latin typeface="Calibri" pitchFamily="34" charset="0"/>
+                <a:ea typeface="Calibri" pitchFamily="34" charset="-122"/>
+                <a:cs typeface="Calibri" pitchFamily="34" charset="-120"/>
+              </a:rPr>
+              <a:t>Each of the two is one change away from the first, not a chain: the gallery grows, or strangers must be refused. All three come from the same five cross-validated models and are macro over the 35 individuals.</a:t>
+            </a:r>
+            <a:endParaRPr lang="en-US" sz="1050" dirty="0"/>
+          </a:p>
+        </p:txBody>
+      </p:sp>
+      <p:sp>
+        <p:nvSpPr>
+          <p:cNvPr id="17" name="Shape 15"/>
           <p:cNvSpPr/>
           <p:nvPr/>
         </p:nvSpPr>
         <p:spPr>
           <a:xfrm>
-            <a:off x="7772400" y="1371600"/>
+            <a:off x="7772400" y="1874520"/>
             <a:ext cx="3858768" cy="2286000"/>
           </a:xfrm>
           <a:prstGeom prst="roundRect">
@@ -15138,13 +15072,13 @@
       </p:sp>
       <p:sp>
         <p:nvSpPr>
-          <p:cNvPr id="21" name="Text 19"/>
-          <p:cNvSpPr txBox="1"/>
-          <p:nvPr/>
-        </p:nvSpPr>
-        <p:spPr>
-          <a:xfrm>
-            <a:off x="8001000" y="1536192"/>
+          <p:cNvPr id="18" name="Text 16"/>
+          <p:cNvSpPr txBox="1"/>
+          <p:nvPr/>
+        </p:nvSpPr>
+        <p:spPr>
+          <a:xfrm>
+            <a:off x="8001000" y="2039112"/>
             <a:ext cx="3401568" cy="274320"/>
           </a:xfrm>
           <a:prstGeom prst="rect">
@@ -15177,13 +15111,13 @@
       </p:sp>
       <p:sp>
         <p:nvSpPr>
-          <p:cNvPr id="22" name="Text 20"/>
-          <p:cNvSpPr txBox="1"/>
-          <p:nvPr/>
-        </p:nvSpPr>
-        <p:spPr>
-          <a:xfrm>
-            <a:off x="8001000" y="1865376"/>
+          <p:cNvPr id="19" name="Text 17"/>
+          <p:cNvSpPr txBox="1"/>
+          <p:nvPr/>
+        </p:nvSpPr>
+        <p:spPr>
+          <a:xfrm>
+            <a:off x="8001000" y="2368296"/>
             <a:ext cx="3401568" cy="1691640"/>
           </a:xfrm>
           <a:prstGeom prst="rect">
@@ -15219,13 +15153,13 @@
       </p:sp>
       <p:sp>
         <p:nvSpPr>
-          <p:cNvPr id="23" name="Text 21"/>
-          <p:cNvSpPr txBox="1"/>
-          <p:nvPr/>
-        </p:nvSpPr>
-        <p:spPr>
-          <a:xfrm>
-            <a:off x="7772400" y="3886200"/>
+          <p:cNvPr id="20" name="Text 18"/>
+          <p:cNvSpPr txBox="1"/>
+          <p:nvPr/>
+        </p:nvSpPr>
+        <p:spPr>
+          <a:xfrm>
+            <a:off x="7772400" y="4389120"/>
             <a:ext cx="3858768" cy="1234440"/>
           </a:xfrm>
           <a:prstGeom prst="rect">
@@ -15301,13 +15235,13 @@
       </p:sp>
       <p:sp>
         <p:nvSpPr>
-          <p:cNvPr id="24" name="Text 22"/>
-          <p:cNvSpPr txBox="1"/>
-          <p:nvPr/>
-        </p:nvSpPr>
-        <p:spPr>
-          <a:xfrm>
-            <a:off x="7772400" y="5257800"/>
+          <p:cNvPr id="21" name="Text 19"/>
+          <p:cNvSpPr txBox="1"/>
+          <p:nvPr/>
+        </p:nvSpPr>
+        <p:spPr>
+          <a:xfrm>
+            <a:off x="7772400" y="5669280"/>
             <a:ext cx="3858768" cy="457200"/>
           </a:xfrm>
           <a:prstGeom prst="rect">
@@ -15343,7 +15277,7 @@
       </p:sp>
       <p:sp>
         <p:nvSpPr>
-          <p:cNvPr id="25" name="Text 23"/>
+          <p:cNvPr id="22" name="Text 20"/>
           <p:cNvSpPr txBox="1"/>
           <p:nvPr/>
         </p:nvSpPr>
@@ -15382,7 +15316,7 @@
       </p:sp>
       <p:sp>
         <p:nvSpPr>
-          <p:cNvPr id="26" name="Text 24"/>
+          <p:cNvPr id="23" name="Text 21"/>
           <p:cNvSpPr txBox="1"/>
           <p:nvPr/>
         </p:nvSpPr>

--- a/presentation/final_presentation.pptx
+++ b/presentation/final_presentation.pptx
@@ -25,9 +25,10 @@
     <p:sldId id="273" r:id="rId19"/>
     <p:sldId id="274" r:id="rId20"/>
     <p:sldId id="275" r:id="rId21"/>
+    <p:sldId id="276" r:id="rId22"/>
   </p:sldIdLst>
   <p:notesMasterIdLst>
-    <p:notesMasterId r:id="rId22"/>
+    <p:notesMasterId r:id="rId23"/>
   </p:notesMasterIdLst>
   <p:sldSz cx="12192000" cy="6858000"/>
   <p:notesSz cx="6858000" cy="12192000"/>
@@ -896,10 +897,16 @@
           <a:lstStyle/>
           <a:p>
             <a:r>
-              <a:rPr lang="en-US" dirty="0"/>
-              <a:t/>
-            </a:r>
-            <a:endParaRPr lang="en-US" dirty="0"/>
+              <a:rPr sz="1200"/>
+              <a:t>[slide 13  ·  15s  ·  ends 9:56 of 10:00  ·  29 words ≈ 13s at 130 wpm]</a:t>
+            </a:r>
+          </a:p>
+          <a:p/>
+          <a:p>
+            <a:r>
+              <a:rPr sz="1200"/>
+              <a:t>Thank you. I am happy to take questions — and I have backup slides on the inclusion criteria, the open-set calibration, the training recipe and the full results table.</a:t>
+            </a:r>
           </a:p>
         </p:txBody>
       </p:sp>
@@ -984,16 +991,10 @@
           <a:lstStyle/>
           <a:p>
             <a:r>
-              <a:rPr sz="1200"/>
-              <a:t>[backup slide — not part of the 10 minutes]</a:t>
-            </a:r>
-          </a:p>
-          <a:p/>
-          <a:p>
-            <a:r>
-              <a:rPr sz="1200"/>
-              <a:t>Two criteria: at least 16 photographs, which leaves 44 birds, and at least 3 capture sessions, which leaves 35. The session rule is the binding one — 43 birds fall below three sessions against 37 below sixteen photographs. I concede the consequence: these figures describe the better-photographed 43% of the colony, and the session gradient says the remaining birds are likely to be harder.</a:t>
-            </a:r>
+              <a:rPr lang="en-US" dirty="0"/>
+              <a:t/>
+            </a:r>
+            <a:endParaRPr lang="en-US" dirty="0"/>
           </a:p>
         </p:txBody>
       </p:sp>
@@ -1086,7 +1087,7 @@
           <a:p>
             <a:r>
               <a:rPr sz="1200"/>
-              <a:t>Thirty-one of thirty-five birds improve. Three decline slightly and Greyjoy is zero under both. The birds that do not gain are the sparsely sampled ones, which is the session finding again rather than a counterexample.</a:t>
+              <a:t>Two criteria: at least 16 photographs, which leaves 44 birds, and at least 3 capture sessions, which leaves 35. The session rule is the binding one — 43 birds fall below three sessions against 37 below sixteen photographs. I concede the consequence: these figures describe the better-photographed 43% of the colony, and the session gradient says the remaining birds are likely to be harder.</a:t>
             </a:r>
           </a:p>
         </p:txBody>
@@ -1180,7 +1181,7 @@
           <a:p>
             <a:r>
               <a:rPr sz="1200"/>
-              <a:t>Under one split only 261 of the 1,743 photographs are ever tested, and three birds are judged on a single photograph. Five-fold session-wise cross-validation tests every photograph exactly once while still keeping complete sessions disjoint.</a:t>
+              <a:t>Thirty-one of thirty-five birds improve. Three decline slightly and Greyjoy is zero under both. The birds that do not gain are the sparsely sampled ones, which is the session finding again rather than a counterexample.</a:t>
             </a:r>
           </a:p>
         </p:txBody>
@@ -1274,7 +1275,7 @@
           <a:p>
             <a:r>
               <a:rPr sz="1200"/>
-              <a:t>I did try it — the literature points straight at the ventral spots. The detector was not the problem: mAP at 50 is about 0.98. But the classifier on cropped bellies scored 0.866 against 0.950 on whole images, both under the random split. Cropping throws away identity cues the model was actually using. So the reported pipeline uses uncropped photographs.</a:t>
+              <a:t>Under one split only 261 of the 1,743 photographs are ever tested, and three birds are judged on a single photograph. Five-fold session-wise cross-validation tests every photograph exactly once while still keeping complete sessions disjoint.</a:t>
             </a:r>
           </a:p>
         </p:txBody>
@@ -1368,7 +1369,7 @@
           <a:p>
             <a:r>
               <a:rPr sz="1200"/>
-              <a:t>The operating threshold carries its own calibration table in the deployed code. And it was wrong once: the first version, 0.800, was tuned on the leaky split using simulated impostors and documented as rejecting 96.6% of unknowns. Against real never-trained birds it accepts 29.7% of them. Finding that is what produced 0.938.</a:t>
+              <a:t>I did try it — the literature points straight at the ventral spots. The detector was not the problem: mAP at 50 is about 0.98. But the classifier on cropped bellies scored 0.866 against 0.950 on whole images, both under the random split. Cropping throws away identity cues the model was actually using. So the reported pipeline uses uncropped photographs.</a:t>
             </a:r>
           </a:p>
         </p:txBody>
@@ -1462,7 +1463,7 @@
           <a:p>
             <a:r>
               <a:rPr sz="1200"/>
-              <a:t>Training is 80 fixed epochs with no early stopping and no checkpoint selection, so no configuration can win by being selected more luckily. Yes, it memorises: query the training photographs against prototypes rebuilt without their own session and it is perfect. That is a diagnostic, not a test — those photographs shaped the parameters. What it tells me is where the failure is: the model separates what it was fitted on and fails on sessions it was not.</a:t>
+              <a:t>The operating threshold carries its own calibration table in the deployed code. And it was wrong once: the first version, 0.800, was tuned on the leaky split using simulated impostors and documented as rejecting 96.6% of unknowns. Against real never-trained birds it accepts 29.7% of them. Finding that is what produced 0.938.</a:t>
             </a:r>
           </a:p>
         </p:txBody>
@@ -1650,7 +1651,7 @@
           <a:p>
             <a:r>
               <a:rPr sz="1200"/>
-              <a:t>Everything in one place, if you want to check a number.</a:t>
+              <a:t>Training is 80 fixed epochs with no early stopping and no checkpoint selection, so no configuration can win by being selected more luckily. Yes, it memorises: query the training photographs against prototypes rebuilt without their own session and it is perfect. That is a diagnostic, not a test — those photographs shaped the parameters. What it tells me is where the failure is: the model separates what it was fitted on and fails on sessions it was not.</a:t>
             </a:r>
           </a:p>
         </p:txBody>
@@ -1673,6 +1674,100 @@
             <a:fld id="{F7021451-1387-4CA6-816F-3879F97B5CBC}" type="slidenum">
               <a:rPr lang="en-US"/>
               <a:t>20</a:t>
+            </a:fld>
+            <a:endParaRPr lang="en-US"/>
+          </a:p>
+        </p:txBody>
+      </p:sp>
+    </p:spTree>
+    <p:extLst>
+      <p:ext uri="{BB962C8B-B14F-4D97-AF65-F5344CB8AC3E}">
+        <p14:creationId xmlns:p14="http://schemas.microsoft.com/office/powerpoint/2010/main" val="1024086991"/>
+      </p:ext>
+    </p:extLst>
+  </p:cSld>
+  <p:clrMapOvr>
+    <a:masterClrMapping/>
+  </p:clrMapOvr>
+</p:notes>
+</file>
+
+<file path=ppt/notesSlides/notesSlide21.xml><?xml version="1.0" encoding="utf-8"?>
+<p:notes xmlns:a="http://schemas.openxmlformats.org/drawingml/2006/main" xmlns:r="http://schemas.openxmlformats.org/officeDocument/2006/relationships" xmlns:p="http://schemas.openxmlformats.org/presentationml/2006/main">
+  <p:cSld>
+    <p:spTree>
+      <p:nvGrpSpPr>
+        <p:cNvPr id="1" name=""/>
+        <p:cNvGrpSpPr/>
+        <p:nvPr/>
+      </p:nvGrpSpPr>
+      <p:grpSpPr>
+        <a:xfrm>
+          <a:off x="0" y="0"/>
+          <a:ext cx="0" cy="0"/>
+          <a:chOff x="0" y="0"/>
+          <a:chExt cx="0" cy="0"/>
+        </a:xfrm>
+      </p:grpSpPr>
+      <p:sp>
+        <p:nvSpPr>
+          <p:cNvPr id="2" name="Slide Image Placeholder 1"/>
+          <p:cNvSpPr>
+            <a:spLocks noGrp="1" noRot="1" noChangeAspect="1"/>
+          </p:cNvSpPr>
+          <p:nvPr>
+            <p:ph type="sldImg"/>
+          </p:nvPr>
+        </p:nvSpPr>
+        <p:spPr/>
+      </p:sp>
+      <p:sp>
+        <p:nvSpPr>
+          <p:cNvPr id="3" name="Notes Placeholder 2"/>
+          <p:cNvSpPr>
+            <a:spLocks noGrp="1"/>
+          </p:cNvSpPr>
+          <p:nvPr>
+            <p:ph type="body" idx="1"/>
+          </p:nvPr>
+        </p:nvSpPr>
+        <p:spPr/>
+        <p:txBody>
+          <a:bodyPr/>
+          <a:lstStyle/>
+          <a:p>
+            <a:r>
+              <a:rPr sz="1200"/>
+              <a:t>[backup slide — not part of the 10 minutes]</a:t>
+            </a:r>
+          </a:p>
+          <a:p/>
+          <a:p>
+            <a:r>
+              <a:rPr sz="1200"/>
+              <a:t>Everything in one place, if you want to check a number.</a:t>
+            </a:r>
+          </a:p>
+        </p:txBody>
+      </p:sp>
+      <p:sp>
+        <p:nvSpPr>
+          <p:cNvPr id="4" name="Slide Number Placeholder 3"/>
+          <p:cNvSpPr>
+            <a:spLocks noGrp="1"/>
+          </p:cNvSpPr>
+          <p:nvPr>
+            <p:ph type="sldNum" sz="quarter" idx="10"/>
+          </p:nvPr>
+        </p:nvSpPr>
+        <p:spPr/>
+        <p:txBody>
+          <a:bodyPr/>
+          <a:lstStyle/>
+          <a:p>
+            <a:fld id="{F7021451-1387-4CA6-816F-3879F97B5CBC}" type="slidenum">
+              <a:rPr lang="en-US"/>
+              <a:t>21</a:t>
             </a:fld>
             <a:endParaRPr lang="en-US"/>
           </a:p>
@@ -1737,14 +1832,14 @@
           <a:p>
             <a:r>
               <a:rPr sz="1200"/>
-              <a:t>[slide 3  ·  43s  ·  ends 1:47 of 10:00  ·  88 words ≈ 41s at 130 wpm]</a:t>
+              <a:t>[slide 3  ·  43s  ·  ends 1:47 of 10:00  ·  93 words ≈ 43s at 130 wpm]</a:t>
             </a:r>
           </a:p>
           <a:p/>
           <a:p>
             <a:r>
               <a:rPr sz="1200"/>
-              <a:t>2,307 photographs of all 81 birds, taken by volunteers during husbandry, not to a research protocol — counts run from 1 to 291. Thirty-five birds clear both inclusion rules: the better-photographed 43% of the colony. The other 46 are never queries; they are gallery distractors and, later, genuine strangers. The definition at the bottom is what matters. A capture session is one photographic encounter with one bird, inferred from the camera's frame numbering. Frames inside a session share lighting, background and posture, so they are not independent samples.</a:t>
+              <a:t>2,307 photographs of all 81 birds, taken by volunteers during husbandry, not to a research protocol — counts run from 1 to 291. Thirty-five birds clear both inclusion rules: the better-photographed 43% of the colony. The other 46 are never queries; they are gallery distractors and, later, genuine strangers. The definition at the bottom is what matters. A capture session is one photographic encounter with one bird, inferred from the camera's frame numbering. The two frames on the right are one session: same light, same ground, same posture. They are not independent samples.</a:t>
             </a:r>
           </a:p>
         </p:txBody>
@@ -2680,16 +2775,39 @@
           <a:chExt cx="0" cy="0"/>
         </a:xfrm>
       </p:grpSpPr>
-      <p:sp>
-        <p:nvSpPr>
-          <p:cNvPr id="2" name="Text 0"/>
-          <p:cNvSpPr txBox="1"/>
-          <p:nvPr/>
-        </p:nvSpPr>
-        <p:spPr>
-          <a:xfrm>
-            <a:off x="566928" y="1600200"/>
-            <a:ext cx="9960559" cy="1737360"/>
+      <p:pic>
+        <p:nvPicPr>
+          <p:cNvPr id="2" name="Image 0" descr="/home/user/pgs/presentation/assets/penguin_title.png">    </p:cNvPr>
+          <p:cNvPicPr>
+            <a:picLocks noChangeAspect="1"/>
+          </p:cNvPicPr>
+          <p:nvPr/>
+        </p:nvPicPr>
+        <p:blipFill>
+          <a:blip r:embed="rId1"/>
+          <a:srcRect l="0" r="0" t="0" b="0"/>
+          <a:stretch/>
+        </p:blipFill>
+        <p:spPr>
+          <a:xfrm>
+            <a:off x="7848295" y="0"/>
+            <a:ext cx="4343400" cy="6858000"/>
+          </a:xfrm>
+          <a:prstGeom prst="rect">
+            <a:avLst/>
+          </a:prstGeom>
+        </p:spPr>
+      </p:pic>
+      <p:sp>
+        <p:nvSpPr>
+          <p:cNvPr id="3" name="Text 0"/>
+          <p:cNvSpPr txBox="1"/>
+          <p:nvPr/>
+        </p:nvSpPr>
+        <p:spPr>
+          <a:xfrm>
+            <a:off x="566928" y="1371600"/>
+            <a:ext cx="6824167" cy="2103120"/>
           </a:xfrm>
           <a:prstGeom prst="rect">
             <a:avLst/>
@@ -2703,12 +2821,12 @@
           <a:p>
             <a:pPr indent="0" marL="0">
               <a:lnSpc>
-                <a:spcPct val="100000"/>
+                <a:spcPct val="102000"/>
               </a:lnSpc>
               <a:buNone/>
             </a:pPr>
             <a:r>
-              <a:rPr lang="en-US" sz="4000" b="1" dirty="0">
+              <a:rPr lang="en-US" sz="3400" b="1" dirty="0">
                 <a:solidFill>
                   <a:srgbClr val="FFFFFF"/>
                 </a:solidFill>
@@ -2718,17 +2836,17 @@
               </a:rPr>
               <a:t>Automatic Identification of</a:t>
             </a:r>
-            <a:endParaRPr lang="en-US" sz="4000" dirty="0"/>
+            <a:endParaRPr lang="en-US" sz="3400" dirty="0"/>
           </a:p>
           <a:p>
             <a:pPr indent="0" marL="0">
               <a:lnSpc>
-                <a:spcPct val="100000"/>
+                <a:spcPct val="102000"/>
               </a:lnSpc>
               <a:buNone/>
             </a:pPr>
             <a:r>
-              <a:rPr lang="en-US" sz="4000" b="1" dirty="0">
+              <a:rPr lang="en-US" sz="3400" b="1" dirty="0">
                 <a:solidFill>
                   <a:srgbClr val="FFFFFF"/>
                 </a:solidFill>
@@ -2738,20 +2856,20 @@
               </a:rPr>
               <a:t>Humboldt Penguins at London Zoo</a:t>
             </a:r>
-            <a:endParaRPr lang="en-US" sz="4000" dirty="0"/>
-          </a:p>
-        </p:txBody>
-      </p:sp>
-      <p:sp>
-        <p:nvSpPr>
-          <p:cNvPr id="3" name="Text 1"/>
-          <p:cNvSpPr txBox="1"/>
-          <p:nvPr/>
-        </p:nvSpPr>
-        <p:spPr>
-          <a:xfrm>
-            <a:off x="566928" y="3429000"/>
-            <a:ext cx="9960559" cy="411480"/>
+            <a:endParaRPr lang="en-US" sz="3400" dirty="0"/>
+          </a:p>
+        </p:txBody>
+      </p:sp>
+      <p:sp>
+        <p:nvSpPr>
+          <p:cNvPr id="4" name="Text 1"/>
+          <p:cNvSpPr txBox="1"/>
+          <p:nvPr/>
+        </p:nvSpPr>
+        <p:spPr>
+          <a:xfrm>
+            <a:off x="566928" y="3401568"/>
+            <a:ext cx="6641287" cy="731520"/>
           </a:xfrm>
           <a:prstGeom prst="rect">
             <a:avLst/>
@@ -2783,13 +2901,13 @@
       </p:sp>
       <p:sp>
         <p:nvSpPr>
-          <p:cNvPr id="4" name="Shape 2"/>
+          <p:cNvPr id="5" name="Shape 2"/>
           <p:cNvSpPr/>
           <p:nvPr/>
         </p:nvSpPr>
         <p:spPr>
           <a:xfrm>
-            <a:off x="566928" y="4160520"/>
+            <a:off x="566928" y="4370832"/>
             <a:ext cx="137160" cy="137160"/>
           </a:xfrm>
           <a:prstGeom prst="ellipse">
@@ -2808,13 +2926,13 @@
       </p:sp>
       <p:sp>
         <p:nvSpPr>
-          <p:cNvPr id="5" name="Shape 3"/>
+          <p:cNvPr id="6" name="Shape 3"/>
           <p:cNvSpPr/>
           <p:nvPr/>
         </p:nvSpPr>
         <p:spPr>
           <a:xfrm>
-            <a:off x="795528" y="4160520"/>
+            <a:off x="795528" y="4370832"/>
             <a:ext cx="137160" cy="137160"/>
           </a:xfrm>
           <a:prstGeom prst="ellipse">
@@ -2833,13 +2951,13 @@
       </p:sp>
       <p:sp>
         <p:nvSpPr>
-          <p:cNvPr id="6" name="Shape 4"/>
+          <p:cNvPr id="7" name="Shape 4"/>
           <p:cNvSpPr/>
           <p:nvPr/>
         </p:nvSpPr>
         <p:spPr>
           <a:xfrm>
-            <a:off x="1024128" y="4160520"/>
+            <a:off x="1024128" y="4370832"/>
             <a:ext cx="137160" cy="137160"/>
           </a:xfrm>
           <a:prstGeom prst="ellipse">
@@ -2858,13 +2976,13 @@
       </p:sp>
       <p:sp>
         <p:nvSpPr>
-          <p:cNvPr id="7" name="Shape 5"/>
+          <p:cNvPr id="8" name="Shape 5"/>
           <p:cNvSpPr/>
           <p:nvPr/>
         </p:nvSpPr>
         <p:spPr>
           <a:xfrm>
-            <a:off x="1252728" y="4160520"/>
+            <a:off x="1252728" y="4370832"/>
             <a:ext cx="137160" cy="137160"/>
           </a:xfrm>
           <a:prstGeom prst="ellipse">
@@ -2883,13 +3001,13 @@
       </p:sp>
       <p:sp>
         <p:nvSpPr>
-          <p:cNvPr id="8" name="Shape 6"/>
+          <p:cNvPr id="9" name="Shape 6"/>
           <p:cNvSpPr/>
           <p:nvPr/>
         </p:nvSpPr>
         <p:spPr>
           <a:xfrm>
-            <a:off x="1481328" y="4160520"/>
+            <a:off x="1481328" y="4370832"/>
             <a:ext cx="137160" cy="137160"/>
           </a:xfrm>
           <a:prstGeom prst="ellipse">
@@ -2908,13 +3026,13 @@
       </p:sp>
       <p:sp>
         <p:nvSpPr>
-          <p:cNvPr id="9" name="Shape 7"/>
+          <p:cNvPr id="10" name="Shape 7"/>
           <p:cNvSpPr/>
           <p:nvPr/>
         </p:nvSpPr>
         <p:spPr>
           <a:xfrm>
-            <a:off x="1709928" y="4160520"/>
+            <a:off x="1709928" y="4370832"/>
             <a:ext cx="137160" cy="137160"/>
           </a:xfrm>
           <a:prstGeom prst="ellipse">
@@ -2933,13 +3051,13 @@
       </p:sp>
       <p:sp>
         <p:nvSpPr>
-          <p:cNvPr id="10" name="Shape 8"/>
+          <p:cNvPr id="11" name="Shape 8"/>
           <p:cNvSpPr/>
           <p:nvPr/>
         </p:nvSpPr>
         <p:spPr>
           <a:xfrm>
-            <a:off x="1938528" y="4160520"/>
+            <a:off x="1938528" y="4370832"/>
             <a:ext cx="137160" cy="137160"/>
           </a:xfrm>
           <a:prstGeom prst="ellipse">
@@ -2958,13 +3076,13 @@
       </p:sp>
       <p:sp>
         <p:nvSpPr>
-          <p:cNvPr id="11" name="Shape 9"/>
+          <p:cNvPr id="12" name="Shape 9"/>
           <p:cNvSpPr/>
           <p:nvPr/>
         </p:nvSpPr>
         <p:spPr>
           <a:xfrm>
-            <a:off x="2167128" y="4160520"/>
+            <a:off x="2167128" y="4370832"/>
             <a:ext cx="137160" cy="137160"/>
           </a:xfrm>
           <a:prstGeom prst="ellipse">
@@ -2983,13 +3101,13 @@
       </p:sp>
       <p:sp>
         <p:nvSpPr>
-          <p:cNvPr id="12" name="Shape 10"/>
+          <p:cNvPr id="13" name="Shape 10"/>
           <p:cNvSpPr/>
           <p:nvPr/>
         </p:nvSpPr>
         <p:spPr>
           <a:xfrm>
-            <a:off x="2395728" y="4160520"/>
+            <a:off x="2395728" y="4370832"/>
             <a:ext cx="137160" cy="137160"/>
           </a:xfrm>
           <a:prstGeom prst="ellipse">
@@ -3008,13 +3126,13 @@
       </p:sp>
       <p:sp>
         <p:nvSpPr>
-          <p:cNvPr id="13" name="Shape 11"/>
+          <p:cNvPr id="14" name="Shape 11"/>
           <p:cNvSpPr/>
           <p:nvPr/>
         </p:nvSpPr>
         <p:spPr>
           <a:xfrm>
-            <a:off x="2624328" y="4160520"/>
+            <a:off x="2624328" y="4370832"/>
             <a:ext cx="137160" cy="137160"/>
           </a:xfrm>
           <a:prstGeom prst="ellipse">
@@ -3033,13 +3151,13 @@
       </p:sp>
       <p:sp>
         <p:nvSpPr>
-          <p:cNvPr id="14" name="Shape 12"/>
+          <p:cNvPr id="15" name="Shape 12"/>
           <p:cNvSpPr/>
           <p:nvPr/>
         </p:nvSpPr>
         <p:spPr>
           <a:xfrm>
-            <a:off x="2852928" y="4160520"/>
+            <a:off x="2852928" y="4370832"/>
             <a:ext cx="137160" cy="137160"/>
           </a:xfrm>
           <a:prstGeom prst="ellipse">
@@ -3058,13 +3176,13 @@
       </p:sp>
       <p:sp>
         <p:nvSpPr>
-          <p:cNvPr id="15" name="Shape 13"/>
+          <p:cNvPr id="16" name="Shape 13"/>
           <p:cNvSpPr/>
           <p:nvPr/>
         </p:nvSpPr>
         <p:spPr>
           <a:xfrm>
-            <a:off x="3081528" y="4160520"/>
+            <a:off x="3081528" y="4370832"/>
             <a:ext cx="137160" cy="137160"/>
           </a:xfrm>
           <a:prstGeom prst="ellipse">
@@ -3083,13 +3201,13 @@
       </p:sp>
       <p:sp>
         <p:nvSpPr>
-          <p:cNvPr id="16" name="Shape 14"/>
+          <p:cNvPr id="17" name="Shape 14"/>
           <p:cNvSpPr/>
           <p:nvPr/>
         </p:nvSpPr>
         <p:spPr>
           <a:xfrm>
-            <a:off x="3310128" y="4160520"/>
+            <a:off x="3310128" y="4370832"/>
             <a:ext cx="137160" cy="137160"/>
           </a:xfrm>
           <a:prstGeom prst="ellipse">
@@ -3108,14 +3226,14 @@
       </p:sp>
       <p:sp>
         <p:nvSpPr>
-          <p:cNvPr id="17" name="Text 15"/>
-          <p:cNvSpPr txBox="1"/>
-          <p:nvPr/>
-        </p:nvSpPr>
-        <p:spPr>
-          <a:xfrm>
-            <a:off x="566928" y="4800600"/>
-            <a:ext cx="11057839" cy="731520"/>
+          <p:cNvPr id="18" name="Text 15"/>
+          <p:cNvSpPr txBox="1"/>
+          <p:nvPr/>
+        </p:nvSpPr>
+        <p:spPr>
+          <a:xfrm>
+            <a:off x="566928" y="4937760"/>
+            <a:ext cx="6824167" cy="822960"/>
           </a:xfrm>
           <a:prstGeom prst="rect">
             <a:avLst/>
@@ -5004,16 +5122,39 @@
           <a:chExt cx="0" cy="0"/>
         </a:xfrm>
       </p:grpSpPr>
-      <p:sp>
-        <p:nvSpPr>
-          <p:cNvPr id="2" name="Text 0"/>
-          <p:cNvSpPr txBox="1"/>
-          <p:nvPr/>
-        </p:nvSpPr>
-        <p:spPr>
-          <a:xfrm>
-            <a:off x="566928" y="2743200"/>
-            <a:ext cx="5486400" cy="822960"/>
+      <p:pic>
+        <p:nvPicPr>
+          <p:cNvPr id="2" name="Image 0" descr="/home/user/pgs/presentation/assets/penguin_thanks.png">    </p:cNvPr>
+          <p:cNvPicPr>
+            <a:picLocks noChangeAspect="1"/>
+          </p:cNvPicPr>
+          <p:nvPr/>
+        </p:nvPicPr>
+        <p:blipFill>
+          <a:blip r:embed="rId1"/>
+          <a:srcRect l="0" r="0" t="0" b="0"/>
+          <a:stretch/>
+        </p:blipFill>
+        <p:spPr>
+          <a:xfrm>
+            <a:off x="7848295" y="0"/>
+            <a:ext cx="4343400" cy="6858000"/>
+          </a:xfrm>
+          <a:prstGeom prst="rect">
+            <a:avLst/>
+          </a:prstGeom>
+        </p:spPr>
+      </p:pic>
+      <p:sp>
+        <p:nvSpPr>
+          <p:cNvPr id="3" name="Text 0"/>
+          <p:cNvSpPr txBox="1"/>
+          <p:nvPr/>
+        </p:nvSpPr>
+        <p:spPr>
+          <a:xfrm>
+            <a:off x="566928" y="868680"/>
+            <a:ext cx="6766560" cy="777240"/>
           </a:xfrm>
           <a:prstGeom prst="rect">
             <a:avLst/>
@@ -5029,7 +5170,7 @@
               <a:buNone/>
             </a:pPr>
             <a:r>
-              <a:rPr lang="en-US" sz="4000" b="1" dirty="0">
+              <a:rPr lang="en-US" sz="4200" b="1" dirty="0">
                 <a:solidFill>
                   <a:srgbClr val="FFFFFF"/>
                 </a:solidFill>
@@ -5037,22 +5178,22 @@
                 <a:ea typeface="Cambria" pitchFamily="34" charset="-122"/>
                 <a:cs typeface="Cambria" pitchFamily="34" charset="-120"/>
               </a:rPr>
-              <a:t>Backup</a:t>
-            </a:r>
-            <a:endParaRPr lang="en-US" sz="4000" dirty="0"/>
-          </a:p>
-        </p:txBody>
-      </p:sp>
-      <p:sp>
-        <p:nvSpPr>
-          <p:cNvPr id="3" name="Text 1"/>
-          <p:cNvSpPr txBox="1"/>
-          <p:nvPr/>
-        </p:nvSpPr>
-        <p:spPr>
-          <a:xfrm>
-            <a:off x="566928" y="3566160"/>
-            <a:ext cx="5486400" cy="365760"/>
+              <a:t>Thank you</a:t>
+            </a:r>
+            <a:endParaRPr lang="en-US" sz="4200" dirty="0"/>
+          </a:p>
+        </p:txBody>
+      </p:sp>
+      <p:sp>
+        <p:nvSpPr>
+          <p:cNvPr id="4" name="Text 1"/>
+          <p:cNvSpPr txBox="1"/>
+          <p:nvPr/>
+        </p:nvSpPr>
+        <p:spPr>
+          <a:xfrm>
+            <a:off x="566928" y="1645920"/>
+            <a:ext cx="6766560" cy="502920"/>
           </a:xfrm>
           <a:prstGeom prst="rect">
             <a:avLst/>
@@ -5068,7 +5209,88 @@
               <a:buNone/>
             </a:pPr>
             <a:r>
-              <a:rPr lang="en-US" sz="1600" dirty="0">
+              <a:rPr lang="en-US" sz="2600" dirty="0">
+                <a:solidFill>
+                  <a:srgbClr val="EB6834"/>
+                </a:solidFill>
+                <a:latin typeface="Cambria" pitchFamily="34" charset="0"/>
+                <a:ea typeface="Cambria" pitchFamily="34" charset="-122"/>
+                <a:cs typeface="Cambria" pitchFamily="34" charset="-120"/>
+              </a:rPr>
+              <a:t>Any questions?</a:t>
+            </a:r>
+            <a:endParaRPr lang="en-US" sz="2600" dirty="0"/>
+          </a:p>
+        </p:txBody>
+      </p:sp>
+      <p:sp>
+        <p:nvSpPr>
+          <p:cNvPr id="5" name="Text 2"/>
+          <p:cNvSpPr txBox="1"/>
+          <p:nvPr/>
+        </p:nvSpPr>
+        <p:spPr>
+          <a:xfrm>
+            <a:off x="566928" y="2514600"/>
+            <a:ext cx="2103120" cy="548640"/>
+          </a:xfrm>
+          <a:prstGeom prst="rect">
+            <a:avLst/>
+          </a:prstGeom>
+          <a:noFill/>
+          <a:ln/>
+        </p:spPr>
+        <p:txBody>
+          <a:bodyPr wrap="square" lIns="0" tIns="0" rIns="0" bIns="0" rtlCol="0" anchor="ctr"/>
+          <a:lstStyle/>
+          <a:p>
+            <a:pPr indent="0" marL="0">
+              <a:buNone/>
+            </a:pPr>
+            <a:r>
+              <a:rPr lang="en-US" sz="3400" b="1" dirty="0">
+                <a:solidFill>
+                  <a:srgbClr val="EB6834"/>
+                </a:solidFill>
+                <a:latin typeface="Cambria" pitchFamily="34" charset="0"/>
+                <a:ea typeface="Cambria" pitchFamily="34" charset="-122"/>
+                <a:cs typeface="Cambria" pitchFamily="34" charset="-120"/>
+              </a:rPr>
+              <a:t>0.531</a:t>
+            </a:r>
+            <a:endParaRPr lang="en-US" sz="3400" dirty="0"/>
+          </a:p>
+        </p:txBody>
+      </p:sp>
+      <p:sp>
+        <p:nvSpPr>
+          <p:cNvPr id="6" name="Text 3"/>
+          <p:cNvSpPr txBox="1"/>
+          <p:nvPr/>
+        </p:nvSpPr>
+        <p:spPr>
+          <a:xfrm>
+            <a:off x="566928" y="3063240"/>
+            <a:ext cx="2103120" cy="603504"/>
+          </a:xfrm>
+          <a:prstGeom prst="rect">
+            <a:avLst/>
+          </a:prstGeom>
+          <a:noFill/>
+          <a:ln/>
+        </p:spPr>
+        <p:txBody>
+          <a:bodyPr wrap="square" lIns="0" tIns="0" rIns="0" bIns="0" rtlCol="0" anchor="t"/>
+          <a:lstStyle/>
+          <a:p>
+            <a:pPr indent="0" marL="0">
+              <a:lnSpc>
+                <a:spcPct val="105000"/>
+              </a:lnSpc>
+              <a:buNone/>
+            </a:pPr>
+            <a:r>
+              <a:rPr lang="en-US" sz="1050" dirty="0">
                 <a:solidFill>
                   <a:srgbClr val="9FC0E4"/>
                 </a:solidFill>
@@ -5076,22 +5298,244 @@
                 <a:ea typeface="Calibri" pitchFamily="34" charset="-122"/>
                 <a:cs typeface="Calibri" pitchFamily="34" charset="-120"/>
               </a:rPr>
-              <a:t>Prepared answers</a:t>
-            </a:r>
-            <a:endParaRPr lang="en-US" sz="1600" dirty="0"/>
-          </a:p>
-        </p:txBody>
-      </p:sp>
-      <p:sp>
-        <p:nvSpPr>
-          <p:cNvPr id="4" name="Shape 2"/>
+              <a:t>inflation from splitting by</a:t>
+            </a:r>
+            <a:endParaRPr lang="en-US" sz="1050" dirty="0"/>
+          </a:p>
+          <a:p>
+            <a:pPr indent="0" marL="0">
+              <a:lnSpc>
+                <a:spcPct val="105000"/>
+              </a:lnSpc>
+              <a:buNone/>
+            </a:pPr>
+            <a:r>
+              <a:rPr lang="en-US" sz="1050" dirty="0">
+                <a:solidFill>
+                  <a:srgbClr val="9FC0E4"/>
+                </a:solidFill>
+                <a:latin typeface="Calibri" pitchFamily="34" charset="0"/>
+                <a:ea typeface="Calibri" pitchFamily="34" charset="-122"/>
+                <a:cs typeface="Calibri" pitchFamily="34" charset="-120"/>
+              </a:rPr>
+              <a:t>file instead of by encounter</a:t>
+            </a:r>
+            <a:endParaRPr lang="en-US" sz="1050" dirty="0"/>
+          </a:p>
+        </p:txBody>
+      </p:sp>
+      <p:sp>
+        <p:nvSpPr>
+          <p:cNvPr id="7" name="Text 4"/>
+          <p:cNvSpPr txBox="1"/>
+          <p:nvPr/>
+        </p:nvSpPr>
+        <p:spPr>
+          <a:xfrm>
+            <a:off x="2852928" y="2514600"/>
+            <a:ext cx="2103120" cy="548640"/>
+          </a:xfrm>
+          <a:prstGeom prst="rect">
+            <a:avLst/>
+          </a:prstGeom>
+          <a:noFill/>
+          <a:ln/>
+        </p:spPr>
+        <p:txBody>
+          <a:bodyPr wrap="square" lIns="0" tIns="0" rIns="0" bIns="0" rtlCol="0" anchor="ctr"/>
+          <a:lstStyle/>
+          <a:p>
+            <a:pPr indent="0" marL="0">
+              <a:buNone/>
+            </a:pPr>
+            <a:r>
+              <a:rPr lang="en-US" sz="3400" b="1" dirty="0">
+                <a:solidFill>
+                  <a:srgbClr val="FFFFFF"/>
+                </a:solidFill>
+                <a:latin typeface="Cambria" pitchFamily="34" charset="0"/>
+                <a:ea typeface="Cambria" pitchFamily="34" charset="-122"/>
+                <a:cs typeface="Cambria" pitchFamily="34" charset="-120"/>
+              </a:rPr>
+              <a:t>0.559</a:t>
+            </a:r>
+            <a:endParaRPr lang="en-US" sz="3400" dirty="0"/>
+          </a:p>
+        </p:txBody>
+      </p:sp>
+      <p:sp>
+        <p:nvSpPr>
+          <p:cNvPr id="8" name="Text 5"/>
+          <p:cNvSpPr txBox="1"/>
+          <p:nvPr/>
+        </p:nvSpPr>
+        <p:spPr>
+          <a:xfrm>
+            <a:off x="2852928" y="3063240"/>
+            <a:ext cx="2103120" cy="603504"/>
+          </a:xfrm>
+          <a:prstGeom prst="rect">
+            <a:avLst/>
+          </a:prstGeom>
+          <a:noFill/>
+          <a:ln/>
+        </p:spPr>
+        <p:txBody>
+          <a:bodyPr wrap="square" lIns="0" tIns="0" rIns="0" bIns="0" rtlCol="0" anchor="t"/>
+          <a:lstStyle/>
+          <a:p>
+            <a:pPr indent="0" marL="0">
+              <a:lnSpc>
+                <a:spcPct val="105000"/>
+              </a:lnSpc>
+              <a:buNone/>
+            </a:pPr>
+            <a:r>
+              <a:rPr lang="en-US" sz="1050" dirty="0">
+                <a:solidFill>
+                  <a:srgbClr val="9FC0E4"/>
+                </a:solidFill>
+                <a:latin typeface="Calibri" pitchFamily="34" charset="0"/>
+                <a:ea typeface="Calibri" pitchFamily="34" charset="-122"/>
+                <a:cs typeface="Calibri" pitchFamily="34" charset="-120"/>
+              </a:rPr>
+              <a:t>macro rank-1, 35 candidates,</a:t>
+            </a:r>
+            <a:endParaRPr lang="en-US" sz="1050" dirty="0"/>
+          </a:p>
+          <a:p>
+            <a:pPr indent="0" marL="0">
+              <a:lnSpc>
+                <a:spcPct val="105000"/>
+              </a:lnSpc>
+              <a:buNone/>
+            </a:pPr>
+            <a:r>
+              <a:rPr lang="en-US" sz="1050" dirty="0">
+                <a:solidFill>
+                  <a:srgbClr val="9FC0E4"/>
+                </a:solidFill>
+                <a:latin typeface="Calibri" pitchFamily="34" charset="0"/>
+                <a:ea typeface="Calibri" pitchFamily="34" charset="-122"/>
+                <a:cs typeface="Calibri" pitchFamily="34" charset="-120"/>
+              </a:rPr>
+              <a:t>closed set</a:t>
+            </a:r>
+            <a:endParaRPr lang="en-US" sz="1050" dirty="0"/>
+          </a:p>
+        </p:txBody>
+      </p:sp>
+      <p:sp>
+        <p:nvSpPr>
+          <p:cNvPr id="9" name="Text 6"/>
+          <p:cNvSpPr txBox="1"/>
+          <p:nvPr/>
+        </p:nvSpPr>
+        <p:spPr>
+          <a:xfrm>
+            <a:off x="5138928" y="2514600"/>
+            <a:ext cx="2103120" cy="548640"/>
+          </a:xfrm>
+          <a:prstGeom prst="rect">
+            <a:avLst/>
+          </a:prstGeom>
+          <a:noFill/>
+          <a:ln/>
+        </p:spPr>
+        <p:txBody>
+          <a:bodyPr wrap="square" lIns="0" tIns="0" rIns="0" bIns="0" rtlCol="0" anchor="ctr"/>
+          <a:lstStyle/>
+          <a:p>
+            <a:pPr indent="0" marL="0">
+              <a:buNone/>
+            </a:pPr>
+            <a:r>
+              <a:rPr lang="en-US" sz="3400" b="1" dirty="0">
+                <a:solidFill>
+                  <a:srgbClr val="FFFFFF"/>
+                </a:solidFill>
+                <a:latin typeface="Cambria" pitchFamily="34" charset="0"/>
+                <a:ea typeface="Cambria" pitchFamily="34" charset="-122"/>
+                <a:cs typeface="Cambria" pitchFamily="34" charset="-120"/>
+              </a:rPr>
+              <a:t>0.123</a:t>
+            </a:r>
+            <a:endParaRPr lang="en-US" sz="3400" dirty="0"/>
+          </a:p>
+        </p:txBody>
+      </p:sp>
+      <p:sp>
+        <p:nvSpPr>
+          <p:cNvPr id="10" name="Text 7"/>
+          <p:cNvSpPr txBox="1"/>
+          <p:nvPr/>
+        </p:nvSpPr>
+        <p:spPr>
+          <a:xfrm>
+            <a:off x="5138928" y="3063240"/>
+            <a:ext cx="2103120" cy="603504"/>
+          </a:xfrm>
+          <a:prstGeom prst="rect">
+            <a:avLst/>
+          </a:prstGeom>
+          <a:noFill/>
+          <a:ln/>
+        </p:spPr>
+        <p:txBody>
+          <a:bodyPr wrap="square" lIns="0" tIns="0" rIns="0" bIns="0" rtlCol="0" anchor="t"/>
+          <a:lstStyle/>
+          <a:p>
+            <a:pPr indent="0" marL="0">
+              <a:lnSpc>
+                <a:spcPct val="105000"/>
+              </a:lnSpc>
+              <a:buNone/>
+            </a:pPr>
+            <a:r>
+              <a:rPr lang="en-US" sz="1050" dirty="0">
+                <a:solidFill>
+                  <a:srgbClr val="9FC0E4"/>
+                </a:solidFill>
+                <a:latin typeface="Calibri" pitchFamily="34" charset="0"/>
+                <a:ea typeface="Calibri" pitchFamily="34" charset="-122"/>
+                <a:cs typeface="Calibri" pitchFamily="34" charset="-120"/>
+              </a:rPr>
+              <a:t>correctly named at a 1%</a:t>
+            </a:r>
+            <a:endParaRPr lang="en-US" sz="1050" dirty="0"/>
+          </a:p>
+          <a:p>
+            <a:pPr indent="0" marL="0">
+              <a:lnSpc>
+                <a:spcPct val="105000"/>
+              </a:lnSpc>
+              <a:buNone/>
+            </a:pPr>
+            <a:r>
+              <a:rPr lang="en-US" sz="1050" dirty="0">
+                <a:solidFill>
+                  <a:srgbClr val="9FC0E4"/>
+                </a:solidFill>
+                <a:latin typeface="Calibri" pitchFamily="34" charset="0"/>
+                <a:ea typeface="Calibri" pitchFamily="34" charset="-122"/>
+                <a:cs typeface="Calibri" pitchFamily="34" charset="-120"/>
+              </a:rPr>
+              <a:t>stranger false-accept rate</a:t>
+            </a:r>
+            <a:endParaRPr lang="en-US" sz="1050" dirty="0"/>
+          </a:p>
+        </p:txBody>
+      </p:sp>
+      <p:sp>
+        <p:nvSpPr>
+          <p:cNvPr id="11" name="Shape 8"/>
           <p:cNvSpPr/>
           <p:nvPr/>
         </p:nvSpPr>
         <p:spPr>
           <a:xfrm>
-            <a:off x="566928" y="4206240"/>
-            <a:ext cx="137160" cy="137160"/>
+            <a:off x="566928" y="3931920"/>
+            <a:ext cx="118872" cy="118872"/>
           </a:xfrm>
           <a:prstGeom prst="ellipse">
             <a:avLst/>
@@ -5109,14 +5553,14 @@
       </p:sp>
       <p:sp>
         <p:nvSpPr>
-          <p:cNvPr id="5" name="Shape 3"/>
+          <p:cNvPr id="12" name="Shape 9"/>
           <p:cNvSpPr/>
           <p:nvPr/>
         </p:nvSpPr>
         <p:spPr>
           <a:xfrm>
-            <a:off x="795528" y="4206240"/>
-            <a:ext cx="137160" cy="137160"/>
+            <a:off x="768096" y="3931920"/>
+            <a:ext cx="118872" cy="118872"/>
           </a:xfrm>
           <a:prstGeom prst="ellipse">
             <a:avLst/>
@@ -5134,14 +5578,14 @@
       </p:sp>
       <p:sp>
         <p:nvSpPr>
-          <p:cNvPr id="6" name="Shape 4"/>
+          <p:cNvPr id="13" name="Shape 10"/>
           <p:cNvSpPr/>
           <p:nvPr/>
         </p:nvSpPr>
         <p:spPr>
           <a:xfrm>
-            <a:off x="1024128" y="4206240"/>
-            <a:ext cx="137160" cy="137160"/>
+            <a:off x="969264" y="3931920"/>
+            <a:ext cx="118872" cy="118872"/>
           </a:xfrm>
           <a:prstGeom prst="ellipse">
             <a:avLst/>
@@ -5159,14 +5603,14 @@
       </p:sp>
       <p:sp>
         <p:nvSpPr>
-          <p:cNvPr id="7" name="Shape 5"/>
+          <p:cNvPr id="14" name="Shape 11"/>
           <p:cNvSpPr/>
           <p:nvPr/>
         </p:nvSpPr>
         <p:spPr>
           <a:xfrm>
-            <a:off x="1252728" y="4206240"/>
-            <a:ext cx="137160" cy="137160"/>
+            <a:off x="1170432" y="3931920"/>
+            <a:ext cx="118872" cy="118872"/>
           </a:xfrm>
           <a:prstGeom prst="ellipse">
             <a:avLst/>
@@ -5184,14 +5628,14 @@
       </p:sp>
       <p:sp>
         <p:nvSpPr>
-          <p:cNvPr id="8" name="Shape 6"/>
+          <p:cNvPr id="15" name="Shape 12"/>
           <p:cNvSpPr/>
           <p:nvPr/>
         </p:nvSpPr>
         <p:spPr>
           <a:xfrm>
-            <a:off x="1481328" y="4206240"/>
-            <a:ext cx="137160" cy="137160"/>
+            <a:off x="1371600" y="3931920"/>
+            <a:ext cx="118872" cy="118872"/>
           </a:xfrm>
           <a:prstGeom prst="ellipse">
             <a:avLst/>
@@ -5209,14 +5653,14 @@
       </p:sp>
       <p:sp>
         <p:nvSpPr>
-          <p:cNvPr id="9" name="Shape 7"/>
+          <p:cNvPr id="16" name="Shape 13"/>
           <p:cNvSpPr/>
           <p:nvPr/>
         </p:nvSpPr>
         <p:spPr>
           <a:xfrm>
-            <a:off x="1709928" y="4206240"/>
-            <a:ext cx="137160" cy="137160"/>
+            <a:off x="1572768" y="3931920"/>
+            <a:ext cx="118872" cy="118872"/>
           </a:xfrm>
           <a:prstGeom prst="ellipse">
             <a:avLst/>
@@ -5234,14 +5678,14 @@
       </p:sp>
       <p:sp>
         <p:nvSpPr>
-          <p:cNvPr id="10" name="Shape 8"/>
+          <p:cNvPr id="17" name="Shape 14"/>
           <p:cNvSpPr/>
           <p:nvPr/>
         </p:nvSpPr>
         <p:spPr>
           <a:xfrm>
-            <a:off x="1938528" y="4206240"/>
-            <a:ext cx="137160" cy="137160"/>
+            <a:off x="1773936" y="3931920"/>
+            <a:ext cx="118872" cy="118872"/>
           </a:xfrm>
           <a:prstGeom prst="ellipse">
             <a:avLst/>
@@ -5259,14 +5703,14 @@
       </p:sp>
       <p:sp>
         <p:nvSpPr>
-          <p:cNvPr id="11" name="Shape 9"/>
+          <p:cNvPr id="18" name="Shape 15"/>
           <p:cNvSpPr/>
           <p:nvPr/>
         </p:nvSpPr>
         <p:spPr>
           <a:xfrm>
-            <a:off x="2167128" y="4206240"/>
-            <a:ext cx="137160" cy="137160"/>
+            <a:off x="1975104" y="3931920"/>
+            <a:ext cx="118872" cy="118872"/>
           </a:xfrm>
           <a:prstGeom prst="ellipse">
             <a:avLst/>
@@ -5281,6 +5725,212 @@
             <a:prstDash val="solid"/>
           </a:ln>
         </p:spPr>
+      </p:sp>
+      <p:sp>
+        <p:nvSpPr>
+          <p:cNvPr id="19" name="Shape 16"/>
+          <p:cNvSpPr/>
+          <p:nvPr/>
+        </p:nvSpPr>
+        <p:spPr>
+          <a:xfrm>
+            <a:off x="2176272" y="3931920"/>
+            <a:ext cx="118872" cy="118872"/>
+          </a:xfrm>
+          <a:prstGeom prst="ellipse">
+            <a:avLst/>
+          </a:prstGeom>
+          <a:solidFill>
+            <a:srgbClr val="2A78D6"/>
+          </a:solidFill>
+          <a:ln w="12700">
+            <a:solidFill>
+              <a:srgbClr val="2A78D6"/>
+            </a:solidFill>
+            <a:prstDash val="solid"/>
+          </a:ln>
+        </p:spPr>
+      </p:sp>
+      <p:sp>
+        <p:nvSpPr>
+          <p:cNvPr id="20" name="Shape 17"/>
+          <p:cNvSpPr/>
+          <p:nvPr/>
+        </p:nvSpPr>
+        <p:spPr>
+          <a:xfrm>
+            <a:off x="2377440" y="3931920"/>
+            <a:ext cx="118872" cy="118872"/>
+          </a:xfrm>
+          <a:prstGeom prst="ellipse">
+            <a:avLst/>
+          </a:prstGeom>
+          <a:solidFill>
+            <a:srgbClr val="2A78D6"/>
+          </a:solidFill>
+          <a:ln w="12700">
+            <a:solidFill>
+              <a:srgbClr val="2A78D6"/>
+            </a:solidFill>
+            <a:prstDash val="solid"/>
+          </a:ln>
+        </p:spPr>
+      </p:sp>
+      <p:sp>
+        <p:nvSpPr>
+          <p:cNvPr id="21" name="Shape 18"/>
+          <p:cNvSpPr/>
+          <p:nvPr/>
+        </p:nvSpPr>
+        <p:spPr>
+          <a:xfrm>
+            <a:off x="2578608" y="3931920"/>
+            <a:ext cx="118872" cy="118872"/>
+          </a:xfrm>
+          <a:prstGeom prst="ellipse">
+            <a:avLst/>
+          </a:prstGeom>
+          <a:solidFill>
+            <a:srgbClr val="2A78D6"/>
+          </a:solidFill>
+          <a:ln w="12700">
+            <a:solidFill>
+              <a:srgbClr val="2A78D6"/>
+            </a:solidFill>
+            <a:prstDash val="solid"/>
+          </a:ln>
+        </p:spPr>
+      </p:sp>
+      <p:sp>
+        <p:nvSpPr>
+          <p:cNvPr id="22" name="Shape 19"/>
+          <p:cNvSpPr/>
+          <p:nvPr/>
+        </p:nvSpPr>
+        <p:spPr>
+          <a:xfrm>
+            <a:off x="2779776" y="3931920"/>
+            <a:ext cx="118872" cy="118872"/>
+          </a:xfrm>
+          <a:prstGeom prst="ellipse">
+            <a:avLst/>
+          </a:prstGeom>
+          <a:solidFill>
+            <a:srgbClr val="2A78D6"/>
+          </a:solidFill>
+          <a:ln w="12700">
+            <a:solidFill>
+              <a:srgbClr val="2A78D6"/>
+            </a:solidFill>
+            <a:prstDash val="solid"/>
+          </a:ln>
+        </p:spPr>
+      </p:sp>
+      <p:sp>
+        <p:nvSpPr>
+          <p:cNvPr id="23" name="Shape 20"/>
+          <p:cNvSpPr/>
+          <p:nvPr/>
+        </p:nvSpPr>
+        <p:spPr>
+          <a:xfrm>
+            <a:off x="2980944" y="3931920"/>
+            <a:ext cx="118872" cy="118872"/>
+          </a:xfrm>
+          <a:prstGeom prst="ellipse">
+            <a:avLst/>
+          </a:prstGeom>
+          <a:solidFill>
+            <a:srgbClr val="2A78D6"/>
+          </a:solidFill>
+          <a:ln w="12700">
+            <a:solidFill>
+              <a:srgbClr val="2A78D6"/>
+            </a:solidFill>
+            <a:prstDash val="solid"/>
+          </a:ln>
+        </p:spPr>
+      </p:sp>
+      <p:sp>
+        <p:nvSpPr>
+          <p:cNvPr id="24" name="Text 21"/>
+          <p:cNvSpPr txBox="1"/>
+          <p:nvPr/>
+        </p:nvSpPr>
+        <p:spPr>
+          <a:xfrm>
+            <a:off x="566928" y="4343400"/>
+            <a:ext cx="6583680" cy="685800"/>
+          </a:xfrm>
+          <a:prstGeom prst="rect">
+            <a:avLst/>
+          </a:prstGeom>
+          <a:noFill/>
+          <a:ln/>
+        </p:spPr>
+        <p:txBody>
+          <a:bodyPr wrap="square" lIns="0" tIns="0" rIns="0" bIns="0" rtlCol="0" anchor="t"/>
+          <a:lstStyle/>
+          <a:p>
+            <a:pPr indent="0" marL="0">
+              <a:lnSpc>
+                <a:spcPct val="120000"/>
+              </a:lnSpc>
+              <a:buNone/>
+            </a:pPr>
+            <a:r>
+              <a:rPr lang="en-US" sz="1250" dirty="0">
+                <a:solidFill>
+                  <a:srgbClr val="C9D6E6"/>
+                </a:solidFill>
+                <a:latin typeface="Calibri" pitchFamily="34" charset="0"/>
+                <a:ea typeface="Calibri" pitchFamily="34" charset="-122"/>
+                <a:cs typeface="Calibri" pitchFamily="34" charset="-120"/>
+              </a:rPr>
+              <a:t>With thanks to Robin Freeman for his supervision, and to ZSL London Zoo and the volunteer photographers whose archive made this possible.</a:t>
+            </a:r>
+            <a:endParaRPr lang="en-US" sz="1250" dirty="0"/>
+          </a:p>
+        </p:txBody>
+      </p:sp>
+      <p:sp>
+        <p:nvSpPr>
+          <p:cNvPr id="25" name="Text 22"/>
+          <p:cNvSpPr txBox="1"/>
+          <p:nvPr/>
+        </p:nvSpPr>
+        <p:spPr>
+          <a:xfrm>
+            <a:off x="566928" y="5138928"/>
+            <a:ext cx="6583680" cy="310896"/>
+          </a:xfrm>
+          <a:prstGeom prst="rect">
+            <a:avLst/>
+          </a:prstGeom>
+          <a:noFill/>
+          <a:ln/>
+        </p:spPr>
+        <p:txBody>
+          <a:bodyPr wrap="square" lIns="0" tIns="0" rIns="0" bIns="0" rtlCol="0" anchor="ctr"/>
+          <a:lstStyle/>
+          <a:p>
+            <a:pPr indent="0" marL="0">
+              <a:buNone/>
+            </a:pPr>
+            <a:r>
+              <a:rPr lang="en-US" sz="1250" b="1" dirty="0">
+                <a:solidFill>
+                  <a:srgbClr val="9FC0E4"/>
+                </a:solidFill>
+                <a:latin typeface="Calibri" pitchFamily="34" charset="0"/>
+                <a:ea typeface="Calibri" pitchFamily="34" charset="-122"/>
+                <a:cs typeface="Calibri" pitchFamily="34" charset="-120"/>
+              </a:rPr>
+              <a:t>Code and analysis:  github.com/aoaoguo2003/pgs</a:t>
+            </a:r>
+            <a:endParaRPr lang="en-US" sz="1250" dirty="0"/>
+          </a:p>
+        </p:txBody>
       </p:sp>
     </p:spTree>
   </p:cSld>
@@ -5296,7 +5946,7 @@
     <p:bg>
       <p:bgPr>
         <a:solidFill>
-          <a:srgbClr val="FCFCFB"/>
+          <a:srgbClr val="0E2A47"/>
         </a:solidFill>
       </p:bgPr>
     </p:bg>
@@ -5322,8 +5972,8 @@
         </p:nvSpPr>
         <p:spPr>
           <a:xfrm>
-            <a:off x="566928" y="146304"/>
-            <a:ext cx="11057839" cy="219456"/>
+            <a:off x="566928" y="2743200"/>
+            <a:ext cx="5486400" cy="822960"/>
           </a:xfrm>
           <a:prstGeom prst="rect">
             <a:avLst/>
@@ -5339,214 +5989,30 @@
               <a:buNone/>
             </a:pPr>
             <a:r>
-              <a:rPr lang="en-US" sz="1100" b="1" spc="160" kern="0" dirty="0">
-                <a:solidFill>
-                  <a:srgbClr val="EB6834"/>
-                </a:solidFill>
-                <a:latin typeface="Calibri" pitchFamily="34" charset="0"/>
-                <a:ea typeface="Calibri" pitchFamily="34" charset="-122"/>
-                <a:cs typeface="Calibri" pitchFamily="34" charset="-120"/>
-              </a:rPr>
-              <a:t>Q — INCLUSION CRITERIA</a:t>
-            </a:r>
-            <a:endParaRPr lang="en-US" sz="1100" dirty="0"/>
-          </a:p>
-        </p:txBody>
-      </p:sp>
-      <p:sp>
-        <p:nvSpPr>
-          <p:cNvPr id="3" name="Text 1"/>
-          <p:cNvSpPr txBox="1"/>
-          <p:nvPr/>
-        </p:nvSpPr>
-        <p:spPr>
-          <a:xfrm>
-            <a:off x="566928" y="384048"/>
-            <a:ext cx="11057839" cy="658368"/>
-          </a:xfrm>
-          <a:prstGeom prst="rect">
-            <a:avLst/>
-          </a:prstGeom>
-          <a:noFill/>
-          <a:ln/>
-        </p:spPr>
-        <p:txBody>
-          <a:bodyPr wrap="square" lIns="0" tIns="0" rIns="0" bIns="0" rtlCol="0" anchor="t"/>
-          <a:lstStyle/>
-          <a:p>
-            <a:pPr algn="l" indent="0" marL="0">
-              <a:lnSpc>
-                <a:spcPct val="95000"/>
-              </a:lnSpc>
-              <a:buNone/>
-            </a:pPr>
-            <a:r>
-              <a:rPr lang="en-US" sz="2500" b="1" dirty="0">
-                <a:solidFill>
-                  <a:srgbClr val="0E2A47"/>
+              <a:rPr lang="en-US" sz="4000" b="1" dirty="0">
+                <a:solidFill>
+                  <a:srgbClr val="FFFFFF"/>
                 </a:solidFill>
                 <a:latin typeface="Cambria" pitchFamily="34" charset="0"/>
                 <a:ea typeface="Cambria" pitchFamily="34" charset="-122"/>
                 <a:cs typeface="Cambria" pitchFamily="34" charset="-120"/>
               </a:rPr>
-              <a:t>Why 35 of 81? The session rule binds, not the photo rule</a:t>
-            </a:r>
-            <a:endParaRPr lang="en-US" sz="2500" dirty="0"/>
-          </a:p>
-        </p:txBody>
-      </p:sp>
-      <p:pic>
-        <p:nvPicPr>
-          <p:cNvPr id="4" name="Image 0" descr="/home/user/pgs/presentation/assets/14_photos_vs_sessions_notitle.png">    </p:cNvPr>
-          <p:cNvPicPr>
-            <a:picLocks noChangeAspect="1"/>
-          </p:cNvPicPr>
-          <p:nvPr/>
-        </p:nvPicPr>
-        <p:blipFill>
-          <a:blip r:embed="rId1"/>
-          <a:stretch>
-            <a:fillRect/>
-          </a:stretch>
-        </p:blipFill>
-        <p:spPr>
-          <a:xfrm>
-            <a:off x="924150" y="1234440"/>
-            <a:ext cx="6234996" cy="4480560"/>
-          </a:xfrm>
-          <a:prstGeom prst="rect">
-            <a:avLst/>
-          </a:prstGeom>
-        </p:spPr>
-      </p:pic>
-      <p:sp>
-        <p:nvSpPr>
-          <p:cNvPr id="5" name="Text 2"/>
-          <p:cNvSpPr txBox="1"/>
-          <p:nvPr/>
-        </p:nvSpPr>
-        <p:spPr>
-          <a:xfrm>
-            <a:off x="7635240" y="1371600"/>
-            <a:ext cx="4023360" cy="4206240"/>
-          </a:xfrm>
-          <a:prstGeom prst="rect">
-            <a:avLst/>
-          </a:prstGeom>
-          <a:noFill/>
-          <a:ln/>
-        </p:spPr>
-        <p:txBody>
-          <a:bodyPr wrap="square" lIns="0" tIns="0" rIns="0" bIns="0" rtlCol="0" anchor="t"/>
-          <a:lstStyle/>
-          <a:p>
-            <a:pPr marL="342900" indent="-342900">
-              <a:lnSpc>
-                <a:spcPct val="105000"/>
-              </a:lnSpc>
-              <a:spcAft>
-                <a:spcPts val="1200"/>
-              </a:spcAft>
-              <a:buSzPct val="100000"/>
-              <a:buChar char="•"/>
-            </a:pPr>
-            <a:r>
-              <a:rPr lang="en-US" sz="1250" dirty="0">
-                <a:solidFill>
-                  <a:srgbClr val="24303C"/>
-                </a:solidFill>
-                <a:latin typeface="Calibri" pitchFamily="34" charset="0"/>
-                <a:ea typeface="Calibri" pitchFamily="34" charset="-122"/>
-                <a:cs typeface="Calibri" pitchFamily="34" charset="-120"/>
-              </a:rPr>
-              <a:t>37 of 81 birds fall below 16 photographs; 43 fall below 3 sessions; 34 fail both</a:t>
-            </a:r>
-            <a:endParaRPr lang="en-US" sz="1250" dirty="0"/>
-          </a:p>
-          <a:p>
-            <a:pPr marL="342900" indent="-342900">
-              <a:lnSpc>
-                <a:spcPct val="105000"/>
-              </a:lnSpc>
-              <a:spcAft>
-                <a:spcPts val="1200"/>
-              </a:spcAft>
-              <a:buSzPct val="100000"/>
-              <a:buChar char="•"/>
-            </a:pPr>
-            <a:r>
-              <a:rPr lang="en-US" sz="1250" dirty="0">
-                <a:solidFill>
-                  <a:srgbClr val="24303C"/>
-                </a:solidFill>
-                <a:latin typeface="Calibri" pitchFamily="34" charset="0"/>
-                <a:ea typeface="Calibri" pitchFamily="34" charset="-122"/>
-                <a:cs typeface="Calibri" pitchFamily="34" charset="-120"/>
-              </a:rPr>
-              <a:t>The 46 excluded birds are never queries — they are gallery distractors and, in the open-set test, genuine strangers</a:t>
-            </a:r>
-            <a:endParaRPr lang="en-US" sz="1250" dirty="0"/>
-          </a:p>
-          <a:p>
-            <a:pPr marL="342900" indent="-342900">
-              <a:lnSpc>
-                <a:spcPct val="105000"/>
-              </a:lnSpc>
-              <a:spcAft>
-                <a:spcPts val="1200"/>
-              </a:spcAft>
-              <a:buSzPct val="100000"/>
-              <a:buChar char="•"/>
-            </a:pPr>
-            <a:r>
-              <a:rPr lang="en-US" sz="1250" dirty="0">
-                <a:solidFill>
-                  <a:srgbClr val="24303C"/>
-                </a:solidFill>
-                <a:latin typeface="Calibri" pitchFamily="34" charset="0"/>
-                <a:ea typeface="Calibri" pitchFamily="34" charset="-122"/>
-                <a:cs typeface="Calibri" pitchFamily="34" charset="-120"/>
-              </a:rPr>
-              <a:t>Nicki and Gonzo sit at almost the same photo count and thirteen sessions apart</a:t>
-            </a:r>
-            <a:endParaRPr lang="en-US" sz="1250" dirty="0"/>
-          </a:p>
-          <a:p>
-            <a:pPr marL="342900" indent="-342900">
-              <a:lnSpc>
-                <a:spcPct val="105000"/>
-              </a:lnSpc>
-              <a:spcAft>
-                <a:spcPts val="1200"/>
-              </a:spcAft>
-              <a:buSzPct val="100000"/>
-              <a:buChar char="•"/>
-            </a:pPr>
-            <a:r>
-              <a:rPr lang="en-US" sz="1250" dirty="0">
-                <a:solidFill>
-                  <a:srgbClr val="24303C"/>
-                </a:solidFill>
-                <a:latin typeface="Calibri" pitchFamily="34" charset="0"/>
-                <a:ea typeface="Calibri" pitchFamily="34" charset="-122"/>
-                <a:cs typeface="Calibri" pitchFamily="34" charset="-120"/>
-              </a:rPr>
-              <a:t>Consequence to concede: 0.559 describes the better-photographed 43% of the colony</a:t>
-            </a:r>
-            <a:endParaRPr lang="en-US" sz="1250" dirty="0"/>
-          </a:p>
-        </p:txBody>
-      </p:sp>
-      <p:sp>
-        <p:nvSpPr>
-          <p:cNvPr id="6" name="Text 3"/>
-          <p:cNvSpPr txBox="1"/>
-          <p:nvPr/>
-        </p:nvSpPr>
-        <p:spPr>
-          <a:xfrm>
-            <a:off x="10527487" y="6437376"/>
-            <a:ext cx="1097280" cy="256032"/>
+              <a:t>Backup</a:t>
+            </a:r>
+            <a:endParaRPr lang="en-US" sz="4000" dirty="0"/>
+          </a:p>
+        </p:txBody>
+      </p:sp>
+      <p:sp>
+        <p:nvSpPr>
+          <p:cNvPr id="3" name="Text 1"/>
+          <p:cNvSpPr txBox="1"/>
+          <p:nvPr/>
+        </p:nvSpPr>
+        <p:spPr>
+          <a:xfrm>
+            <a:off x="566928" y="3566160"/>
+            <a:ext cx="5486400" cy="365760"/>
           </a:xfrm>
           <a:prstGeom prst="rect">
             <a:avLst/>
@@ -5558,23 +6024,223 @@
           <a:bodyPr wrap="square" lIns="0" tIns="0" rIns="0" bIns="0" rtlCol="0" anchor="ctr"/>
           <a:lstStyle/>
           <a:p>
-            <a:pPr algn="r" indent="0" marL="0">
-              <a:buNone/>
-            </a:pPr>
-            <a:r>
-              <a:rPr lang="en-US" sz="900" b="1" spc="120" kern="0" dirty="0">
-                <a:solidFill>
-                  <a:srgbClr val="A9AEB5"/>
-                </a:solidFill>
-                <a:latin typeface="Calibri" pitchFamily="34" charset="0"/>
-                <a:ea typeface="Calibri" pitchFamily="34" charset="-122"/>
-                <a:cs typeface="Calibri" pitchFamily="34" charset="-120"/>
-              </a:rPr>
-              <a:t>BACKUP</a:t>
-            </a:r>
-            <a:endParaRPr lang="en-US" sz="900" dirty="0"/>
-          </a:p>
-        </p:txBody>
+            <a:pPr indent="0" marL="0">
+              <a:buNone/>
+            </a:pPr>
+            <a:r>
+              <a:rPr lang="en-US" sz="1600" dirty="0">
+                <a:solidFill>
+                  <a:srgbClr val="9FC0E4"/>
+                </a:solidFill>
+                <a:latin typeface="Calibri" pitchFamily="34" charset="0"/>
+                <a:ea typeface="Calibri" pitchFamily="34" charset="-122"/>
+                <a:cs typeface="Calibri" pitchFamily="34" charset="-120"/>
+              </a:rPr>
+              <a:t>Prepared answers</a:t>
+            </a:r>
+            <a:endParaRPr lang="en-US" sz="1600" dirty="0"/>
+          </a:p>
+        </p:txBody>
+      </p:sp>
+      <p:sp>
+        <p:nvSpPr>
+          <p:cNvPr id="4" name="Shape 2"/>
+          <p:cNvSpPr/>
+          <p:nvPr/>
+        </p:nvSpPr>
+        <p:spPr>
+          <a:xfrm>
+            <a:off x="566928" y="4206240"/>
+            <a:ext cx="137160" cy="137160"/>
+          </a:xfrm>
+          <a:prstGeom prst="ellipse">
+            <a:avLst/>
+          </a:prstGeom>
+          <a:solidFill>
+            <a:srgbClr val="2A78D6"/>
+          </a:solidFill>
+          <a:ln w="12700">
+            <a:solidFill>
+              <a:srgbClr val="2A78D6"/>
+            </a:solidFill>
+            <a:prstDash val="solid"/>
+          </a:ln>
+        </p:spPr>
+      </p:sp>
+      <p:sp>
+        <p:nvSpPr>
+          <p:cNvPr id="5" name="Shape 3"/>
+          <p:cNvSpPr/>
+          <p:nvPr/>
+        </p:nvSpPr>
+        <p:spPr>
+          <a:xfrm>
+            <a:off x="795528" y="4206240"/>
+            <a:ext cx="137160" cy="137160"/>
+          </a:xfrm>
+          <a:prstGeom prst="ellipse">
+            <a:avLst/>
+          </a:prstGeom>
+          <a:solidFill>
+            <a:srgbClr val="2A78D6"/>
+          </a:solidFill>
+          <a:ln w="12700">
+            <a:solidFill>
+              <a:srgbClr val="2A78D6"/>
+            </a:solidFill>
+            <a:prstDash val="solid"/>
+          </a:ln>
+        </p:spPr>
+      </p:sp>
+      <p:sp>
+        <p:nvSpPr>
+          <p:cNvPr id="6" name="Shape 4"/>
+          <p:cNvSpPr/>
+          <p:nvPr/>
+        </p:nvSpPr>
+        <p:spPr>
+          <a:xfrm>
+            <a:off x="1024128" y="4206240"/>
+            <a:ext cx="137160" cy="137160"/>
+          </a:xfrm>
+          <a:prstGeom prst="ellipse">
+            <a:avLst/>
+          </a:prstGeom>
+          <a:solidFill>
+            <a:srgbClr val="2A78D6"/>
+          </a:solidFill>
+          <a:ln w="12700">
+            <a:solidFill>
+              <a:srgbClr val="2A78D6"/>
+            </a:solidFill>
+            <a:prstDash val="solid"/>
+          </a:ln>
+        </p:spPr>
+      </p:sp>
+      <p:sp>
+        <p:nvSpPr>
+          <p:cNvPr id="7" name="Shape 5"/>
+          <p:cNvSpPr/>
+          <p:nvPr/>
+        </p:nvSpPr>
+        <p:spPr>
+          <a:xfrm>
+            <a:off x="1252728" y="4206240"/>
+            <a:ext cx="137160" cy="137160"/>
+          </a:xfrm>
+          <a:prstGeom prst="ellipse">
+            <a:avLst/>
+          </a:prstGeom>
+          <a:solidFill>
+            <a:srgbClr val="2A78D6"/>
+          </a:solidFill>
+          <a:ln w="12700">
+            <a:solidFill>
+              <a:srgbClr val="2A78D6"/>
+            </a:solidFill>
+            <a:prstDash val="solid"/>
+          </a:ln>
+        </p:spPr>
+      </p:sp>
+      <p:sp>
+        <p:nvSpPr>
+          <p:cNvPr id="8" name="Shape 6"/>
+          <p:cNvSpPr/>
+          <p:nvPr/>
+        </p:nvSpPr>
+        <p:spPr>
+          <a:xfrm>
+            <a:off x="1481328" y="4206240"/>
+            <a:ext cx="137160" cy="137160"/>
+          </a:xfrm>
+          <a:prstGeom prst="ellipse">
+            <a:avLst/>
+          </a:prstGeom>
+          <a:solidFill>
+            <a:srgbClr val="2A78D6"/>
+          </a:solidFill>
+          <a:ln w="12700">
+            <a:solidFill>
+              <a:srgbClr val="2A78D6"/>
+            </a:solidFill>
+            <a:prstDash val="solid"/>
+          </a:ln>
+        </p:spPr>
+      </p:sp>
+      <p:sp>
+        <p:nvSpPr>
+          <p:cNvPr id="9" name="Shape 7"/>
+          <p:cNvSpPr/>
+          <p:nvPr/>
+        </p:nvSpPr>
+        <p:spPr>
+          <a:xfrm>
+            <a:off x="1709928" y="4206240"/>
+            <a:ext cx="137160" cy="137160"/>
+          </a:xfrm>
+          <a:prstGeom prst="ellipse">
+            <a:avLst/>
+          </a:prstGeom>
+          <a:solidFill>
+            <a:srgbClr val="2A78D6"/>
+          </a:solidFill>
+          <a:ln w="12700">
+            <a:solidFill>
+              <a:srgbClr val="2A78D6"/>
+            </a:solidFill>
+            <a:prstDash val="solid"/>
+          </a:ln>
+        </p:spPr>
+      </p:sp>
+      <p:sp>
+        <p:nvSpPr>
+          <p:cNvPr id="10" name="Shape 8"/>
+          <p:cNvSpPr/>
+          <p:nvPr/>
+        </p:nvSpPr>
+        <p:spPr>
+          <a:xfrm>
+            <a:off x="1938528" y="4206240"/>
+            <a:ext cx="137160" cy="137160"/>
+          </a:xfrm>
+          <a:prstGeom prst="ellipse">
+            <a:avLst/>
+          </a:prstGeom>
+          <a:solidFill>
+            <a:srgbClr val="2A78D6"/>
+          </a:solidFill>
+          <a:ln w="12700">
+            <a:solidFill>
+              <a:srgbClr val="2A78D6"/>
+            </a:solidFill>
+            <a:prstDash val="solid"/>
+          </a:ln>
+        </p:spPr>
+      </p:sp>
+      <p:sp>
+        <p:nvSpPr>
+          <p:cNvPr id="11" name="Shape 9"/>
+          <p:cNvSpPr/>
+          <p:nvPr/>
+        </p:nvSpPr>
+        <p:spPr>
+          <a:xfrm>
+            <a:off x="2167128" y="4206240"/>
+            <a:ext cx="137160" cy="137160"/>
+          </a:xfrm>
+          <a:prstGeom prst="ellipse">
+            <a:avLst/>
+          </a:prstGeom>
+          <a:solidFill>
+            <a:srgbClr val="2A78D6"/>
+          </a:solidFill>
+          <a:ln w="12700">
+            <a:solidFill>
+              <a:srgbClr val="2A78D6"/>
+            </a:solidFill>
+            <a:prstDash val="solid"/>
+          </a:ln>
+        </p:spPr>
       </p:sp>
     </p:spTree>
   </p:cSld>
@@ -5641,7 +6307,7 @@
                 <a:ea typeface="Calibri" pitchFamily="34" charset="-122"/>
                 <a:cs typeface="Calibri" pitchFamily="34" charset="-120"/>
               </a:rPr>
-              <a:t>Q — IS THE GAIN BROAD?</a:t>
+              <a:t>Q — INCLUSION CRITERIA</a:t>
             </a:r>
             <a:endParaRPr lang="en-US" sz="1100" dirty="0"/>
           </a:p>
@@ -5683,7 +6349,7 @@
                 <a:ea typeface="Cambria" pitchFamily="34" charset="-122"/>
                 <a:cs typeface="Cambria" pitchFamily="34" charset="-120"/>
               </a:rPr>
-              <a:t>Did ArcFace help everyone, or did the macro mean hide it?</a:t>
+              <a:t>Why 35 of 81? The session rule binds, not the photo rule</a:t>
             </a:r>
             <a:endParaRPr lang="en-US" sz="2500" dirty="0"/>
           </a:p>
@@ -5691,7 +6357,7 @@
       </p:sp>
       <p:pic>
         <p:nvPicPr>
-          <p:cNvPr id="4" name="Image 0" descr="/home/user/pgs/presentation/assets/09_per_individual_change_notitle.png">    </p:cNvPr>
+          <p:cNvPr id="4" name="Image 0" descr="/home/user/pgs/presentation/assets/14_photos_vs_sessions_notitle.png">    </p:cNvPr>
           <p:cNvPicPr>
             <a:picLocks noChangeAspect="1"/>
           </p:cNvPicPr>
@@ -5705,8 +6371,8 @@
         </p:blipFill>
         <p:spPr>
           <a:xfrm>
-            <a:off x="651587" y="1234440"/>
-            <a:ext cx="7237322" cy="4480560"/>
+            <a:off x="924150" y="1234440"/>
+            <a:ext cx="6234996" cy="4480560"/>
           </a:xfrm>
           <a:prstGeom prst="rect">
             <a:avLst/>
@@ -5721,8 +6387,8 @@
         </p:nvSpPr>
         <p:spPr>
           <a:xfrm>
-            <a:off x="8092440" y="1371600"/>
-            <a:ext cx="3566160" cy="4206240"/>
+            <a:off x="7635240" y="1371600"/>
+            <a:ext cx="4023360" cy="4206240"/>
           </a:xfrm>
           <a:prstGeom prst="rect">
             <a:avLst/>
@@ -5753,7 +6419,7 @@
                 <a:ea typeface="Calibri" pitchFamily="34" charset="-122"/>
                 <a:cs typeface="Calibri" pitchFamily="34" charset="-120"/>
               </a:rPr>
-              <a:t>31 of 35 birds improve from softmax+basic to ArcFace+strong</a:t>
+              <a:t>37 of 81 birds fall below 16 photographs; 43 fall below 3 sessions; 34 fail both</a:t>
             </a:r>
             <a:endParaRPr lang="en-US" sz="1250" dirty="0"/>
           </a:p>
@@ -5777,7 +6443,7 @@
                 <a:ea typeface="Calibri" pitchFamily="34" charset="-122"/>
                 <a:cs typeface="Calibri" pitchFamily="34" charset="-120"/>
               </a:rPr>
-              <a:t>Three decline: Beau 0.632→0.579, Nicki 0.207→0.189, Peapod 0.136→0.045</a:t>
+              <a:t>The 46 excluded birds are never queries — they are gallery distractors and, in the open-set test, genuine strangers</a:t>
             </a:r>
             <a:endParaRPr lang="en-US" sz="1250" dirty="0"/>
           </a:p>
@@ -5801,7 +6467,7 @@
                 <a:ea typeface="Calibri" pitchFamily="34" charset="-122"/>
                 <a:cs typeface="Calibri" pitchFamily="34" charset="-120"/>
               </a:rPr>
-              <a:t>Greyjoy is 0.000 under both — the only bird never identified by the best configuration</a:t>
+              <a:t>Nicki and Gonzo sit at almost the same photo count and thirteen sessions apart</a:t>
             </a:r>
             <a:endParaRPr lang="en-US" sz="1250" dirty="0"/>
           </a:p>
@@ -5825,7 +6491,7 @@
                 <a:ea typeface="Calibri" pitchFamily="34" charset="-122"/>
                 <a:cs typeface="Calibri" pitchFamily="34" charset="-120"/>
               </a:rPr>
-              <a:t>The four that do not gain are all 3-to-5-session birds: the same session story</a:t>
+              <a:t>Consequence to concede: 0.559 describes the better-photographed 43% of the colony</a:t>
             </a:r>
             <a:endParaRPr lang="en-US" sz="1250" dirty="0"/>
           </a:p>
@@ -5935,7 +6601,7 @@
                 <a:ea typeface="Calibri" pitchFamily="34" charset="-122"/>
                 <a:cs typeface="Calibri" pitchFamily="34" charset="-120"/>
               </a:rPr>
-              <a:t>Q — EVALUATION DESIGN</a:t>
+              <a:t>Q — IS THE GAIN BROAD?</a:t>
             </a:r>
             <a:endParaRPr lang="en-US" sz="1100" dirty="0"/>
           </a:p>
@@ -5977,7 +6643,7 @@
                 <a:ea typeface="Cambria" pitchFamily="34" charset="-122"/>
                 <a:cs typeface="Cambria" pitchFamily="34" charset="-120"/>
               </a:rPr>
-              <a:t>Why cross-validate rather than hold out one split?</a:t>
+              <a:t>Did ArcFace help everyone, or did the macro mean hide it?</a:t>
             </a:r>
             <a:endParaRPr lang="en-US" sz="2500" dirty="0"/>
           </a:p>
@@ -5985,7 +6651,7 @@
       </p:sp>
       <p:pic>
         <p:nvPicPr>
-          <p:cNvPr id="4" name="Image 0" descr="/home/user/pgs/presentation/assets/11_evaluation_coverage_notitle.png">    </p:cNvPr>
+          <p:cNvPr id="4" name="Image 0" descr="/home/user/pgs/presentation/assets/09_per_individual_change_notitle.png">    </p:cNvPr>
           <p:cNvPicPr>
             <a:picLocks noChangeAspect="1"/>
           </p:cNvPicPr>
@@ -5999,8 +6665,8 @@
         </p:blipFill>
         <p:spPr>
           <a:xfrm>
-            <a:off x="5816647" y="1115568"/>
-            <a:ext cx="4643025" cy="4754880"/>
+            <a:off x="651587" y="1234440"/>
+            <a:ext cx="7237322" cy="4480560"/>
           </a:xfrm>
           <a:prstGeom prst="rect">
             <a:avLst/>
@@ -6015,8 +6681,8 @@
         </p:nvSpPr>
         <p:spPr>
           <a:xfrm>
-            <a:off x="566928" y="1600200"/>
-            <a:ext cx="3749040" cy="4023360"/>
+            <a:off x="8092440" y="1371600"/>
+            <a:ext cx="3566160" cy="4206240"/>
           </a:xfrm>
           <a:prstGeom prst="rect">
             <a:avLst/>
@@ -6033,13 +6699,13 @@
                 <a:spcPct val="105000"/>
               </a:lnSpc>
               <a:spcAft>
-                <a:spcPts val="1600"/>
+                <a:spcPts val="1200"/>
               </a:spcAft>
               <a:buSzPct val="100000"/>
               <a:buChar char="•"/>
             </a:pPr>
             <a:r>
-              <a:rPr lang="en-US" sz="1350" dirty="0">
+              <a:rPr lang="en-US" sz="1250" dirty="0">
                 <a:solidFill>
                   <a:srgbClr val="24303C"/>
                 </a:solidFill>
@@ -6047,9 +6713,9 @@
                 <a:ea typeface="Calibri" pitchFamily="34" charset="-122"/>
                 <a:cs typeface="Calibri" pitchFamily="34" charset="-120"/>
               </a:rPr>
-              <a:t>A single session-disjoint split tests only 261 of 1,743 photographs</a:t>
-            </a:r>
-            <a:endParaRPr lang="en-US" sz="1350" dirty="0"/>
+              <a:t>31 of 35 birds improve from softmax+basic to ArcFace+strong</a:t>
+            </a:r>
+            <a:endParaRPr lang="en-US" sz="1250" dirty="0"/>
           </a:p>
           <a:p>
             <a:pPr marL="342900" indent="-342900">
@@ -6057,13 +6723,13 @@
                 <a:spcPct val="105000"/>
               </a:lnSpc>
               <a:spcAft>
-                <a:spcPts val="1600"/>
+                <a:spcPts val="1200"/>
               </a:spcAft>
               <a:buSzPct val="100000"/>
               <a:buChar char="•"/>
             </a:pPr>
             <a:r>
-              <a:rPr lang="en-US" sz="1350" dirty="0">
+              <a:rPr lang="en-US" sz="1250" dirty="0">
                 <a:solidFill>
                   <a:srgbClr val="24303C"/>
                 </a:solidFill>
@@ -6071,9 +6737,9 @@
                 <a:ea typeface="Calibri" pitchFamily="34" charset="-122"/>
                 <a:cs typeface="Calibri" pitchFamily="34" charset="-120"/>
               </a:rPr>
-              <a:t>Three birds are judged on a single test photograph</a:t>
-            </a:r>
-            <a:endParaRPr lang="en-US" sz="1350" dirty="0"/>
+              <a:t>Three decline: Beau 0.632→0.579, Nicki 0.207→0.189, Peapod 0.136→0.045</a:t>
+            </a:r>
+            <a:endParaRPr lang="en-US" sz="1250" dirty="0"/>
           </a:p>
           <a:p>
             <a:pPr marL="342900" indent="-342900">
@@ -6081,13 +6747,13 @@
                 <a:spcPct val="105000"/>
               </a:lnSpc>
               <a:spcAft>
-                <a:spcPts val="1600"/>
+                <a:spcPts val="1200"/>
               </a:spcAft>
               <a:buSzPct val="100000"/>
               <a:buChar char="•"/>
             </a:pPr>
             <a:r>
-              <a:rPr lang="en-US" sz="1350" dirty="0">
+              <a:rPr lang="en-US" sz="1250" dirty="0">
                 <a:solidFill>
                   <a:srgbClr val="24303C"/>
                 </a:solidFill>
@@ -6095,9 +6761,9 @@
                 <a:ea typeface="Calibri" pitchFamily="34" charset="-122"/>
                 <a:cs typeface="Calibri" pitchFamily="34" charset="-120"/>
               </a:rPr>
-              <a:t>Session-wise 5-fold tests all 1,743 exactly once, still session-disjoint</a:t>
-            </a:r>
-            <a:endParaRPr lang="en-US" sz="1350" dirty="0"/>
+              <a:t>Greyjoy is 0.000 under both — the only bird never identified by the best configuration</a:t>
+            </a:r>
+            <a:endParaRPr lang="en-US" sz="1250" dirty="0"/>
           </a:p>
           <a:p>
             <a:pPr marL="342900" indent="-342900">
@@ -6105,13 +6771,13 @@
                 <a:spcPct val="105000"/>
               </a:lnSpc>
               <a:spcAft>
-                <a:spcPts val="1600"/>
+                <a:spcPts val="1200"/>
               </a:spcAft>
               <a:buSzPct val="100000"/>
               <a:buChar char="•"/>
             </a:pPr>
             <a:r>
-              <a:rPr lang="en-US" sz="1350" dirty="0">
+              <a:rPr lang="en-US" sz="1250" dirty="0">
                 <a:solidFill>
                   <a:srgbClr val="24303C"/>
                 </a:solidFill>
@@ -6119,9 +6785,9 @@
                 <a:ea typeface="Calibri" pitchFamily="34" charset="-122"/>
                 <a:cs typeface="Calibri" pitchFamily="34" charset="-120"/>
               </a:rPr>
-              <a:t>Every bird's whole record contributes out-of-fold evidence</a:t>
-            </a:r>
-            <a:endParaRPr lang="en-US" sz="1350" dirty="0"/>
+              <a:t>The four that do not gain are all 3-to-5-session birds: the same session story</a:t>
+            </a:r>
+            <a:endParaRPr lang="en-US" sz="1250" dirty="0"/>
           </a:p>
         </p:txBody>
       </p:sp>
@@ -6229,7 +6895,7 @@
                 <a:ea typeface="Calibri" pitchFamily="34" charset="-122"/>
                 <a:cs typeface="Calibri" pitchFamily="34" charset="-120"/>
               </a:rPr>
-              <a:t>Q — THE OBVIOUS ECOLOGY QUESTION</a:t>
+              <a:t>Q — EVALUATION DESIGN</a:t>
             </a:r>
             <a:endParaRPr lang="en-US" sz="1100" dirty="0"/>
           </a:p>
@@ -6271,7 +6937,7 @@
                 <a:ea typeface="Cambria" pitchFamily="34" charset="-122"/>
                 <a:cs typeface="Cambria" pitchFamily="34" charset="-120"/>
               </a:rPr>
-              <a:t>Why not crop to the breast spots?</a:t>
+              <a:t>Why cross-validate rather than hold out one split?</a:t>
             </a:r>
             <a:endParaRPr lang="en-US" sz="2500" dirty="0"/>
           </a:p>
@@ -6279,7 +6945,7 @@
       </p:sp>
       <p:pic>
         <p:nvPicPr>
-          <p:cNvPr id="4" name="Image 0" descr="/home/user/pgs/presentation/assets/03_belly_detector_map.png">    </p:cNvPr>
+          <p:cNvPr id="4" name="Image 0" descr="/home/user/pgs/presentation/assets/11_evaluation_coverage_notitle.png">    </p:cNvPr>
           <p:cNvPicPr>
             <a:picLocks noChangeAspect="1"/>
           </p:cNvPicPr>
@@ -6293,8 +6959,8 @@
         </p:blipFill>
         <p:spPr>
           <a:xfrm>
-            <a:off x="6446520" y="2078566"/>
-            <a:ext cx="5193792" cy="2883748"/>
+            <a:off x="5816647" y="1115568"/>
+            <a:ext cx="4643025" cy="4754880"/>
           </a:xfrm>
           <a:prstGeom prst="rect">
             <a:avLst/>
@@ -6309,8 +6975,8 @@
         </p:nvSpPr>
         <p:spPr>
           <a:xfrm>
-            <a:off x="566928" y="1463040"/>
-            <a:ext cx="5577840" cy="4206240"/>
+            <a:off x="566928" y="1600200"/>
+            <a:ext cx="3749040" cy="4023360"/>
           </a:xfrm>
           <a:prstGeom prst="rect">
             <a:avLst/>
@@ -6327,13 +6993,13 @@
                 <a:spcPct val="105000"/>
               </a:lnSpc>
               <a:spcAft>
-                <a:spcPts val="1900"/>
+                <a:spcPts val="1600"/>
               </a:spcAft>
               <a:buSzPct val="100000"/>
               <a:buChar char="•"/>
             </a:pPr>
             <a:r>
-              <a:rPr lang="en-US" sz="1400" dirty="0">
+              <a:rPr lang="en-US" sz="1350" dirty="0">
                 <a:solidFill>
                   <a:srgbClr val="24303C"/>
                 </a:solidFill>
@@ -6341,9 +7007,9 @@
                 <a:ea typeface="Calibri" pitchFamily="34" charset="-122"/>
                 <a:cs typeface="Calibri" pitchFamily="34" charset="-120"/>
               </a:rPr>
-              <a:t>I did. A YOLOv8s ventral-region detector reaches mAP@50 ≈ 0.98</a:t>
-            </a:r>
-            <a:endParaRPr lang="en-US" sz="1400" dirty="0"/>
+              <a:t>A single session-disjoint split tests only 261 of 1,743 photographs</a:t>
+            </a:r>
+            <a:endParaRPr lang="en-US" sz="1350" dirty="0"/>
           </a:p>
           <a:p>
             <a:pPr marL="342900" indent="-342900">
@@ -6351,13 +7017,13 @@
                 <a:spcPct val="105000"/>
               </a:lnSpc>
               <a:spcAft>
-                <a:spcPts val="1900"/>
+                <a:spcPts val="1600"/>
               </a:spcAft>
               <a:buSzPct val="100000"/>
               <a:buChar char="•"/>
             </a:pPr>
             <a:r>
-              <a:rPr lang="en-US" sz="1400" dirty="0">
+              <a:rPr lang="en-US" sz="1350" dirty="0">
                 <a:solidFill>
                   <a:srgbClr val="24303C"/>
                 </a:solidFill>
@@ -6365,9 +7031,9 @@
                 <a:ea typeface="Calibri" pitchFamily="34" charset="-122"/>
                 <a:cs typeface="Calibri" pitchFamily="34" charset="-120"/>
               </a:rPr>
-              <a:t>The classifier on the cropped bellies still lost: 0.866 against 0.950 on full-body images (both under the leaky random split)</a:t>
-            </a:r>
-            <a:endParaRPr lang="en-US" sz="1400" dirty="0"/>
+              <a:t>Three birds are judged on a single test photograph</a:t>
+            </a:r>
+            <a:endParaRPr lang="en-US" sz="1350" dirty="0"/>
           </a:p>
           <a:p>
             <a:pPr marL="342900" indent="-342900">
@@ -6375,13 +7041,13 @@
                 <a:spcPct val="105000"/>
               </a:lnSpc>
               <a:spcAft>
-                <a:spcPts val="1900"/>
+                <a:spcPts val="1600"/>
               </a:spcAft>
               <a:buSzPct val="100000"/>
               <a:buChar char="•"/>
             </a:pPr>
             <a:r>
-              <a:rPr lang="en-US" sz="1400" dirty="0">
+              <a:rPr lang="en-US" sz="1350" dirty="0">
                 <a:solidFill>
                   <a:srgbClr val="24303C"/>
                 </a:solidFill>
@@ -6389,9 +7055,9 @@
                 <a:ea typeface="Calibri" pitchFamily="34" charset="-122"/>
                 <a:cs typeface="Calibri" pitchFamily="34" charset="-120"/>
               </a:rPr>
-              <a:t>Cropping removes identity information the model was using — face, chest band, proportions, posture</a:t>
-            </a:r>
-            <a:endParaRPr lang="en-US" sz="1400" dirty="0"/>
+              <a:t>Session-wise 5-fold tests all 1,743 exactly once, still session-disjoint</a:t>
+            </a:r>
+            <a:endParaRPr lang="en-US" sz="1350" dirty="0"/>
           </a:p>
           <a:p>
             <a:pPr marL="342900" indent="-342900">
@@ -6399,13 +7065,13 @@
                 <a:spcPct val="105000"/>
               </a:lnSpc>
               <a:spcAft>
-                <a:spcPts val="1900"/>
+                <a:spcPts val="1600"/>
               </a:spcAft>
               <a:buSzPct val="100000"/>
               <a:buChar char="•"/>
             </a:pPr>
             <a:r>
-              <a:rPr lang="en-US" sz="1400" dirty="0">
+              <a:rPr lang="en-US" sz="1350" dirty="0">
                 <a:solidFill>
                   <a:srgbClr val="24303C"/>
                 </a:solidFill>
@@ -6413,9 +7079,9 @@
                 <a:ea typeface="Calibri" pitchFamily="34" charset="-122"/>
                 <a:cs typeface="Calibri" pitchFamily="34" charset="-120"/>
               </a:rPr>
-              <a:t>So localisation was not the bottleneck, and every reported identification number uses uncropped photographs</a:t>
-            </a:r>
-            <a:endParaRPr lang="en-US" sz="1400" dirty="0"/>
+              <a:t>Every bird's whole record contributes out-of-fold evidence</a:t>
+            </a:r>
+            <a:endParaRPr lang="en-US" sz="1350" dirty="0"/>
           </a:p>
         </p:txBody>
       </p:sp>
@@ -6523,7 +7189,7 @@
                 <a:ea typeface="Calibri" pitchFamily="34" charset="-122"/>
                 <a:cs typeface="Calibri" pitchFamily="34" charset="-120"/>
               </a:rPr>
-              <a:t>Q — OPEN-SET CALIBRATION</a:t>
+              <a:t>Q — THE OBVIOUS ECOLOGY QUESTION</a:t>
             </a:r>
             <a:endParaRPr lang="en-US" sz="1100" dirty="0"/>
           </a:p>
@@ -6565,7 +7231,7 @@
                 <a:ea typeface="Cambria" pitchFamily="34" charset="-122"/>
                 <a:cs typeface="Cambria" pitchFamily="34" charset="-120"/>
               </a:rPr>
-              <a:t>The threshold has a provenance, and it was wrong once</a:t>
+              <a:t>Why not crop to the breast spots?</a:t>
             </a:r>
             <a:endParaRPr lang="en-US" sz="2500" dirty="0"/>
           </a:p>
@@ -6573,7 +7239,7 @@
       </p:sp>
       <p:pic>
         <p:nvPicPr>
-          <p:cNvPr id="4" name="Image 0" descr="/home/user/pgs/presentation/assets/s10_openset.png">    </p:cNvPr>
+          <p:cNvPr id="4" name="Image 0" descr="/home/user/pgs/presentation/assets/03_belly_detector_map.png">    </p:cNvPr>
           <p:cNvPicPr>
             <a:picLocks noChangeAspect="1"/>
           </p:cNvPicPr>
@@ -6587,8 +7253,8 @@
         </p:blipFill>
         <p:spPr>
           <a:xfrm>
-            <a:off x="566928" y="1483708"/>
-            <a:ext cx="6858000" cy="3936304"/>
+            <a:off x="6446520" y="2078566"/>
+            <a:ext cx="5193792" cy="2883748"/>
           </a:xfrm>
           <a:prstGeom prst="rect">
             <a:avLst/>
@@ -6597,122 +7263,14 @@
       </p:pic>
       <p:sp>
         <p:nvSpPr>
-          <p:cNvPr id="5" name="Shape 2"/>
-          <p:cNvSpPr/>
-          <p:nvPr/>
-        </p:nvSpPr>
-        <p:spPr>
-          <a:xfrm>
-            <a:off x="7589520" y="1280160"/>
-            <a:ext cx="4069080" cy="2148840"/>
-          </a:xfrm>
-          <a:prstGeom prst="roundRect">
-            <a:avLst>
-              <a:gd name="adj" fmla="val 2553"/>
-            </a:avLst>
-          </a:prstGeom>
-          <a:solidFill>
-            <a:srgbClr val="F1F0EC"/>
-          </a:solidFill>
-          <a:ln w="12700">
-            <a:solidFill>
-              <a:srgbClr val="F1F0EC"/>
-            </a:solidFill>
-            <a:prstDash val="solid"/>
-          </a:ln>
-        </p:spPr>
-      </p:sp>
-      <p:sp>
-        <p:nvSpPr>
-          <p:cNvPr id="6" name="Text 3"/>
-          <p:cNvSpPr txBox="1"/>
-          <p:nvPr/>
-        </p:nvSpPr>
-        <p:spPr>
-          <a:xfrm>
-            <a:off x="7818120" y="1426464"/>
-            <a:ext cx="3611880" cy="274320"/>
-          </a:xfrm>
-          <a:prstGeom prst="rect">
-            <a:avLst/>
-          </a:prstGeom>
-          <a:noFill/>
-          <a:ln/>
-        </p:spPr>
-        <p:txBody>
-          <a:bodyPr wrap="square" lIns="0" tIns="0" rIns="0" bIns="0" rtlCol="0" anchor="ctr"/>
-          <a:lstStyle/>
-          <a:p>
-            <a:pPr indent="0" marL="0">
-              <a:buNone/>
-            </a:pPr>
-            <a:r>
-              <a:rPr lang="en-US" sz="1300" b="1" dirty="0">
-                <a:solidFill>
-                  <a:srgbClr val="EB6834"/>
-                </a:solidFill>
-                <a:latin typeface="Calibri" pitchFamily="34" charset="0"/>
-                <a:ea typeface="Calibri" pitchFamily="34" charset="-122"/>
-                <a:cs typeface="Calibri" pitchFamily="34" charset="-120"/>
-              </a:rPr>
-              <a:t>The error I caught</a:t>
-            </a:r>
-            <a:endParaRPr lang="en-US" sz="1300" dirty="0"/>
-          </a:p>
-        </p:txBody>
-      </p:sp>
-      <p:sp>
-        <p:nvSpPr>
-          <p:cNvPr id="7" name="Text 4"/>
-          <p:cNvSpPr txBox="1"/>
-          <p:nvPr/>
-        </p:nvSpPr>
-        <p:spPr>
-          <a:xfrm>
-            <a:off x="7818120" y="1755648"/>
-            <a:ext cx="3611880" cy="1554480"/>
-          </a:xfrm>
-          <a:prstGeom prst="rect">
-            <a:avLst/>
-          </a:prstGeom>
-          <a:noFill/>
-          <a:ln/>
-        </p:spPr>
-        <p:txBody>
-          <a:bodyPr wrap="square" lIns="0" tIns="0" rIns="0" bIns="0" rtlCol="0" anchor="t"/>
-          <a:lstStyle/>
-          <a:p>
-            <a:pPr indent="0" marL="0">
-              <a:lnSpc>
-                <a:spcPct val="108000"/>
-              </a:lnSpc>
-              <a:buNone/>
-            </a:pPr>
-            <a:r>
-              <a:rPr lang="en-US" sz="1150" dirty="0">
-                <a:solidFill>
-                  <a:srgbClr val="24303C"/>
-                </a:solidFill>
-                <a:latin typeface="Calibri" pitchFamily="34" charset="0"/>
-                <a:ea typeface="Calibri" pitchFamily="34" charset="-122"/>
-                <a:cs typeface="Calibri" pitchFamily="34" charset="-120"/>
-              </a:rPr>
-              <a:t>The first shipped threshold was 0.800, tuned on the leaky split with simulated impostors, and documented as rejecting 96.6% of unknown birds. Measured against real never-trained birds it accepts 29.7% of them. That is what replaced it with 0.938.</a:t>
-            </a:r>
-            <a:endParaRPr lang="en-US" sz="1150" dirty="0"/>
-          </a:p>
-        </p:txBody>
-      </p:sp>
-      <p:sp>
-        <p:nvSpPr>
-          <p:cNvPr id="8" name="Text 5"/>
-          <p:cNvSpPr txBox="1"/>
-          <p:nvPr/>
-        </p:nvSpPr>
-        <p:spPr>
-          <a:xfrm>
-            <a:off x="7818120" y="3611880"/>
-            <a:ext cx="3657600" cy="1920240"/>
+          <p:cNvPr id="5" name="Text 2"/>
+          <p:cNvSpPr txBox="1"/>
+          <p:nvPr/>
+        </p:nvSpPr>
+        <p:spPr>
+          <a:xfrm>
+            <a:off x="566928" y="1463040"/>
+            <a:ext cx="5577840" cy="4206240"/>
           </a:xfrm>
           <a:prstGeom prst="rect">
             <a:avLst/>
@@ -6729,13 +7287,13 @@
                 <a:spcPct val="105000"/>
               </a:lnSpc>
               <a:spcAft>
-                <a:spcPts val="1000"/>
+                <a:spcPts val="1900"/>
               </a:spcAft>
               <a:buSzPct val="100000"/>
               <a:buChar char="•"/>
             </a:pPr>
             <a:r>
-              <a:rPr lang="en-US" sz="1200" dirty="0">
+              <a:rPr lang="en-US" sz="1400" dirty="0">
                 <a:solidFill>
                   <a:srgbClr val="24303C"/>
                 </a:solidFill>
@@ -6743,9 +7301,9 @@
                 <a:ea typeface="Calibri" pitchFamily="34" charset="-122"/>
                 <a:cs typeface="Calibri" pitchFamily="34" charset="-120"/>
               </a:rPr>
-              <a:t>0.974 → 1% FAR → DIR 0.123</a:t>
-            </a:r>
-            <a:endParaRPr lang="en-US" sz="1200" dirty="0"/>
+              <a:t>I did. A YOLOv8s ventral-region detector reaches mAP@50 ≈ 0.98</a:t>
+            </a:r>
+            <a:endParaRPr lang="en-US" sz="1400" dirty="0"/>
           </a:p>
           <a:p>
             <a:pPr marL="342900" indent="-342900">
@@ -6753,13 +7311,13 @@
                 <a:spcPct val="105000"/>
               </a:lnSpc>
               <a:spcAft>
-                <a:spcPts val="1000"/>
+                <a:spcPts val="1900"/>
               </a:spcAft>
               <a:buSzPct val="100000"/>
               <a:buChar char="•"/>
             </a:pPr>
             <a:r>
-              <a:rPr lang="en-US" sz="1200" dirty="0">
+              <a:rPr lang="en-US" sz="1400" dirty="0">
                 <a:solidFill>
                   <a:srgbClr val="24303C"/>
                 </a:solidFill>
@@ -6767,9 +7325,9 @@
                 <a:ea typeface="Calibri" pitchFamily="34" charset="-122"/>
                 <a:cs typeface="Calibri" pitchFamily="34" charset="-120"/>
               </a:rPr>
-              <a:t>0.938 → 5% FAR → DIR 0.237  (shipped)</a:t>
-            </a:r>
-            <a:endParaRPr lang="en-US" sz="1200" dirty="0"/>
+              <a:t>The classifier on the cropped bellies still lost: 0.866 against 0.950 on full-body images (both under the leaky random split)</a:t>
+            </a:r>
+            <a:endParaRPr lang="en-US" sz="1400" dirty="0"/>
           </a:p>
           <a:p>
             <a:pPr marL="342900" indent="-342900">
@@ -6777,13 +7335,13 @@
                 <a:spcPct val="105000"/>
               </a:lnSpc>
               <a:spcAft>
-                <a:spcPts val="1000"/>
+                <a:spcPts val="1900"/>
               </a:spcAft>
               <a:buSzPct val="100000"/>
               <a:buChar char="•"/>
             </a:pPr>
             <a:r>
-              <a:rPr lang="en-US" sz="1200" dirty="0">
+              <a:rPr lang="en-US" sz="1400" dirty="0">
                 <a:solidFill>
                   <a:srgbClr val="24303C"/>
                 </a:solidFill>
@@ -6791,9 +7349,9 @@
                 <a:ea typeface="Calibri" pitchFamily="34" charset="-122"/>
                 <a:cs typeface="Calibri" pitchFamily="34" charset="-120"/>
               </a:rPr>
-              <a:t>0.908 → 10% FAR → DIR 0.312</a:t>
-            </a:r>
-            <a:endParaRPr lang="en-US" sz="1200" dirty="0"/>
+              <a:t>Cropping removes identity information the model was using — face, chest band, proportions, posture</a:t>
+            </a:r>
+            <a:endParaRPr lang="en-US" sz="1400" dirty="0"/>
           </a:p>
           <a:p>
             <a:pPr marL="342900" indent="-342900">
@@ -6801,13 +7359,13 @@
                 <a:spcPct val="105000"/>
               </a:lnSpc>
               <a:spcAft>
-                <a:spcPts val="1000"/>
+                <a:spcPts val="1900"/>
               </a:spcAft>
               <a:buSzPct val="100000"/>
               <a:buChar char="•"/>
             </a:pPr>
             <a:r>
-              <a:rPr lang="en-US" sz="1200" dirty="0">
+              <a:rPr lang="en-US" sz="1400" dirty="0">
                 <a:solidFill>
                   <a:srgbClr val="24303C"/>
                 </a:solidFill>
@@ -6815,15 +7373,15 @@
                 <a:ea typeface="Calibri" pitchFamily="34" charset="-122"/>
                 <a:cs typeface="Calibri" pitchFamily="34" charset="-120"/>
               </a:rPr>
-              <a:t>Transferred from the CV models, not recalibrated after full-data training</a:t>
-            </a:r>
-            <a:endParaRPr lang="en-US" sz="1200" dirty="0"/>
-          </a:p>
-        </p:txBody>
-      </p:sp>
-      <p:sp>
-        <p:nvSpPr>
-          <p:cNvPr id="9" name="Text 6"/>
+              <a:t>So localisation was not the bottleneck, and every reported identification number uses uncropped photographs</a:t>
+            </a:r>
+            <a:endParaRPr lang="en-US" sz="1400" dirty="0"/>
+          </a:p>
+        </p:txBody>
+      </p:sp>
+      <p:sp>
+        <p:nvSpPr>
+          <p:cNvPr id="6" name="Text 3"/>
           <p:cNvSpPr txBox="1"/>
           <p:nvPr/>
         </p:nvSpPr>
@@ -6925,7 +7483,7 @@
                 <a:ea typeface="Calibri" pitchFamily="34" charset="-122"/>
                 <a:cs typeface="Calibri" pitchFamily="34" charset="-120"/>
               </a:rPr>
-              <a:t>Q — OVERFITTING AND THE 1.000 DIAGNOSTIC</a:t>
+              <a:t>Q — OPEN-SET CALIBRATION</a:t>
             </a:r>
             <a:endParaRPr lang="en-US" sz="1100" dirty="0"/>
           </a:p>
@@ -6967,26 +7525,50 @@
                 <a:ea typeface="Cambria" pitchFamily="34" charset="-122"/>
                 <a:cs typeface="Cambria" pitchFamily="34" charset="-120"/>
               </a:rPr>
-              <a:t>Training is fixed-length by design — and memorises perfectly</a:t>
+              <a:t>The threshold has a provenance, and it was wrong once</a:t>
             </a:r>
             <a:endParaRPr lang="en-US" sz="2500" dirty="0"/>
           </a:p>
         </p:txBody>
       </p:sp>
-      <p:sp>
-        <p:nvSpPr>
-          <p:cNvPr id="4" name="Shape 2"/>
+      <p:pic>
+        <p:nvPicPr>
+          <p:cNvPr id="4" name="Image 0" descr="/home/user/pgs/presentation/assets/s10_openset.png">    </p:cNvPr>
+          <p:cNvPicPr>
+            <a:picLocks noChangeAspect="1"/>
+          </p:cNvPicPr>
+          <p:nvPr/>
+        </p:nvPicPr>
+        <p:blipFill>
+          <a:blip r:embed="rId1"/>
+          <a:stretch>
+            <a:fillRect/>
+          </a:stretch>
+        </p:blipFill>
+        <p:spPr>
+          <a:xfrm>
+            <a:off x="566928" y="1483708"/>
+            <a:ext cx="6858000" cy="3936304"/>
+          </a:xfrm>
+          <a:prstGeom prst="rect">
+            <a:avLst/>
+          </a:prstGeom>
+        </p:spPr>
+      </p:pic>
+      <p:sp>
+        <p:nvSpPr>
+          <p:cNvPr id="5" name="Shape 2"/>
           <p:cNvSpPr/>
           <p:nvPr/>
         </p:nvSpPr>
         <p:spPr>
           <a:xfrm>
-            <a:off x="566928" y="1280160"/>
-            <a:ext cx="5532120" cy="4343400"/>
+            <a:off x="7589520" y="1280160"/>
+            <a:ext cx="4069080" cy="2148840"/>
           </a:xfrm>
           <a:prstGeom prst="roundRect">
             <a:avLst>
-              <a:gd name="adj" fmla="val 1263"/>
+              <a:gd name="adj" fmla="val 2553"/>
             </a:avLst>
           </a:prstGeom>
           <a:solidFill>
@@ -7002,14 +7584,14 @@
       </p:sp>
       <p:sp>
         <p:nvSpPr>
-          <p:cNvPr id="5" name="Text 3"/>
-          <p:cNvSpPr txBox="1"/>
-          <p:nvPr/>
-        </p:nvSpPr>
-        <p:spPr>
-          <a:xfrm>
-            <a:off x="841248" y="1463040"/>
-            <a:ext cx="4983480" cy="274320"/>
+          <p:cNvPr id="6" name="Text 3"/>
+          <p:cNvSpPr txBox="1"/>
+          <p:nvPr/>
+        </p:nvSpPr>
+        <p:spPr>
+          <a:xfrm>
+            <a:off x="7818120" y="1426464"/>
+            <a:ext cx="3611880" cy="274320"/>
           </a:xfrm>
           <a:prstGeom prst="rect">
             <a:avLst/>
@@ -7027,13 +7609,13 @@
             <a:r>
               <a:rPr lang="en-US" sz="1300" b="1" dirty="0">
                 <a:solidFill>
-                  <a:srgbClr val="0E2A47"/>
-                </a:solidFill>
-                <a:latin typeface="Calibri" pitchFamily="34" charset="0"/>
-                <a:ea typeface="Calibri" pitchFamily="34" charset="-122"/>
-                <a:cs typeface="Calibri" pitchFamily="34" charset="-120"/>
-              </a:rPr>
-              <a:t>The recipe, identical in all 20 runs</a:t>
+                  <a:srgbClr val="EB6834"/>
+                </a:solidFill>
+                <a:latin typeface="Calibri" pitchFamily="34" charset="0"/>
+                <a:ea typeface="Calibri" pitchFamily="34" charset="-122"/>
+                <a:cs typeface="Calibri" pitchFamily="34" charset="-120"/>
+              </a:rPr>
+              <a:t>The error I caught</a:t>
             </a:r>
             <a:endParaRPr lang="en-US" sz="1300" dirty="0"/>
           </a:p>
@@ -7041,14 +7623,56 @@
       </p:sp>
       <p:sp>
         <p:nvSpPr>
-          <p:cNvPr id="6" name="Text 4"/>
-          <p:cNvSpPr txBox="1"/>
-          <p:nvPr/>
-        </p:nvSpPr>
-        <p:spPr>
-          <a:xfrm>
-            <a:off x="841248" y="1828800"/>
-            <a:ext cx="4983480" cy="3657600"/>
+          <p:cNvPr id="7" name="Text 4"/>
+          <p:cNvSpPr txBox="1"/>
+          <p:nvPr/>
+        </p:nvSpPr>
+        <p:spPr>
+          <a:xfrm>
+            <a:off x="7818120" y="1755648"/>
+            <a:ext cx="3611880" cy="1554480"/>
+          </a:xfrm>
+          <a:prstGeom prst="rect">
+            <a:avLst/>
+          </a:prstGeom>
+          <a:noFill/>
+          <a:ln/>
+        </p:spPr>
+        <p:txBody>
+          <a:bodyPr wrap="square" lIns="0" tIns="0" rIns="0" bIns="0" rtlCol="0" anchor="t"/>
+          <a:lstStyle/>
+          <a:p>
+            <a:pPr indent="0" marL="0">
+              <a:lnSpc>
+                <a:spcPct val="108000"/>
+              </a:lnSpc>
+              <a:buNone/>
+            </a:pPr>
+            <a:r>
+              <a:rPr lang="en-US" sz="1150" dirty="0">
+                <a:solidFill>
+                  <a:srgbClr val="24303C"/>
+                </a:solidFill>
+                <a:latin typeface="Calibri" pitchFamily="34" charset="0"/>
+                <a:ea typeface="Calibri" pitchFamily="34" charset="-122"/>
+                <a:cs typeface="Calibri" pitchFamily="34" charset="-120"/>
+              </a:rPr>
+              <a:t>The first shipped threshold was 0.800, tuned on the leaky split with simulated impostors, and documented as rejecting 96.6% of unknown birds. Measured against real never-trained birds it accepts 29.7% of them. That is what replaced it with 0.938.</a:t>
+            </a:r>
+            <a:endParaRPr lang="en-US" sz="1150" dirty="0"/>
+          </a:p>
+        </p:txBody>
+      </p:sp>
+      <p:sp>
+        <p:nvSpPr>
+          <p:cNvPr id="8" name="Text 5"/>
+          <p:cNvSpPr txBox="1"/>
+          <p:nvPr/>
+        </p:nvSpPr>
+        <p:spPr>
+          <a:xfrm>
+            <a:off x="7818120" y="3611880"/>
+            <a:ext cx="3657600" cy="1920240"/>
           </a:xfrm>
           <a:prstGeom prst="rect">
             <a:avLst/>
@@ -7079,7 +7703,7 @@
                 <a:ea typeface="Calibri" pitchFamily="34" charset="-122"/>
                 <a:cs typeface="Calibri" pitchFamily="34" charset="-120"/>
               </a:rPr>
-              <a:t>ResNet18, ImageNet init; 512-d penultimate embedding, L2-normalised; head discarded at inference</a:t>
+              <a:t>0.974 → 1% FAR → DIR 0.123</a:t>
             </a:r>
             <a:endParaRPr lang="en-US" sz="1200" dirty="0"/>
           </a:p>
@@ -7103,7 +7727,7 @@
                 <a:ea typeface="Calibri" pitchFamily="34" charset="-122"/>
                 <a:cs typeface="Calibri" pitchFamily="34" charset="-120"/>
               </a:rPr>
-              <a:t>ArcFace scale 30, margin 0.3, warmed up over the first five epochs — the paper's defaults, never tuned, not exposed as flags</a:t>
+              <a:t>0.938 → 5% FAR → DIR 0.237  (shipped)</a:t>
             </a:r>
             <a:endParaRPr lang="en-US" sz="1200" dirty="0"/>
           </a:p>
@@ -7127,7 +7751,7 @@
                 <a:ea typeface="Calibri" pitchFamily="34" charset="-122"/>
                 <a:cs typeface="Calibri" pitchFamily="34" charset="-120"/>
               </a:rPr>
-              <a:t>AdamW, lr 3e-4, wd 1e-4, batch 32, AMP, seed 42</a:t>
+              <a:t>0.908 → 10% FAR → DIR 0.312</a:t>
             </a:r>
             <a:endParaRPr lang="en-US" sz="1200" dirty="0"/>
           </a:p>
@@ -7151,367 +7775,15 @@
                 <a:ea typeface="Calibri" pitchFamily="34" charset="-122"/>
                 <a:cs typeface="Calibri" pitchFamily="34" charset="-120"/>
               </a:rPr>
-              <a:t>80 fixed epochs; 3-epoch warm-up then cosine decay to exactly zero; final epoch kept unconditionally</a:t>
+              <a:t>Transferred from the CV models, not recalibrated after full-data training</a:t>
             </a:r>
             <a:endParaRPr lang="en-US" sz="1200" dirty="0"/>
           </a:p>
-          <a:p>
-            <a:pPr marL="342900" indent="-342900">
-              <a:lnSpc>
-                <a:spcPct val="105000"/>
-              </a:lnSpc>
-              <a:spcAft>
-                <a:spcPts val="1000"/>
-              </a:spcAft>
-              <a:buSzPct val="100000"/>
-              <a:buChar char="•"/>
-            </a:pPr>
-            <a:r>
-              <a:rPr lang="en-US" sz="1200" dirty="0">
-                <a:solidFill>
-                  <a:srgbClr val="24303C"/>
-                </a:solidFill>
-                <a:latin typeface="Calibri" pitchFamily="34" charset="0"/>
-                <a:ea typeface="Calibri" pitchFamily="34" charset="-122"/>
-                <a:cs typeface="Calibri" pitchFamily="34" charset="-120"/>
-              </a:rPr>
-              <a:t>No validation split, no early stopping, no checkpoint selection — so no configuration can win by being selected more luckily</a:t>
-            </a:r>
-            <a:endParaRPr lang="en-US" sz="1200" dirty="0"/>
-          </a:p>
-        </p:txBody>
-      </p:sp>
-      <p:sp>
-        <p:nvSpPr>
-          <p:cNvPr id="7" name="Text 5"/>
-          <p:cNvSpPr txBox="1"/>
-          <p:nvPr/>
-        </p:nvSpPr>
-        <p:spPr>
-          <a:xfrm>
-            <a:off x="6537960" y="1600200"/>
-            <a:ext cx="2514600" cy="630621"/>
-          </a:xfrm>
-          <a:prstGeom prst="rect">
-            <a:avLst/>
-          </a:prstGeom>
-          <a:noFill/>
-          <a:ln/>
-        </p:spPr>
-        <p:txBody>
-          <a:bodyPr wrap="square" lIns="0" tIns="0" rIns="0" bIns="0" rtlCol="0" anchor="b"/>
-          <a:lstStyle/>
-          <a:p>
-            <a:pPr algn="l" indent="0" marL="0">
-              <a:buNone/>
-            </a:pPr>
-            <a:r>
-              <a:rPr lang="en-US" sz="4000" b="1" dirty="0">
-                <a:solidFill>
-                  <a:srgbClr val="A9AEB5"/>
-                </a:solidFill>
-                <a:latin typeface="Cambria" pitchFamily="34" charset="0"/>
-                <a:ea typeface="Cambria" pitchFamily="34" charset="-122"/>
-                <a:cs typeface="Cambria" pitchFamily="34" charset="-120"/>
-              </a:rPr>
-              <a:t>1.000</a:t>
-            </a:r>
-            <a:endParaRPr lang="en-US" sz="4000" dirty="0"/>
-          </a:p>
-        </p:txBody>
-      </p:sp>
-      <p:sp>
-        <p:nvSpPr>
-          <p:cNvPr id="8" name="Text 6"/>
-          <p:cNvSpPr txBox="1"/>
-          <p:nvPr/>
-        </p:nvSpPr>
-        <p:spPr>
-          <a:xfrm>
-            <a:off x="6537960" y="2267397"/>
-            <a:ext cx="2514600" cy="237744"/>
-          </a:xfrm>
-          <a:prstGeom prst="rect">
-            <a:avLst/>
-          </a:prstGeom>
-          <a:noFill/>
-          <a:ln/>
-        </p:spPr>
-        <p:txBody>
-          <a:bodyPr wrap="square" lIns="0" tIns="0" rIns="0" bIns="0" rtlCol="0" anchor="t"/>
-          <a:lstStyle/>
-          <a:p>
-            <a:pPr indent="0" marL="0">
-              <a:lnSpc>
-                <a:spcPct val="100000"/>
-              </a:lnSpc>
-              <a:buNone/>
-            </a:pPr>
-            <a:r>
-              <a:rPr lang="en-US" sz="1200" b="1" dirty="0">
-                <a:solidFill>
-                  <a:srgbClr val="24303C"/>
-                </a:solidFill>
-                <a:latin typeface="Calibri" pitchFamily="34" charset="0"/>
-                <a:ea typeface="Calibri" pitchFamily="34" charset="-122"/>
-                <a:cs typeface="Calibri" pitchFamily="34" charset="-120"/>
-              </a:rPr>
-              <a:t>training photographs</a:t>
-            </a:r>
-            <a:endParaRPr lang="en-US" sz="1200" dirty="0"/>
-          </a:p>
-        </p:txBody>
-      </p:sp>
-      <p:sp>
-        <p:nvSpPr>
-          <p:cNvPr id="9" name="Text 7"/>
-          <p:cNvSpPr txBox="1"/>
-          <p:nvPr/>
-        </p:nvSpPr>
-        <p:spPr>
-          <a:xfrm>
-            <a:off x="6537960" y="2505141"/>
-            <a:ext cx="2514600" cy="566928"/>
-          </a:xfrm>
-          <a:prstGeom prst="rect">
-            <a:avLst/>
-          </a:prstGeom>
-          <a:noFill/>
-          <a:ln/>
-        </p:spPr>
-        <p:txBody>
-          <a:bodyPr wrap="square" lIns="0" tIns="0" rIns="0" bIns="0" rtlCol="0" anchor="t"/>
-          <a:lstStyle/>
-          <a:p>
-            <a:pPr indent="0" marL="0">
-              <a:lnSpc>
-                <a:spcPct val="95000"/>
-              </a:lnSpc>
-              <a:buNone/>
-            </a:pPr>
-            <a:r>
-              <a:rPr lang="en-US" sz="1050" dirty="0">
-                <a:solidFill>
-                  <a:srgbClr val="6E7681"/>
-                </a:solidFill>
-                <a:latin typeface="Calibri" pitchFamily="34" charset="0"/>
-                <a:ea typeface="Calibri" pitchFamily="34" charset="-122"/>
-                <a:cs typeface="Calibri" pitchFamily="34" charset="-120"/>
-              </a:rPr>
-              <a:t>own session excluded — fold 0, 1,394 photos.</a:t>
-            </a:r>
-            <a:endParaRPr lang="en-US" sz="1050" dirty="0"/>
-          </a:p>
-          <a:p>
-            <a:pPr indent="0" marL="0">
-              <a:lnSpc>
-                <a:spcPct val="95000"/>
-              </a:lnSpc>
-              <a:buNone/>
-            </a:pPr>
-            <a:r>
-              <a:rPr lang="en-US" sz="1050" dirty="0">
-                <a:solidFill>
-                  <a:srgbClr val="6E7681"/>
-                </a:solidFill>
-                <a:latin typeface="Calibri" pitchFamily="34" charset="0"/>
-                <a:ea typeface="Calibri" pitchFamily="34" charset="-122"/>
-                <a:cs typeface="Calibri" pitchFamily="34" charset="-120"/>
-              </a:rPr>
-              <a:t>A diagnostic, not a test.</a:t>
-            </a:r>
-            <a:endParaRPr lang="en-US" sz="1050" dirty="0"/>
-          </a:p>
-        </p:txBody>
-      </p:sp>
-      <p:sp>
-        <p:nvSpPr>
-          <p:cNvPr id="10" name="Text 8"/>
-          <p:cNvSpPr txBox="1"/>
-          <p:nvPr/>
-        </p:nvSpPr>
-        <p:spPr>
-          <a:xfrm>
-            <a:off x="9281160" y="1600200"/>
-            <a:ext cx="2377440" cy="630621"/>
-          </a:xfrm>
-          <a:prstGeom prst="rect">
-            <a:avLst/>
-          </a:prstGeom>
-          <a:noFill/>
-          <a:ln/>
-        </p:spPr>
-        <p:txBody>
-          <a:bodyPr wrap="square" lIns="0" tIns="0" rIns="0" bIns="0" rtlCol="0" anchor="b"/>
-          <a:lstStyle/>
-          <a:p>
-            <a:pPr algn="l" indent="0" marL="0">
-              <a:buNone/>
-            </a:pPr>
-            <a:r>
-              <a:rPr lang="en-US" sz="4000" b="1" dirty="0">
-                <a:solidFill>
-                  <a:srgbClr val="EB6834"/>
-                </a:solidFill>
-                <a:latin typeface="Cambria" pitchFamily="34" charset="0"/>
-                <a:ea typeface="Cambria" pitchFamily="34" charset="-122"/>
-                <a:cs typeface="Cambria" pitchFamily="34" charset="-120"/>
-              </a:rPr>
-              <a:t>0.390</a:t>
-            </a:r>
-            <a:endParaRPr lang="en-US" sz="4000" dirty="0"/>
-          </a:p>
-        </p:txBody>
-      </p:sp>
-      <p:sp>
-        <p:nvSpPr>
-          <p:cNvPr id="11" name="Text 9"/>
-          <p:cNvSpPr txBox="1"/>
-          <p:nvPr/>
-        </p:nvSpPr>
-        <p:spPr>
-          <a:xfrm>
-            <a:off x="9281160" y="2267397"/>
-            <a:ext cx="2377440" cy="237744"/>
-          </a:xfrm>
-          <a:prstGeom prst="rect">
-            <a:avLst/>
-          </a:prstGeom>
-          <a:noFill/>
-          <a:ln/>
-        </p:spPr>
-        <p:txBody>
-          <a:bodyPr wrap="square" lIns="0" tIns="0" rIns="0" bIns="0" rtlCol="0" anchor="t"/>
-          <a:lstStyle/>
-          <a:p>
-            <a:pPr indent="0" marL="0">
-              <a:lnSpc>
-                <a:spcPct val="100000"/>
-              </a:lnSpc>
-              <a:buNone/>
-            </a:pPr>
-            <a:r>
-              <a:rPr lang="en-US" sz="1200" b="1" dirty="0">
-                <a:solidFill>
-                  <a:srgbClr val="24303C"/>
-                </a:solidFill>
-                <a:latin typeface="Calibri" pitchFamily="34" charset="0"/>
-                <a:ea typeface="Calibri" pitchFamily="34" charset="-122"/>
-                <a:cs typeface="Calibri" pitchFamily="34" charset="-120"/>
-              </a:rPr>
-              <a:t>held-out sessions</a:t>
-            </a:r>
-            <a:endParaRPr lang="en-US" sz="1200" dirty="0"/>
-          </a:p>
-        </p:txBody>
-      </p:sp>
-      <p:sp>
-        <p:nvSpPr>
-          <p:cNvPr id="12" name="Text 10"/>
-          <p:cNvSpPr txBox="1"/>
-          <p:nvPr/>
-        </p:nvSpPr>
-        <p:spPr>
-          <a:xfrm>
-            <a:off x="9281160" y="2505141"/>
-            <a:ext cx="2377440" cy="566928"/>
-          </a:xfrm>
-          <a:prstGeom prst="rect">
-            <a:avLst/>
-          </a:prstGeom>
-          <a:noFill/>
-          <a:ln/>
-        </p:spPr>
-        <p:txBody>
-          <a:bodyPr wrap="square" lIns="0" tIns="0" rIns="0" bIns="0" rtlCol="0" anchor="t"/>
-          <a:lstStyle/>
-          <a:p>
-            <a:pPr indent="0" marL="0">
-              <a:lnSpc>
-                <a:spcPct val="95000"/>
-              </a:lnSpc>
-              <a:buNone/>
-            </a:pPr>
-            <a:r>
-              <a:rPr lang="en-US" sz="1050" dirty="0">
-                <a:solidFill>
-                  <a:srgbClr val="6E7681"/>
-                </a:solidFill>
-                <a:latin typeface="Calibri" pitchFamily="34" charset="0"/>
-                <a:ea typeface="Calibri" pitchFamily="34" charset="-122"/>
-                <a:cs typeface="Calibri" pitchFamily="34" charset="-120"/>
-              </a:rPr>
-              <a:t>softmax + basic, session-disjoint.</a:t>
-            </a:r>
-            <a:endParaRPr lang="en-US" sz="1050" dirty="0"/>
-          </a:p>
-          <a:p>
-            <a:pPr indent="0" marL="0">
-              <a:lnSpc>
-                <a:spcPct val="95000"/>
-              </a:lnSpc>
-              <a:buNone/>
-            </a:pPr>
-            <a:r>
-              <a:rPr lang="en-US" sz="1050" dirty="0">
-                <a:solidFill>
-                  <a:srgbClr val="6E7681"/>
-                </a:solidFill>
-                <a:latin typeface="Calibri" pitchFamily="34" charset="0"/>
-                <a:ea typeface="Calibri" pitchFamily="34" charset="-122"/>
-                <a:cs typeface="Calibri" pitchFamily="34" charset="-120"/>
-              </a:rPr>
-              <a:t>The same fixed recipe.</a:t>
-            </a:r>
-            <a:endParaRPr lang="en-US" sz="1050" dirty="0"/>
-          </a:p>
-        </p:txBody>
-      </p:sp>
-      <p:sp>
-        <p:nvSpPr>
-          <p:cNvPr id="13" name="Text 11"/>
-          <p:cNvSpPr txBox="1"/>
-          <p:nvPr/>
-        </p:nvSpPr>
-        <p:spPr>
-          <a:xfrm>
-            <a:off x="6537960" y="3429000"/>
-            <a:ext cx="5120640" cy="2194560"/>
-          </a:xfrm>
-          <a:prstGeom prst="rect">
-            <a:avLst/>
-          </a:prstGeom>
-          <a:noFill/>
-          <a:ln/>
-        </p:spPr>
-        <p:txBody>
-          <a:bodyPr wrap="square" lIns="0" tIns="0" rIns="0" bIns="0" rtlCol="0" anchor="t"/>
-          <a:lstStyle/>
-          <a:p>
-            <a:pPr indent="0" marL="0">
-              <a:lnSpc>
-                <a:spcPct val="110000"/>
-              </a:lnSpc>
-              <a:buNone/>
-            </a:pPr>
-            <a:r>
-              <a:rPr lang="en-US" sz="1200" dirty="0">
-                <a:solidFill>
-                  <a:srgbClr val="24303C"/>
-                </a:solidFill>
-                <a:latin typeface="Calibri" pitchFamily="34" charset="0"/>
-                <a:ea typeface="Calibri" pitchFamily="34" charset="-122"/>
-                <a:cs typeface="Calibri" pitchFamily="34" charset="-120"/>
-              </a:rPr>
-              <a:t>Those 1,394 photographs had already contributed to optimising the parameters, so high performance was expected and this is not independent evidence of generalisation. Its only job is to locate the failure: the model separates everything it was fitted on, and fails on sessions it was not. The bottleneck is new capture occasions, not the representation. It was run for fold 0 only, and no script was retained to reproduce it across folds.</a:t>
-            </a:r>
-            <a:endParaRPr lang="en-US" sz="1200" dirty="0"/>
-          </a:p>
-        </p:txBody>
-      </p:sp>
-      <p:sp>
-        <p:nvSpPr>
-          <p:cNvPr id="14" name="Text 12"/>
+        </p:txBody>
+      </p:sp>
+      <p:sp>
+        <p:nvSpPr>
+          <p:cNvPr id="9" name="Text 6"/>
           <p:cNvSpPr txBox="1"/>
           <p:nvPr/>
         </p:nvSpPr>
@@ -8053,7 +8325,7 @@
                 <a:ea typeface="Calibri" pitchFamily="34" charset="-122"/>
                 <a:cs typeface="Calibri" pitchFamily="34" charset="-120"/>
               </a:rPr>
-              <a:t>Q — THE FULL RESULTS</a:t>
+              <a:t>Q — OVERFITTING AND THE 1.000 DIAGNOSTIC</a:t>
             </a:r>
             <a:endParaRPr lang="en-US" sz="1100" dirty="0"/>
           </a:p>
@@ -8095,6 +8367,694 @@
                 <a:ea typeface="Cambria" pitchFamily="34" charset="-122"/>
                 <a:cs typeface="Cambria" pitchFamily="34" charset="-120"/>
               </a:rPr>
+              <a:t>Training is fixed-length by design — and memorises perfectly</a:t>
+            </a:r>
+            <a:endParaRPr lang="en-US" sz="2500" dirty="0"/>
+          </a:p>
+        </p:txBody>
+      </p:sp>
+      <p:sp>
+        <p:nvSpPr>
+          <p:cNvPr id="4" name="Shape 2"/>
+          <p:cNvSpPr/>
+          <p:nvPr/>
+        </p:nvSpPr>
+        <p:spPr>
+          <a:xfrm>
+            <a:off x="566928" y="1280160"/>
+            <a:ext cx="5532120" cy="4343400"/>
+          </a:xfrm>
+          <a:prstGeom prst="roundRect">
+            <a:avLst>
+              <a:gd name="adj" fmla="val 1263"/>
+            </a:avLst>
+          </a:prstGeom>
+          <a:solidFill>
+            <a:srgbClr val="F1F0EC"/>
+          </a:solidFill>
+          <a:ln w="12700">
+            <a:solidFill>
+              <a:srgbClr val="F1F0EC"/>
+            </a:solidFill>
+            <a:prstDash val="solid"/>
+          </a:ln>
+        </p:spPr>
+      </p:sp>
+      <p:sp>
+        <p:nvSpPr>
+          <p:cNvPr id="5" name="Text 3"/>
+          <p:cNvSpPr txBox="1"/>
+          <p:nvPr/>
+        </p:nvSpPr>
+        <p:spPr>
+          <a:xfrm>
+            <a:off x="841248" y="1463040"/>
+            <a:ext cx="4983480" cy="274320"/>
+          </a:xfrm>
+          <a:prstGeom prst="rect">
+            <a:avLst/>
+          </a:prstGeom>
+          <a:noFill/>
+          <a:ln/>
+        </p:spPr>
+        <p:txBody>
+          <a:bodyPr wrap="square" lIns="0" tIns="0" rIns="0" bIns="0" rtlCol="0" anchor="ctr"/>
+          <a:lstStyle/>
+          <a:p>
+            <a:pPr indent="0" marL="0">
+              <a:buNone/>
+            </a:pPr>
+            <a:r>
+              <a:rPr lang="en-US" sz="1300" b="1" dirty="0">
+                <a:solidFill>
+                  <a:srgbClr val="0E2A47"/>
+                </a:solidFill>
+                <a:latin typeface="Calibri" pitchFamily="34" charset="0"/>
+                <a:ea typeface="Calibri" pitchFamily="34" charset="-122"/>
+                <a:cs typeface="Calibri" pitchFamily="34" charset="-120"/>
+              </a:rPr>
+              <a:t>The recipe, identical in all 20 runs</a:t>
+            </a:r>
+            <a:endParaRPr lang="en-US" sz="1300" dirty="0"/>
+          </a:p>
+        </p:txBody>
+      </p:sp>
+      <p:sp>
+        <p:nvSpPr>
+          <p:cNvPr id="6" name="Text 4"/>
+          <p:cNvSpPr txBox="1"/>
+          <p:nvPr/>
+        </p:nvSpPr>
+        <p:spPr>
+          <a:xfrm>
+            <a:off x="841248" y="1828800"/>
+            <a:ext cx="4983480" cy="3657600"/>
+          </a:xfrm>
+          <a:prstGeom prst="rect">
+            <a:avLst/>
+          </a:prstGeom>
+          <a:noFill/>
+          <a:ln/>
+        </p:spPr>
+        <p:txBody>
+          <a:bodyPr wrap="square" lIns="0" tIns="0" rIns="0" bIns="0" rtlCol="0" anchor="t"/>
+          <a:lstStyle/>
+          <a:p>
+            <a:pPr marL="342900" indent="-342900">
+              <a:lnSpc>
+                <a:spcPct val="105000"/>
+              </a:lnSpc>
+              <a:spcAft>
+                <a:spcPts val="1000"/>
+              </a:spcAft>
+              <a:buSzPct val="100000"/>
+              <a:buChar char="•"/>
+            </a:pPr>
+            <a:r>
+              <a:rPr lang="en-US" sz="1200" dirty="0">
+                <a:solidFill>
+                  <a:srgbClr val="24303C"/>
+                </a:solidFill>
+                <a:latin typeface="Calibri" pitchFamily="34" charset="0"/>
+                <a:ea typeface="Calibri" pitchFamily="34" charset="-122"/>
+                <a:cs typeface="Calibri" pitchFamily="34" charset="-120"/>
+              </a:rPr>
+              <a:t>ResNet18, ImageNet init; 512-d penultimate embedding, L2-normalised; head discarded at inference</a:t>
+            </a:r>
+            <a:endParaRPr lang="en-US" sz="1200" dirty="0"/>
+          </a:p>
+          <a:p>
+            <a:pPr marL="342900" indent="-342900">
+              <a:lnSpc>
+                <a:spcPct val="105000"/>
+              </a:lnSpc>
+              <a:spcAft>
+                <a:spcPts val="1000"/>
+              </a:spcAft>
+              <a:buSzPct val="100000"/>
+              <a:buChar char="•"/>
+            </a:pPr>
+            <a:r>
+              <a:rPr lang="en-US" sz="1200" dirty="0">
+                <a:solidFill>
+                  <a:srgbClr val="24303C"/>
+                </a:solidFill>
+                <a:latin typeface="Calibri" pitchFamily="34" charset="0"/>
+                <a:ea typeface="Calibri" pitchFamily="34" charset="-122"/>
+                <a:cs typeface="Calibri" pitchFamily="34" charset="-120"/>
+              </a:rPr>
+              <a:t>ArcFace scale 30, margin 0.3, warmed up over the first five epochs — the paper's defaults, never tuned, not exposed as flags</a:t>
+            </a:r>
+            <a:endParaRPr lang="en-US" sz="1200" dirty="0"/>
+          </a:p>
+          <a:p>
+            <a:pPr marL="342900" indent="-342900">
+              <a:lnSpc>
+                <a:spcPct val="105000"/>
+              </a:lnSpc>
+              <a:spcAft>
+                <a:spcPts val="1000"/>
+              </a:spcAft>
+              <a:buSzPct val="100000"/>
+              <a:buChar char="•"/>
+            </a:pPr>
+            <a:r>
+              <a:rPr lang="en-US" sz="1200" dirty="0">
+                <a:solidFill>
+                  <a:srgbClr val="24303C"/>
+                </a:solidFill>
+                <a:latin typeface="Calibri" pitchFamily="34" charset="0"/>
+                <a:ea typeface="Calibri" pitchFamily="34" charset="-122"/>
+                <a:cs typeface="Calibri" pitchFamily="34" charset="-120"/>
+              </a:rPr>
+              <a:t>AdamW, lr 3e-4, wd 1e-4, batch 32, AMP, seed 42</a:t>
+            </a:r>
+            <a:endParaRPr lang="en-US" sz="1200" dirty="0"/>
+          </a:p>
+          <a:p>
+            <a:pPr marL="342900" indent="-342900">
+              <a:lnSpc>
+                <a:spcPct val="105000"/>
+              </a:lnSpc>
+              <a:spcAft>
+                <a:spcPts val="1000"/>
+              </a:spcAft>
+              <a:buSzPct val="100000"/>
+              <a:buChar char="•"/>
+            </a:pPr>
+            <a:r>
+              <a:rPr lang="en-US" sz="1200" dirty="0">
+                <a:solidFill>
+                  <a:srgbClr val="24303C"/>
+                </a:solidFill>
+                <a:latin typeface="Calibri" pitchFamily="34" charset="0"/>
+                <a:ea typeface="Calibri" pitchFamily="34" charset="-122"/>
+                <a:cs typeface="Calibri" pitchFamily="34" charset="-120"/>
+              </a:rPr>
+              <a:t>80 fixed epochs; 3-epoch warm-up then cosine decay to exactly zero; final epoch kept unconditionally</a:t>
+            </a:r>
+            <a:endParaRPr lang="en-US" sz="1200" dirty="0"/>
+          </a:p>
+          <a:p>
+            <a:pPr marL="342900" indent="-342900">
+              <a:lnSpc>
+                <a:spcPct val="105000"/>
+              </a:lnSpc>
+              <a:spcAft>
+                <a:spcPts val="1000"/>
+              </a:spcAft>
+              <a:buSzPct val="100000"/>
+              <a:buChar char="•"/>
+            </a:pPr>
+            <a:r>
+              <a:rPr lang="en-US" sz="1200" dirty="0">
+                <a:solidFill>
+                  <a:srgbClr val="24303C"/>
+                </a:solidFill>
+                <a:latin typeface="Calibri" pitchFamily="34" charset="0"/>
+                <a:ea typeface="Calibri" pitchFamily="34" charset="-122"/>
+                <a:cs typeface="Calibri" pitchFamily="34" charset="-120"/>
+              </a:rPr>
+              <a:t>No validation split, no early stopping, no checkpoint selection — so no configuration can win by being selected more luckily</a:t>
+            </a:r>
+            <a:endParaRPr lang="en-US" sz="1200" dirty="0"/>
+          </a:p>
+        </p:txBody>
+      </p:sp>
+      <p:sp>
+        <p:nvSpPr>
+          <p:cNvPr id="7" name="Text 5"/>
+          <p:cNvSpPr txBox="1"/>
+          <p:nvPr/>
+        </p:nvSpPr>
+        <p:spPr>
+          <a:xfrm>
+            <a:off x="6537960" y="1600200"/>
+            <a:ext cx="2514600" cy="630621"/>
+          </a:xfrm>
+          <a:prstGeom prst="rect">
+            <a:avLst/>
+          </a:prstGeom>
+          <a:noFill/>
+          <a:ln/>
+        </p:spPr>
+        <p:txBody>
+          <a:bodyPr wrap="square" lIns="0" tIns="0" rIns="0" bIns="0" rtlCol="0" anchor="b"/>
+          <a:lstStyle/>
+          <a:p>
+            <a:pPr algn="l" indent="0" marL="0">
+              <a:buNone/>
+            </a:pPr>
+            <a:r>
+              <a:rPr lang="en-US" sz="4000" b="1" dirty="0">
+                <a:solidFill>
+                  <a:srgbClr val="A9AEB5"/>
+                </a:solidFill>
+                <a:latin typeface="Cambria" pitchFamily="34" charset="0"/>
+                <a:ea typeface="Cambria" pitchFamily="34" charset="-122"/>
+                <a:cs typeface="Cambria" pitchFamily="34" charset="-120"/>
+              </a:rPr>
+              <a:t>1.000</a:t>
+            </a:r>
+            <a:endParaRPr lang="en-US" sz="4000" dirty="0"/>
+          </a:p>
+        </p:txBody>
+      </p:sp>
+      <p:sp>
+        <p:nvSpPr>
+          <p:cNvPr id="8" name="Text 6"/>
+          <p:cNvSpPr txBox="1"/>
+          <p:nvPr/>
+        </p:nvSpPr>
+        <p:spPr>
+          <a:xfrm>
+            <a:off x="6537960" y="2267397"/>
+            <a:ext cx="2514600" cy="237744"/>
+          </a:xfrm>
+          <a:prstGeom prst="rect">
+            <a:avLst/>
+          </a:prstGeom>
+          <a:noFill/>
+          <a:ln/>
+        </p:spPr>
+        <p:txBody>
+          <a:bodyPr wrap="square" lIns="0" tIns="0" rIns="0" bIns="0" rtlCol="0" anchor="t"/>
+          <a:lstStyle/>
+          <a:p>
+            <a:pPr indent="0" marL="0">
+              <a:lnSpc>
+                <a:spcPct val="100000"/>
+              </a:lnSpc>
+              <a:buNone/>
+            </a:pPr>
+            <a:r>
+              <a:rPr lang="en-US" sz="1200" b="1" dirty="0">
+                <a:solidFill>
+                  <a:srgbClr val="24303C"/>
+                </a:solidFill>
+                <a:latin typeface="Calibri" pitchFamily="34" charset="0"/>
+                <a:ea typeface="Calibri" pitchFamily="34" charset="-122"/>
+                <a:cs typeface="Calibri" pitchFamily="34" charset="-120"/>
+              </a:rPr>
+              <a:t>training photographs</a:t>
+            </a:r>
+            <a:endParaRPr lang="en-US" sz="1200" dirty="0"/>
+          </a:p>
+        </p:txBody>
+      </p:sp>
+      <p:sp>
+        <p:nvSpPr>
+          <p:cNvPr id="9" name="Text 7"/>
+          <p:cNvSpPr txBox="1"/>
+          <p:nvPr/>
+        </p:nvSpPr>
+        <p:spPr>
+          <a:xfrm>
+            <a:off x="6537960" y="2505141"/>
+            <a:ext cx="2514600" cy="566928"/>
+          </a:xfrm>
+          <a:prstGeom prst="rect">
+            <a:avLst/>
+          </a:prstGeom>
+          <a:noFill/>
+          <a:ln/>
+        </p:spPr>
+        <p:txBody>
+          <a:bodyPr wrap="square" lIns="0" tIns="0" rIns="0" bIns="0" rtlCol="0" anchor="t"/>
+          <a:lstStyle/>
+          <a:p>
+            <a:pPr indent="0" marL="0">
+              <a:lnSpc>
+                <a:spcPct val="95000"/>
+              </a:lnSpc>
+              <a:buNone/>
+            </a:pPr>
+            <a:r>
+              <a:rPr lang="en-US" sz="1050" dirty="0">
+                <a:solidFill>
+                  <a:srgbClr val="6E7681"/>
+                </a:solidFill>
+                <a:latin typeface="Calibri" pitchFamily="34" charset="0"/>
+                <a:ea typeface="Calibri" pitchFamily="34" charset="-122"/>
+                <a:cs typeface="Calibri" pitchFamily="34" charset="-120"/>
+              </a:rPr>
+              <a:t>own session excluded — fold 0, 1,394 photos.</a:t>
+            </a:r>
+            <a:endParaRPr lang="en-US" sz="1050" dirty="0"/>
+          </a:p>
+          <a:p>
+            <a:pPr indent="0" marL="0">
+              <a:lnSpc>
+                <a:spcPct val="95000"/>
+              </a:lnSpc>
+              <a:buNone/>
+            </a:pPr>
+            <a:r>
+              <a:rPr lang="en-US" sz="1050" dirty="0">
+                <a:solidFill>
+                  <a:srgbClr val="6E7681"/>
+                </a:solidFill>
+                <a:latin typeface="Calibri" pitchFamily="34" charset="0"/>
+                <a:ea typeface="Calibri" pitchFamily="34" charset="-122"/>
+                <a:cs typeface="Calibri" pitchFamily="34" charset="-120"/>
+              </a:rPr>
+              <a:t>A diagnostic, not a test.</a:t>
+            </a:r>
+            <a:endParaRPr lang="en-US" sz="1050" dirty="0"/>
+          </a:p>
+        </p:txBody>
+      </p:sp>
+      <p:sp>
+        <p:nvSpPr>
+          <p:cNvPr id="10" name="Text 8"/>
+          <p:cNvSpPr txBox="1"/>
+          <p:nvPr/>
+        </p:nvSpPr>
+        <p:spPr>
+          <a:xfrm>
+            <a:off x="9281160" y="1600200"/>
+            <a:ext cx="2377440" cy="630621"/>
+          </a:xfrm>
+          <a:prstGeom prst="rect">
+            <a:avLst/>
+          </a:prstGeom>
+          <a:noFill/>
+          <a:ln/>
+        </p:spPr>
+        <p:txBody>
+          <a:bodyPr wrap="square" lIns="0" tIns="0" rIns="0" bIns="0" rtlCol="0" anchor="b"/>
+          <a:lstStyle/>
+          <a:p>
+            <a:pPr algn="l" indent="0" marL="0">
+              <a:buNone/>
+            </a:pPr>
+            <a:r>
+              <a:rPr lang="en-US" sz="4000" b="1" dirty="0">
+                <a:solidFill>
+                  <a:srgbClr val="EB6834"/>
+                </a:solidFill>
+                <a:latin typeface="Cambria" pitchFamily="34" charset="0"/>
+                <a:ea typeface="Cambria" pitchFamily="34" charset="-122"/>
+                <a:cs typeface="Cambria" pitchFamily="34" charset="-120"/>
+              </a:rPr>
+              <a:t>0.390</a:t>
+            </a:r>
+            <a:endParaRPr lang="en-US" sz="4000" dirty="0"/>
+          </a:p>
+        </p:txBody>
+      </p:sp>
+      <p:sp>
+        <p:nvSpPr>
+          <p:cNvPr id="11" name="Text 9"/>
+          <p:cNvSpPr txBox="1"/>
+          <p:nvPr/>
+        </p:nvSpPr>
+        <p:spPr>
+          <a:xfrm>
+            <a:off x="9281160" y="2267397"/>
+            <a:ext cx="2377440" cy="237744"/>
+          </a:xfrm>
+          <a:prstGeom prst="rect">
+            <a:avLst/>
+          </a:prstGeom>
+          <a:noFill/>
+          <a:ln/>
+        </p:spPr>
+        <p:txBody>
+          <a:bodyPr wrap="square" lIns="0" tIns="0" rIns="0" bIns="0" rtlCol="0" anchor="t"/>
+          <a:lstStyle/>
+          <a:p>
+            <a:pPr indent="0" marL="0">
+              <a:lnSpc>
+                <a:spcPct val="100000"/>
+              </a:lnSpc>
+              <a:buNone/>
+            </a:pPr>
+            <a:r>
+              <a:rPr lang="en-US" sz="1200" b="1" dirty="0">
+                <a:solidFill>
+                  <a:srgbClr val="24303C"/>
+                </a:solidFill>
+                <a:latin typeface="Calibri" pitchFamily="34" charset="0"/>
+                <a:ea typeface="Calibri" pitchFamily="34" charset="-122"/>
+                <a:cs typeface="Calibri" pitchFamily="34" charset="-120"/>
+              </a:rPr>
+              <a:t>held-out sessions</a:t>
+            </a:r>
+            <a:endParaRPr lang="en-US" sz="1200" dirty="0"/>
+          </a:p>
+        </p:txBody>
+      </p:sp>
+      <p:sp>
+        <p:nvSpPr>
+          <p:cNvPr id="12" name="Text 10"/>
+          <p:cNvSpPr txBox="1"/>
+          <p:nvPr/>
+        </p:nvSpPr>
+        <p:spPr>
+          <a:xfrm>
+            <a:off x="9281160" y="2505141"/>
+            <a:ext cx="2377440" cy="566928"/>
+          </a:xfrm>
+          <a:prstGeom prst="rect">
+            <a:avLst/>
+          </a:prstGeom>
+          <a:noFill/>
+          <a:ln/>
+        </p:spPr>
+        <p:txBody>
+          <a:bodyPr wrap="square" lIns="0" tIns="0" rIns="0" bIns="0" rtlCol="0" anchor="t"/>
+          <a:lstStyle/>
+          <a:p>
+            <a:pPr indent="0" marL="0">
+              <a:lnSpc>
+                <a:spcPct val="95000"/>
+              </a:lnSpc>
+              <a:buNone/>
+            </a:pPr>
+            <a:r>
+              <a:rPr lang="en-US" sz="1050" dirty="0">
+                <a:solidFill>
+                  <a:srgbClr val="6E7681"/>
+                </a:solidFill>
+                <a:latin typeface="Calibri" pitchFamily="34" charset="0"/>
+                <a:ea typeface="Calibri" pitchFamily="34" charset="-122"/>
+                <a:cs typeface="Calibri" pitchFamily="34" charset="-120"/>
+              </a:rPr>
+              <a:t>softmax + basic, session-disjoint.</a:t>
+            </a:r>
+            <a:endParaRPr lang="en-US" sz="1050" dirty="0"/>
+          </a:p>
+          <a:p>
+            <a:pPr indent="0" marL="0">
+              <a:lnSpc>
+                <a:spcPct val="95000"/>
+              </a:lnSpc>
+              <a:buNone/>
+            </a:pPr>
+            <a:r>
+              <a:rPr lang="en-US" sz="1050" dirty="0">
+                <a:solidFill>
+                  <a:srgbClr val="6E7681"/>
+                </a:solidFill>
+                <a:latin typeface="Calibri" pitchFamily="34" charset="0"/>
+                <a:ea typeface="Calibri" pitchFamily="34" charset="-122"/>
+                <a:cs typeface="Calibri" pitchFamily="34" charset="-120"/>
+              </a:rPr>
+              <a:t>The same fixed recipe.</a:t>
+            </a:r>
+            <a:endParaRPr lang="en-US" sz="1050" dirty="0"/>
+          </a:p>
+        </p:txBody>
+      </p:sp>
+      <p:sp>
+        <p:nvSpPr>
+          <p:cNvPr id="13" name="Text 11"/>
+          <p:cNvSpPr txBox="1"/>
+          <p:nvPr/>
+        </p:nvSpPr>
+        <p:spPr>
+          <a:xfrm>
+            <a:off x="6537960" y="3429000"/>
+            <a:ext cx="5120640" cy="2194560"/>
+          </a:xfrm>
+          <a:prstGeom prst="rect">
+            <a:avLst/>
+          </a:prstGeom>
+          <a:noFill/>
+          <a:ln/>
+        </p:spPr>
+        <p:txBody>
+          <a:bodyPr wrap="square" lIns="0" tIns="0" rIns="0" bIns="0" rtlCol="0" anchor="t"/>
+          <a:lstStyle/>
+          <a:p>
+            <a:pPr indent="0" marL="0">
+              <a:lnSpc>
+                <a:spcPct val="110000"/>
+              </a:lnSpc>
+              <a:buNone/>
+            </a:pPr>
+            <a:r>
+              <a:rPr lang="en-US" sz="1200" dirty="0">
+                <a:solidFill>
+                  <a:srgbClr val="24303C"/>
+                </a:solidFill>
+                <a:latin typeface="Calibri" pitchFamily="34" charset="0"/>
+                <a:ea typeface="Calibri" pitchFamily="34" charset="-122"/>
+                <a:cs typeface="Calibri" pitchFamily="34" charset="-120"/>
+              </a:rPr>
+              <a:t>Those 1,394 photographs had already contributed to optimising the parameters, so high performance was expected and this is not independent evidence of generalisation. Its only job is to locate the failure: the model separates everything it was fitted on, and fails on sessions it was not. The bottleneck is new capture occasions, not the representation. It was run for fold 0 only, and no script was retained to reproduce it across folds.</a:t>
+            </a:r>
+            <a:endParaRPr lang="en-US" sz="1200" dirty="0"/>
+          </a:p>
+        </p:txBody>
+      </p:sp>
+      <p:sp>
+        <p:nvSpPr>
+          <p:cNvPr id="14" name="Text 12"/>
+          <p:cNvSpPr txBox="1"/>
+          <p:nvPr/>
+        </p:nvSpPr>
+        <p:spPr>
+          <a:xfrm>
+            <a:off x="10527487" y="6437376"/>
+            <a:ext cx="1097280" cy="256032"/>
+          </a:xfrm>
+          <a:prstGeom prst="rect">
+            <a:avLst/>
+          </a:prstGeom>
+          <a:noFill/>
+          <a:ln/>
+        </p:spPr>
+        <p:txBody>
+          <a:bodyPr wrap="square" lIns="0" tIns="0" rIns="0" bIns="0" rtlCol="0" anchor="ctr"/>
+          <a:lstStyle/>
+          <a:p>
+            <a:pPr algn="r" indent="0" marL="0">
+              <a:buNone/>
+            </a:pPr>
+            <a:r>
+              <a:rPr lang="en-US" sz="900" b="1" spc="120" kern="0" dirty="0">
+                <a:solidFill>
+                  <a:srgbClr val="A9AEB5"/>
+                </a:solidFill>
+                <a:latin typeface="Calibri" pitchFamily="34" charset="0"/>
+                <a:ea typeface="Calibri" pitchFamily="34" charset="-122"/>
+                <a:cs typeface="Calibri" pitchFamily="34" charset="-120"/>
+              </a:rPr>
+              <a:t>BACKUP</a:t>
+            </a:r>
+            <a:endParaRPr lang="en-US" sz="900" dirty="0"/>
+          </a:p>
+        </p:txBody>
+      </p:sp>
+    </p:spTree>
+  </p:cSld>
+  <p:clrMapOvr>
+    <a:masterClrMapping/>
+  </p:clrMapOvr>
+</p:sld>
+</file>
+
+<file path=ppt/slides/slide21.xml><?xml version="1.0" encoding="utf-8"?>
+<p:sld xmlns:a="http://schemas.openxmlformats.org/drawingml/2006/main" xmlns:r="http://schemas.openxmlformats.org/officeDocument/2006/relationships" xmlns:p="http://schemas.openxmlformats.org/presentationml/2006/main">
+  <p:cSld name="Slide 21">
+    <p:bg>
+      <p:bgPr>
+        <a:solidFill>
+          <a:srgbClr val="FCFCFB"/>
+        </a:solidFill>
+      </p:bgPr>
+    </p:bg>
+    <p:spTree>
+      <p:nvGrpSpPr>
+        <p:cNvPr id="1" name=""/>
+        <p:cNvGrpSpPr/>
+        <p:nvPr/>
+      </p:nvGrpSpPr>
+      <p:grpSpPr>
+        <a:xfrm>
+          <a:off x="0" y="0"/>
+          <a:ext cx="0" cy="0"/>
+          <a:chOff x="0" y="0"/>
+          <a:chExt cx="0" cy="0"/>
+        </a:xfrm>
+      </p:grpSpPr>
+      <p:sp>
+        <p:nvSpPr>
+          <p:cNvPr id="2" name="Text 0"/>
+          <p:cNvSpPr txBox="1"/>
+          <p:nvPr/>
+        </p:nvSpPr>
+        <p:spPr>
+          <a:xfrm>
+            <a:off x="566928" y="146304"/>
+            <a:ext cx="11057839" cy="219456"/>
+          </a:xfrm>
+          <a:prstGeom prst="rect">
+            <a:avLst/>
+          </a:prstGeom>
+          <a:noFill/>
+          <a:ln/>
+        </p:spPr>
+        <p:txBody>
+          <a:bodyPr wrap="square" lIns="0" tIns="0" rIns="0" bIns="0" rtlCol="0" anchor="ctr"/>
+          <a:lstStyle/>
+          <a:p>
+            <a:pPr indent="0" marL="0">
+              <a:buNone/>
+            </a:pPr>
+            <a:r>
+              <a:rPr lang="en-US" sz="1100" b="1" spc="160" kern="0" dirty="0">
+                <a:solidFill>
+                  <a:srgbClr val="EB6834"/>
+                </a:solidFill>
+                <a:latin typeface="Calibri" pitchFamily="34" charset="0"/>
+                <a:ea typeface="Calibri" pitchFamily="34" charset="-122"/>
+                <a:cs typeface="Calibri" pitchFamily="34" charset="-120"/>
+              </a:rPr>
+              <a:t>Q — THE FULL RESULTS</a:t>
+            </a:r>
+            <a:endParaRPr lang="en-US" sz="1100" dirty="0"/>
+          </a:p>
+        </p:txBody>
+      </p:sp>
+      <p:sp>
+        <p:nvSpPr>
+          <p:cNvPr id="3" name="Text 1"/>
+          <p:cNvSpPr txBox="1"/>
+          <p:nvPr/>
+        </p:nvSpPr>
+        <p:spPr>
+          <a:xfrm>
+            <a:off x="566928" y="384048"/>
+            <a:ext cx="11057839" cy="658368"/>
+          </a:xfrm>
+          <a:prstGeom prst="rect">
+            <a:avLst/>
+          </a:prstGeom>
+          <a:noFill/>
+          <a:ln/>
+        </p:spPr>
+        <p:txBody>
+          <a:bodyPr wrap="square" lIns="0" tIns="0" rIns="0" bIns="0" rtlCol="0" anchor="t"/>
+          <a:lstStyle/>
+          <a:p>
+            <a:pPr algn="l" indent="0" marL="0">
+              <a:lnSpc>
+                <a:spcPct val="95000"/>
+              </a:lnSpc>
+              <a:buNone/>
+            </a:pPr>
+            <a:r>
+              <a:rPr lang="en-US" sz="2500" b="1" dirty="0">
+                <a:solidFill>
+                  <a:srgbClr val="0E2A47"/>
+                </a:solidFill>
+                <a:latin typeface="Cambria" pitchFamily="34" charset="0"/>
+                <a:ea typeface="Cambria" pitchFamily="34" charset="-122"/>
+                <a:cs typeface="Cambria" pitchFamily="34" charset="-120"/>
+              </a:rPr>
               <a:t>Every reported number, in one table</a:t>
             </a:r>
             <a:endParaRPr lang="en-US" sz="2500" dirty="0"/>
@@ -8103,7 +9063,7 @@
       </p:sp>
       <p:graphicFrame>
         <p:nvGraphicFramePr>
-          <p:cNvPr id="21" name="Table 0"/>
+          <p:cNvPr id="22" name="Table 0"/>
           <p:cNvGraphicFramePr>
             <a:graphicFrameLocks noGrp="1"/>
           </p:cNvGraphicFramePr>
@@ -10523,7 +11483,7 @@
         <p:spPr>
           <a:xfrm>
             <a:off x="566928" y="1810512"/>
-            <a:ext cx="2103120" cy="693683"/>
+            <a:ext cx="1874520" cy="630621"/>
           </a:xfrm>
           <a:prstGeom prst="rect">
             <a:avLst/>
@@ -10539,7 +11499,7 @@
               <a:buNone/>
             </a:pPr>
             <a:r>
-              <a:rPr lang="en-US" sz="4400" b="1" dirty="0">
+              <a:rPr lang="en-US" sz="4000" b="1" dirty="0">
                 <a:solidFill>
                   <a:srgbClr val="0E2A47"/>
                 </a:solidFill>
@@ -10549,7 +11509,7 @@
               </a:rPr>
               <a:t>2,307</a:t>
             </a:r>
-            <a:endParaRPr lang="en-US" sz="4400" dirty="0"/>
+            <a:endParaRPr lang="en-US" sz="4000" dirty="0"/>
           </a:p>
         </p:txBody>
       </p:sp>
@@ -10561,8 +11521,8 @@
         </p:nvSpPr>
         <p:spPr>
           <a:xfrm>
-            <a:off x="566928" y="2540771"/>
-            <a:ext cx="2103120" cy="237744"/>
+            <a:off x="566928" y="2477709"/>
+            <a:ext cx="1874520" cy="237744"/>
           </a:xfrm>
           <a:prstGeom prst="rect">
             <a:avLst/>
@@ -10581,7 +11541,7 @@
               <a:buNone/>
             </a:pPr>
             <a:r>
-              <a:rPr lang="en-US" sz="1200" b="1" dirty="0">
+              <a:rPr lang="en-US" sz="1150" b="1" dirty="0">
                 <a:solidFill>
                   <a:srgbClr val="24303C"/>
                 </a:solidFill>
@@ -10591,7 +11551,7 @@
               </a:rPr>
               <a:t>photographs</a:t>
             </a:r>
-            <a:endParaRPr lang="en-US" sz="1200" dirty="0"/>
+            <a:endParaRPr lang="en-US" sz="1150" dirty="0"/>
           </a:p>
         </p:txBody>
       </p:sp>
@@ -10603,8 +11563,8 @@
         </p:nvSpPr>
         <p:spPr>
           <a:xfrm>
-            <a:off x="566928" y="2778515"/>
-            <a:ext cx="2103120" cy="566928"/>
+            <a:off x="566928" y="2715453"/>
+            <a:ext cx="1874520" cy="566928"/>
           </a:xfrm>
           <a:prstGeom prst="rect">
             <a:avLst/>
@@ -10645,8 +11605,8 @@
         </p:nvSpPr>
         <p:spPr>
           <a:xfrm>
-            <a:off x="2779776" y="1810512"/>
-            <a:ext cx="2103120" cy="693683"/>
+            <a:off x="2542032" y="1810512"/>
+            <a:ext cx="1874520" cy="630621"/>
           </a:xfrm>
           <a:prstGeom prst="rect">
             <a:avLst/>
@@ -10662,7 +11622,7 @@
               <a:buNone/>
             </a:pPr>
             <a:r>
-              <a:rPr lang="en-US" sz="4400" b="1" dirty="0">
+              <a:rPr lang="en-US" sz="4000" b="1" dirty="0">
                 <a:solidFill>
                   <a:srgbClr val="0E2A47"/>
                 </a:solidFill>
@@ -10672,7 +11632,7 @@
               </a:rPr>
               <a:t>81</a:t>
             </a:r>
-            <a:endParaRPr lang="en-US" sz="4400" dirty="0"/>
+            <a:endParaRPr lang="en-US" sz="4000" dirty="0"/>
           </a:p>
         </p:txBody>
       </p:sp>
@@ -10684,8 +11644,8 @@
         </p:nvSpPr>
         <p:spPr>
           <a:xfrm>
-            <a:off x="2779776" y="2540771"/>
-            <a:ext cx="2103120" cy="237744"/>
+            <a:off x="2542032" y="2477709"/>
+            <a:ext cx="1874520" cy="237744"/>
           </a:xfrm>
           <a:prstGeom prst="rect">
             <a:avLst/>
@@ -10704,7 +11664,7 @@
               <a:buNone/>
             </a:pPr>
             <a:r>
-              <a:rPr lang="en-US" sz="1200" b="1" dirty="0">
+              <a:rPr lang="en-US" sz="1150" b="1" dirty="0">
                 <a:solidFill>
                   <a:srgbClr val="24303C"/>
                 </a:solidFill>
@@ -10714,7 +11674,7 @@
               </a:rPr>
               <a:t>individuals</a:t>
             </a:r>
-            <a:endParaRPr lang="en-US" sz="1200" dirty="0"/>
+            <a:endParaRPr lang="en-US" sz="1150" dirty="0"/>
           </a:p>
         </p:txBody>
       </p:sp>
@@ -10726,8 +11686,8 @@
         </p:nvSpPr>
         <p:spPr>
           <a:xfrm>
-            <a:off x="2779776" y="2778515"/>
-            <a:ext cx="2103120" cy="566928"/>
+            <a:off x="2542032" y="2715453"/>
+            <a:ext cx="1874520" cy="566928"/>
           </a:xfrm>
           <a:prstGeom prst="rect">
             <a:avLst/>
@@ -10768,8 +11728,8 @@
         </p:nvSpPr>
         <p:spPr>
           <a:xfrm>
-            <a:off x="4992624" y="1810512"/>
-            <a:ext cx="2103120" cy="693683"/>
+            <a:off x="4517136" y="1810512"/>
+            <a:ext cx="1874520" cy="630621"/>
           </a:xfrm>
           <a:prstGeom prst="rect">
             <a:avLst/>
@@ -10785,7 +11745,7 @@
               <a:buNone/>
             </a:pPr>
             <a:r>
-              <a:rPr lang="en-US" sz="4400" b="1" dirty="0">
+              <a:rPr lang="en-US" sz="4000" b="1" dirty="0">
                 <a:solidFill>
                   <a:srgbClr val="EB6834"/>
                 </a:solidFill>
@@ -10795,7 +11755,7 @@
               </a:rPr>
               <a:t>35</a:t>
             </a:r>
-            <a:endParaRPr lang="en-US" sz="4400" dirty="0"/>
+            <a:endParaRPr lang="en-US" sz="4000" dirty="0"/>
           </a:p>
         </p:txBody>
       </p:sp>
@@ -10807,8 +11767,8 @@
         </p:nvSpPr>
         <p:spPr>
           <a:xfrm>
-            <a:off x="4992624" y="2540771"/>
-            <a:ext cx="2103120" cy="237744"/>
+            <a:off x="4517136" y="2477709"/>
+            <a:ext cx="1874520" cy="237744"/>
           </a:xfrm>
           <a:prstGeom prst="rect">
             <a:avLst/>
@@ -10827,7 +11787,7 @@
               <a:buNone/>
             </a:pPr>
             <a:r>
-              <a:rPr lang="en-US" sz="1200" b="1" dirty="0">
+              <a:rPr lang="en-US" sz="1150" b="1" dirty="0">
                 <a:solidFill>
                   <a:srgbClr val="24303C"/>
                 </a:solidFill>
@@ -10837,7 +11797,7 @@
               </a:rPr>
               <a:t>evaluated</a:t>
             </a:r>
-            <a:endParaRPr lang="en-US" sz="1200" dirty="0"/>
+            <a:endParaRPr lang="en-US" sz="1150" dirty="0"/>
           </a:p>
         </p:txBody>
       </p:sp>
@@ -10849,8 +11809,8 @@
         </p:nvSpPr>
         <p:spPr>
           <a:xfrm>
-            <a:off x="4992624" y="2778515"/>
-            <a:ext cx="2103120" cy="566928"/>
+            <a:off x="4517136" y="2715453"/>
+            <a:ext cx="1874520" cy="566928"/>
           </a:xfrm>
           <a:prstGeom prst="rect">
             <a:avLst/>
@@ -10891,8 +11851,8 @@
         </p:nvSpPr>
         <p:spPr>
           <a:xfrm>
-            <a:off x="7205472" y="1810512"/>
-            <a:ext cx="2103120" cy="693683"/>
+            <a:off x="6492240" y="1810512"/>
+            <a:ext cx="1874520" cy="630621"/>
           </a:xfrm>
           <a:prstGeom prst="rect">
             <a:avLst/>
@@ -10908,7 +11868,7 @@
               <a:buNone/>
             </a:pPr>
             <a:r>
-              <a:rPr lang="en-US" sz="4400" b="1" dirty="0">
+              <a:rPr lang="en-US" sz="4000" b="1" dirty="0">
                 <a:solidFill>
                   <a:srgbClr val="0E2A47"/>
                 </a:solidFill>
@@ -10918,7 +11878,7 @@
               </a:rPr>
               <a:t>335</a:t>
             </a:r>
-            <a:endParaRPr lang="en-US" sz="4400" dirty="0"/>
+            <a:endParaRPr lang="en-US" sz="4000" dirty="0"/>
           </a:p>
         </p:txBody>
       </p:sp>
@@ -10930,8 +11890,8 @@
         </p:nvSpPr>
         <p:spPr>
           <a:xfrm>
-            <a:off x="7205472" y="2540771"/>
-            <a:ext cx="2103120" cy="237744"/>
+            <a:off x="6492240" y="2477709"/>
+            <a:ext cx="1874520" cy="237744"/>
           </a:xfrm>
           <a:prstGeom prst="rect">
             <a:avLst/>
@@ -10950,7 +11910,7 @@
               <a:buNone/>
             </a:pPr>
             <a:r>
-              <a:rPr lang="en-US" sz="1200" b="1" dirty="0">
+              <a:rPr lang="en-US" sz="1150" b="1" dirty="0">
                 <a:solidFill>
                   <a:srgbClr val="24303C"/>
                 </a:solidFill>
@@ -10960,7 +11920,7 @@
               </a:rPr>
               <a:t>capture sessions</a:t>
             </a:r>
-            <a:endParaRPr lang="en-US" sz="1200" dirty="0"/>
+            <a:endParaRPr lang="en-US" sz="1150" dirty="0"/>
           </a:p>
         </p:txBody>
       </p:sp>
@@ -10972,8 +11932,8 @@
         </p:nvSpPr>
         <p:spPr>
           <a:xfrm>
-            <a:off x="7205472" y="2778515"/>
-            <a:ext cx="2103120" cy="566928"/>
+            <a:off x="6492240" y="2715453"/>
+            <a:ext cx="1874520" cy="566928"/>
           </a:xfrm>
           <a:prstGeom prst="rect">
             <a:avLst/>
@@ -11006,20 +11966,172 @@
           </a:p>
         </p:txBody>
       </p:sp>
-      <p:sp>
-        <p:nvSpPr>
-          <p:cNvPr id="16" name="Shape 14"/>
+      <p:pic>
+        <p:nvPicPr>
+          <p:cNvPr id="16" name="Image 0" descr="/home/user/pgs/presentation/assets/penguin_session_a.png">    </p:cNvPr>
+          <p:cNvPicPr>
+            <a:picLocks noChangeAspect="1"/>
+          </p:cNvPicPr>
+          <p:nvPr/>
+        </p:nvPicPr>
+        <p:blipFill>
+          <a:blip r:embed="rId1"/>
+          <a:srcRect l="0" r="0" t="0" b="0"/>
+          <a:stretch/>
+        </p:blipFill>
+        <p:spPr>
+          <a:xfrm>
+            <a:off x="7930591" y="3310128"/>
+            <a:ext cx="1783080" cy="2240280"/>
+          </a:xfrm>
+          <a:prstGeom prst="rect">
+            <a:avLst/>
+          </a:prstGeom>
+        </p:spPr>
+      </p:pic>
+      <p:pic>
+        <p:nvPicPr>
+          <p:cNvPr id="17" name="Image 1" descr="/home/user/pgs/presentation/assets/penguin_session_b.png">    </p:cNvPr>
+          <p:cNvPicPr>
+            <a:picLocks noChangeAspect="1"/>
+          </p:cNvPicPr>
+          <p:nvPr/>
+        </p:nvPicPr>
+        <p:blipFill>
+          <a:blip r:embed="rId2"/>
+          <a:srcRect l="0" r="0" t="0" b="0"/>
+          <a:stretch/>
+        </p:blipFill>
+        <p:spPr>
+          <a:xfrm>
+            <a:off x="9841687" y="3310128"/>
+            <a:ext cx="1783080" cy="2240280"/>
+          </a:xfrm>
+          <a:prstGeom prst="rect">
+            <a:avLst/>
+          </a:prstGeom>
+        </p:spPr>
+      </p:pic>
+      <p:sp>
+        <p:nvSpPr>
+          <p:cNvPr id="18" name="Shape 14"/>
           <p:cNvSpPr/>
           <p:nvPr/>
         </p:nvSpPr>
         <p:spPr>
           <a:xfrm>
+            <a:off x="7930591" y="3145536"/>
+            <a:ext cx="3694176" cy="45720"/>
+          </a:xfrm>
+          <a:prstGeom prst="rect">
+            <a:avLst/>
+          </a:prstGeom>
+          <a:solidFill>
+            <a:srgbClr val="2A78D6"/>
+          </a:solidFill>
+          <a:ln w="12700">
+            <a:solidFill>
+              <a:srgbClr val="2A78D6"/>
+            </a:solidFill>
+            <a:prstDash val="solid"/>
+          </a:ln>
+        </p:spPr>
+      </p:sp>
+      <p:sp>
+        <p:nvSpPr>
+          <p:cNvPr id="19" name="Text 15"/>
+          <p:cNvSpPr txBox="1"/>
+          <p:nvPr/>
+        </p:nvSpPr>
+        <p:spPr>
+          <a:xfrm>
+            <a:off x="7930591" y="2798064"/>
+            <a:ext cx="3694176" cy="292608"/>
+          </a:xfrm>
+          <a:prstGeom prst="rect">
+            <a:avLst/>
+          </a:prstGeom>
+          <a:noFill/>
+          <a:ln/>
+        </p:spPr>
+        <p:txBody>
+          <a:bodyPr wrap="square" lIns="0" tIns="0" rIns="0" bIns="0" rtlCol="0" anchor="b"/>
+          <a:lstStyle/>
+          <a:p>
+            <a:pPr algn="ctr" indent="0" marL="0">
+              <a:buNone/>
+            </a:pPr>
+            <a:r>
+              <a:rPr lang="en-US" sz="1200" b="1" dirty="0">
+                <a:solidFill>
+                  <a:srgbClr val="2A78D6"/>
+                </a:solidFill>
+                <a:latin typeface="Calibri" pitchFamily="34" charset="0"/>
+                <a:ea typeface="Calibri" pitchFamily="34" charset="-122"/>
+                <a:cs typeface="Calibri" pitchFamily="34" charset="-120"/>
+              </a:rPr>
+              <a:t>one capture session — two frames of Ping</a:t>
+            </a:r>
+            <a:endParaRPr lang="en-US" sz="1200" dirty="0"/>
+          </a:p>
+        </p:txBody>
+      </p:sp>
+      <p:sp>
+        <p:nvSpPr>
+          <p:cNvPr id="20" name="Text 16"/>
+          <p:cNvSpPr txBox="1"/>
+          <p:nvPr/>
+        </p:nvSpPr>
+        <p:spPr>
+          <a:xfrm>
+            <a:off x="7930591" y="5605272"/>
+            <a:ext cx="3694176" cy="457200"/>
+          </a:xfrm>
+          <a:prstGeom prst="rect">
+            <a:avLst/>
+          </a:prstGeom>
+          <a:noFill/>
+          <a:ln/>
+        </p:spPr>
+        <p:txBody>
+          <a:bodyPr wrap="square" lIns="0" tIns="0" rIns="0" bIns="0" rtlCol="0" anchor="t"/>
+          <a:lstStyle/>
+          <a:p>
+            <a:pPr algn="ctr" indent="0" marL="0">
+              <a:lnSpc>
+                <a:spcPct val="95000"/>
+              </a:lnSpc>
+              <a:buNone/>
+            </a:pPr>
+            <a:r>
+              <a:rPr lang="en-US" sz="1000" dirty="0">
+                <a:solidFill>
+                  <a:srgbClr val="6E7681"/>
+                </a:solidFill>
+                <a:latin typeface="Calibri" pitchFamily="34" charset="0"/>
+                <a:ea typeface="Calibri" pitchFamily="34" charset="-122"/>
+                <a:cs typeface="Calibri" pitchFamily="34" charset="-120"/>
+              </a:rPr>
+              <a:t>Same light, same ground, same posture. A random split can put one of these in training and the other in test.</a:t>
+            </a:r>
+            <a:endParaRPr lang="en-US" sz="1000" dirty="0"/>
+          </a:p>
+        </p:txBody>
+      </p:sp>
+      <p:sp>
+        <p:nvSpPr>
+          <p:cNvPr id="21" name="Shape 17"/>
+          <p:cNvSpPr/>
+          <p:nvPr/>
+        </p:nvSpPr>
+        <p:spPr>
+          <a:xfrm>
             <a:off x="566928" y="3703320"/>
-            <a:ext cx="11057839" cy="1783080"/>
+            <a:ext cx="7080199" cy="2011680"/>
           </a:xfrm>
           <a:prstGeom prst="roundRect">
             <a:avLst>
-              <a:gd name="adj" fmla="val 3077"/>
+              <a:gd name="adj" fmla="val 2727"/>
             </a:avLst>
           </a:prstGeom>
           <a:solidFill>
@@ -11035,14 +12147,14 @@
       </p:sp>
       <p:sp>
         <p:nvSpPr>
-          <p:cNvPr id="17" name="Text 15"/>
-          <p:cNvSpPr txBox="1"/>
-          <p:nvPr/>
-        </p:nvSpPr>
-        <p:spPr>
-          <a:xfrm>
-            <a:off x="841248" y="3895344"/>
-            <a:ext cx="10509199" cy="310896"/>
+          <p:cNvPr id="22" name="Text 18"/>
+          <p:cNvSpPr txBox="1"/>
+          <p:nvPr/>
+        </p:nvSpPr>
+        <p:spPr>
+          <a:xfrm>
+            <a:off x="841248" y="3877056"/>
+            <a:ext cx="6531559" cy="512064"/>
           </a:xfrm>
           <a:prstGeom prst="rect">
             <a:avLst/>
@@ -11074,14 +12186,14 @@
       </p:sp>
       <p:sp>
         <p:nvSpPr>
-          <p:cNvPr id="18" name="Text 16"/>
-          <p:cNvSpPr txBox="1"/>
-          <p:nvPr/>
-        </p:nvSpPr>
-        <p:spPr>
-          <a:xfrm>
-            <a:off x="841248" y="4279392"/>
-            <a:ext cx="10509199" cy="1097280"/>
+          <p:cNvPr id="23" name="Text 19"/>
+          <p:cNvSpPr txBox="1"/>
+          <p:nvPr/>
+        </p:nvSpPr>
+        <p:spPr>
+          <a:xfrm>
+            <a:off x="841248" y="4462272"/>
+            <a:ext cx="6531559" cy="1143000"/>
           </a:xfrm>
           <a:prstGeom prst="rect">
             <a:avLst/>
@@ -11100,7 +12212,7 @@
               <a:buNone/>
             </a:pPr>
             <a:r>
-              <a:rPr lang="en-US" sz="1350" dirty="0">
+              <a:rPr lang="en-US" sz="1250" dirty="0">
                 <a:solidFill>
                   <a:srgbClr val="24303C"/>
                 </a:solidFill>
@@ -11110,13 +12222,13 @@
               </a:rPr>
               <a:t>Inferred per bird from the camera filename prefix and frame number: a new session starts when the gap to the previous frame exceeds 50. Checked against EXIF timestamps where present. Frames inside one session share light, background, viewpoint and posture — they are correlated observations, not independent evidence of how a bird looks on a new day.</a:t>
             </a:r>
-            <a:endParaRPr lang="en-US" sz="1350" dirty="0"/>
-          </a:p>
-        </p:txBody>
-      </p:sp>
-      <p:sp>
-        <p:nvSpPr>
-          <p:cNvPr id="19" name="Text 17"/>
+            <a:endParaRPr lang="en-US" sz="1250" dirty="0"/>
+          </a:p>
+        </p:txBody>
+      </p:sp>
+      <p:sp>
+        <p:nvSpPr>
+          <p:cNvPr id="24" name="Text 20"/>
           <p:cNvSpPr txBox="1"/>
           <p:nvPr/>
         </p:nvSpPr>
@@ -11155,7 +12267,7 @@
       </p:sp>
       <p:sp>
         <p:nvSpPr>
-          <p:cNvPr id="20" name="Text 18"/>
+          <p:cNvPr id="25" name="Text 21"/>
           <p:cNvSpPr txBox="1"/>
           <p:nvPr/>
         </p:nvSpPr>
@@ -15494,8 +16606,8 @@
         </p:nvSpPr>
         <p:spPr>
           <a:xfrm>
-            <a:off x="566928" y="1810512"/>
-            <a:ext cx="4025189" cy="566928"/>
+            <a:off x="1984248" y="1810512"/>
+            <a:ext cx="3458261" cy="566928"/>
           </a:xfrm>
           <a:prstGeom prst="roundRect">
             <a:avLst>
@@ -15521,8 +16633,8 @@
         </p:nvSpPr>
         <p:spPr>
           <a:xfrm>
-            <a:off x="731520" y="1865376"/>
-            <a:ext cx="3696005" cy="274320"/>
+            <a:off x="2148840" y="1865376"/>
+            <a:ext cx="3129077" cy="274320"/>
           </a:xfrm>
           <a:prstGeom prst="rect">
             <a:avLst/>
@@ -15560,8 +16672,8 @@
         </p:nvSpPr>
         <p:spPr>
           <a:xfrm>
-            <a:off x="731520" y="2112264"/>
-            <a:ext cx="3696005" cy="219456"/>
+            <a:off x="2148840" y="2112264"/>
+            <a:ext cx="3129077" cy="219456"/>
           </a:xfrm>
           <a:prstGeom prst="rect">
             <a:avLst/>
@@ -15599,7 +16711,7 @@
         </p:nvSpPr>
         <p:spPr>
           <a:xfrm>
-            <a:off x="2510942" y="2395728"/>
+            <a:off x="3644798" y="2395728"/>
             <a:ext cx="137160" cy="146304"/>
           </a:xfrm>
           <a:prstGeom prst="downArrow">
@@ -15624,8 +16736,8 @@
         </p:nvSpPr>
         <p:spPr>
           <a:xfrm>
-            <a:off x="566928" y="2560320"/>
-            <a:ext cx="4025189" cy="566928"/>
+            <a:off x="1984248" y="2560320"/>
+            <a:ext cx="3458261" cy="566928"/>
           </a:xfrm>
           <a:prstGeom prst="roundRect">
             <a:avLst>
@@ -15651,8 +16763,8 @@
         </p:nvSpPr>
         <p:spPr>
           <a:xfrm>
-            <a:off x="731520" y="2615184"/>
-            <a:ext cx="3696005" cy="274320"/>
+            <a:off x="2148840" y="2615184"/>
+            <a:ext cx="3129077" cy="274320"/>
           </a:xfrm>
           <a:prstGeom prst="rect">
             <a:avLst/>
@@ -15690,8 +16802,8 @@
         </p:nvSpPr>
         <p:spPr>
           <a:xfrm>
-            <a:off x="731520" y="2862072"/>
-            <a:ext cx="3696005" cy="219456"/>
+            <a:off x="2148840" y="2862072"/>
+            <a:ext cx="3129077" cy="219456"/>
           </a:xfrm>
           <a:prstGeom prst="rect">
             <a:avLst/>
@@ -15729,7 +16841,7 @@
         </p:nvSpPr>
         <p:spPr>
           <a:xfrm>
-            <a:off x="2510942" y="3145536"/>
+            <a:off x="3644798" y="3145536"/>
             <a:ext cx="137160" cy="146304"/>
           </a:xfrm>
           <a:prstGeom prst="downArrow">
@@ -15754,8 +16866,8 @@
         </p:nvSpPr>
         <p:spPr>
           <a:xfrm>
-            <a:off x="566928" y="3310128"/>
-            <a:ext cx="4025189" cy="566928"/>
+            <a:off x="1984248" y="3310128"/>
+            <a:ext cx="3458261" cy="566928"/>
           </a:xfrm>
           <a:prstGeom prst="roundRect">
             <a:avLst>
@@ -15781,8 +16893,8 @@
         </p:nvSpPr>
         <p:spPr>
           <a:xfrm>
-            <a:off x="731520" y="3364992"/>
-            <a:ext cx="3696005" cy="274320"/>
+            <a:off x="2148840" y="3364992"/>
+            <a:ext cx="3129077" cy="274320"/>
           </a:xfrm>
           <a:prstGeom prst="rect">
             <a:avLst/>
@@ -15820,8 +16932,8 @@
         </p:nvSpPr>
         <p:spPr>
           <a:xfrm>
-            <a:off x="731520" y="3611880"/>
-            <a:ext cx="3696005" cy="219456"/>
+            <a:off x="2148840" y="3611880"/>
+            <a:ext cx="3129077" cy="219456"/>
           </a:xfrm>
           <a:prstGeom prst="rect">
             <a:avLst/>
@@ -15859,7 +16971,7 @@
         </p:nvSpPr>
         <p:spPr>
           <a:xfrm>
-            <a:off x="2510942" y="3895344"/>
+            <a:off x="3644798" y="3895344"/>
             <a:ext cx="137160" cy="146304"/>
           </a:xfrm>
           <a:prstGeom prst="downArrow">
@@ -15884,8 +16996,8 @@
         </p:nvSpPr>
         <p:spPr>
           <a:xfrm>
-            <a:off x="566928" y="4059936"/>
-            <a:ext cx="4025189" cy="566928"/>
+            <a:off x="1984248" y="4059936"/>
+            <a:ext cx="3458261" cy="566928"/>
           </a:xfrm>
           <a:prstGeom prst="roundRect">
             <a:avLst>
@@ -15911,8 +17023,8 @@
         </p:nvSpPr>
         <p:spPr>
           <a:xfrm>
-            <a:off x="731520" y="4114800"/>
-            <a:ext cx="3696005" cy="274320"/>
+            <a:off x="2148840" y="4114800"/>
+            <a:ext cx="3129077" cy="274320"/>
           </a:xfrm>
           <a:prstGeom prst="rect">
             <a:avLst/>
@@ -15950,8 +17062,8 @@
         </p:nvSpPr>
         <p:spPr>
           <a:xfrm>
-            <a:off x="731520" y="4361688"/>
-            <a:ext cx="3696005" cy="219456"/>
+            <a:off x="2148840" y="4361688"/>
+            <a:ext cx="3129077" cy="219456"/>
           </a:xfrm>
           <a:prstGeom prst="rect">
             <a:avLst/>
@@ -15989,7 +17101,7 @@
         </p:nvSpPr>
         <p:spPr>
           <a:xfrm>
-            <a:off x="2510942" y="4645152"/>
+            <a:off x="3644798" y="4645152"/>
             <a:ext cx="137160" cy="146304"/>
           </a:xfrm>
           <a:prstGeom prst="downArrow">
@@ -16014,8 +17126,8 @@
         </p:nvSpPr>
         <p:spPr>
           <a:xfrm>
-            <a:off x="566928" y="4809744"/>
-            <a:ext cx="4025189" cy="566928"/>
+            <a:off x="1984248" y="4809744"/>
+            <a:ext cx="3458261" cy="566928"/>
           </a:xfrm>
           <a:prstGeom prst="roundRect">
             <a:avLst>
@@ -16041,8 +17153,8 @@
         </p:nvSpPr>
         <p:spPr>
           <a:xfrm>
-            <a:off x="731520" y="4864608"/>
-            <a:ext cx="3696005" cy="274320"/>
+            <a:off x="2148840" y="4864608"/>
+            <a:ext cx="3129077" cy="274320"/>
           </a:xfrm>
           <a:prstGeom prst="rect">
             <a:avLst/>
@@ -16080,8 +17192,8 @@
         </p:nvSpPr>
         <p:spPr>
           <a:xfrm>
-            <a:off x="731520" y="5111496"/>
-            <a:ext cx="3696005" cy="219456"/>
+            <a:off x="2148840" y="5111496"/>
+            <a:ext cx="3129077" cy="219456"/>
           </a:xfrm>
           <a:prstGeom prst="rect">
             <a:avLst/>
@@ -16119,7 +17231,7 @@
         </p:nvSpPr>
         <p:spPr>
           <a:xfrm>
-            <a:off x="4637837" y="4261104"/>
+            <a:off x="5488229" y="4261104"/>
             <a:ext cx="384048" cy="164592"/>
           </a:xfrm>
           <a:prstGeom prst="rightArrow">
@@ -16144,8 +17256,8 @@
         </p:nvSpPr>
         <p:spPr>
           <a:xfrm>
-            <a:off x="5067605" y="4078224"/>
-            <a:ext cx="1991563" cy="274320"/>
+            <a:off x="5917997" y="4078224"/>
+            <a:ext cx="1644091" cy="274320"/>
           </a:xfrm>
           <a:prstGeom prst="rect">
             <a:avLst/>
@@ -16183,8 +17295,8 @@
         </p:nvSpPr>
         <p:spPr>
           <a:xfrm>
-            <a:off x="5067605" y="4334256"/>
-            <a:ext cx="1991563" cy="237744"/>
+            <a:off x="5917997" y="4334256"/>
+            <a:ext cx="1644091" cy="237744"/>
           </a:xfrm>
           <a:prstGeom prst="rect">
             <a:avLst/>
@@ -16214,20 +17326,131 @@
           </a:p>
         </p:txBody>
       </p:sp>
-      <p:sp>
-        <p:nvSpPr>
-          <p:cNvPr id="26" name="Shape 24"/>
+      <p:pic>
+        <p:nvPicPr>
+          <p:cNvPr id="26" name="Image 0" descr="/home/user/pgs/presentation/assets/penguin_query.png">    </p:cNvPr>
+          <p:cNvPicPr>
+            <a:picLocks noChangeAspect="1"/>
+          </p:cNvPicPr>
+          <p:nvPr/>
+        </p:nvPicPr>
+        <p:blipFill>
+          <a:blip r:embed="rId1"/>
+          <a:stretch>
+            <a:fillRect/>
+          </a:stretch>
+        </p:blipFill>
+        <p:spPr>
+          <a:xfrm>
+            <a:off x="566928" y="1810512"/>
+            <a:ext cx="1188720" cy="2030119"/>
+          </a:xfrm>
+          <a:prstGeom prst="rect">
+            <a:avLst/>
+          </a:prstGeom>
+        </p:spPr>
+      </p:pic>
+      <p:sp>
+        <p:nvSpPr>
+          <p:cNvPr id="27" name="Shape 24"/>
           <p:cNvSpPr/>
           <p:nvPr/>
         </p:nvSpPr>
         <p:spPr>
           <a:xfrm>
+            <a:off x="1810512" y="2020824"/>
+            <a:ext cx="310896" cy="146304"/>
+          </a:xfrm>
+          <a:prstGeom prst="rightArrow">
+            <a:avLst/>
+          </a:prstGeom>
+          <a:solidFill>
+            <a:srgbClr val="E1E0D9"/>
+          </a:solidFill>
+          <a:ln w="12700">
+            <a:solidFill>
+              <a:srgbClr val="E1E0D9"/>
+            </a:solidFill>
+            <a:prstDash val="solid"/>
+          </a:ln>
+        </p:spPr>
+      </p:sp>
+      <p:sp>
+        <p:nvSpPr>
+          <p:cNvPr id="28" name="Text 25"/>
+          <p:cNvSpPr txBox="1"/>
+          <p:nvPr/>
+        </p:nvSpPr>
+        <p:spPr>
+          <a:xfrm>
+            <a:off x="566928" y="3895495"/>
+            <a:ext cx="1463040" cy="457200"/>
+          </a:xfrm>
+          <a:prstGeom prst="rect">
+            <a:avLst/>
+          </a:prstGeom>
+          <a:noFill/>
+          <a:ln/>
+        </p:spPr>
+        <p:txBody>
+          <a:bodyPr wrap="square" lIns="0" tIns="0" rIns="0" bIns="0" rtlCol="0" anchor="t"/>
+          <a:lstStyle/>
+          <a:p>
+            <a:pPr algn="l" indent="0" marL="0">
+              <a:lnSpc>
+                <a:spcPct val="95000"/>
+              </a:lnSpc>
+              <a:buNone/>
+            </a:pPr>
+            <a:r>
+              <a:rPr lang="en-US" sz="950" dirty="0">
+                <a:solidFill>
+                  <a:srgbClr val="6E7681"/>
+                </a:solidFill>
+                <a:latin typeface="Calibri" pitchFamily="34" charset="0"/>
+                <a:ea typeface="Calibri" pitchFamily="34" charset="-122"/>
+                <a:cs typeface="Calibri" pitchFamily="34" charset="-120"/>
+              </a:rPr>
+              <a:t>one photograph,</a:t>
+            </a:r>
+            <a:endParaRPr lang="en-US" sz="950" dirty="0"/>
+          </a:p>
+          <a:p>
+            <a:pPr algn="l" indent="0" marL="0">
+              <a:lnSpc>
+                <a:spcPct val="95000"/>
+              </a:lnSpc>
+              <a:buNone/>
+            </a:pPr>
+            <a:r>
+              <a:rPr lang="en-US" sz="950" dirty="0">
+                <a:solidFill>
+                  <a:srgbClr val="6E7681"/>
+                </a:solidFill>
+                <a:latin typeface="Calibri" pitchFamily="34" charset="0"/>
+                <a:ea typeface="Calibri" pitchFamily="34" charset="-122"/>
+                <a:cs typeface="Calibri" pitchFamily="34" charset="-120"/>
+              </a:rPr>
+              <a:t>uncropped, as taken</a:t>
+            </a:r>
+            <a:endParaRPr lang="en-US" sz="950" dirty="0"/>
+          </a:p>
+        </p:txBody>
+      </p:sp>
+      <p:sp>
+        <p:nvSpPr>
+          <p:cNvPr id="29" name="Shape 26"/>
+          <p:cNvSpPr/>
+          <p:nvPr/>
+        </p:nvSpPr>
+        <p:spPr>
+          <a:xfrm>
             <a:off x="7635240" y="1810512"/>
-            <a:ext cx="4023360" cy="1691640"/>
+            <a:ext cx="4023360" cy="2057400"/>
           </a:xfrm>
           <a:prstGeom prst="roundRect">
             <a:avLst>
-              <a:gd name="adj" fmla="val 3243"/>
+              <a:gd name="adj" fmla="val 2667"/>
             </a:avLst>
           </a:prstGeom>
           <a:solidFill>
@@ -16243,7 +17466,7 @@
       </p:sp>
       <p:sp>
         <p:nvSpPr>
-          <p:cNvPr id="27" name="Text 25"/>
+          <p:cNvPr id="30" name="Text 27"/>
           <p:cNvSpPr txBox="1"/>
           <p:nvPr/>
         </p:nvSpPr>
@@ -16318,14 +17541,14 @@
       </p:sp>
       <p:sp>
         <p:nvSpPr>
-          <p:cNvPr id="28" name="Text 26"/>
-          <p:cNvSpPr txBox="1"/>
-          <p:nvPr/>
-        </p:nvSpPr>
-        <p:spPr>
-          <a:xfrm>
-            <a:off x="7863840" y="2468880"/>
-            <a:ext cx="3566160" cy="960120"/>
+          <p:cNvPr id="31" name="Text 28"/>
+          <p:cNvSpPr txBox="1"/>
+          <p:nvPr/>
+        </p:nvSpPr>
+        <p:spPr>
+          <a:xfrm>
+            <a:off x="7863840" y="2450592"/>
+            <a:ext cx="3566160" cy="1325880"/>
           </a:xfrm>
           <a:prstGeom prst="rect">
             <a:avLst/>
@@ -16344,7 +17567,7 @@
               <a:buNone/>
             </a:pPr>
             <a:r>
-              <a:rPr lang="en-US" sz="1150" dirty="0">
+              <a:rPr lang="en-US" sz="1100" dirty="0">
                 <a:solidFill>
                   <a:srgbClr val="24303C"/>
                 </a:solidFill>
@@ -16354,24 +17577,24 @@
               </a:rPr>
               <a:t>Smew and Skunk have one and two photographs. Never trained on, in the gallery, searchable. A softmax head would need a new output layer and a full retrain for each arrival. The deployed model has no held-out partition of its own — the cross-validated 0.559 is its estimate.</a:t>
             </a:r>
-            <a:endParaRPr lang="en-US" sz="1150" dirty="0"/>
-          </a:p>
-        </p:txBody>
-      </p:sp>
-      <p:sp>
-        <p:nvSpPr>
-          <p:cNvPr id="29" name="Shape 27"/>
+            <a:endParaRPr lang="en-US" sz="1100" dirty="0"/>
+          </a:p>
+        </p:txBody>
+      </p:sp>
+      <p:sp>
+        <p:nvSpPr>
+          <p:cNvPr id="32" name="Shape 29"/>
           <p:cNvSpPr/>
           <p:nvPr/>
         </p:nvSpPr>
         <p:spPr>
           <a:xfrm>
-            <a:off x="7635240" y="3730752"/>
-            <a:ext cx="4023360" cy="1828800"/>
+            <a:off x="7635240" y="4078224"/>
+            <a:ext cx="4023360" cy="1783080"/>
           </a:xfrm>
           <a:prstGeom prst="roundRect">
             <a:avLst>
-              <a:gd name="adj" fmla="val 3000"/>
+              <a:gd name="adj" fmla="val 3077"/>
             </a:avLst>
           </a:prstGeom>
           <a:solidFill>
@@ -16387,13 +17610,13 @@
       </p:sp>
       <p:sp>
         <p:nvSpPr>
-          <p:cNvPr id="30" name="Text 28"/>
-          <p:cNvSpPr txBox="1"/>
-          <p:nvPr/>
-        </p:nvSpPr>
-        <p:spPr>
-          <a:xfrm>
-            <a:off x="7863840" y="3895344"/>
+          <p:cNvPr id="33" name="Text 30"/>
+          <p:cNvSpPr txBox="1"/>
+          <p:nvPr/>
+        </p:nvSpPr>
+        <p:spPr>
+          <a:xfrm>
+            <a:off x="7863840" y="4242816"/>
             <a:ext cx="3566160" cy="274320"/>
           </a:xfrm>
           <a:prstGeom prst="rect">
@@ -16426,14 +17649,14 @@
       </p:sp>
       <p:sp>
         <p:nvSpPr>
-          <p:cNvPr id="31" name="Text 29"/>
-          <p:cNvSpPr txBox="1"/>
-          <p:nvPr/>
-        </p:nvSpPr>
-        <p:spPr>
-          <a:xfrm>
-            <a:off x="7863840" y="4224528"/>
-            <a:ext cx="3566160" cy="1234440"/>
+          <p:cNvPr id="34" name="Text 31"/>
+          <p:cNvSpPr txBox="1"/>
+          <p:nvPr/>
+        </p:nvSpPr>
+        <p:spPr>
+          <a:xfrm>
+            <a:off x="7863840" y="4572000"/>
+            <a:ext cx="3566160" cy="1188720"/>
           </a:xfrm>
           <a:prstGeom prst="rect">
             <a:avLst/>
@@ -16468,7 +17691,7 @@
       </p:sp>
       <p:sp>
         <p:nvSpPr>
-          <p:cNvPr id="32" name="Text 30"/>
+          <p:cNvPr id="35" name="Text 32"/>
           <p:cNvSpPr txBox="1"/>
           <p:nvPr/>
         </p:nvSpPr>
@@ -16507,7 +17730,7 @@
       </p:sp>
       <p:sp>
         <p:nvSpPr>
-          <p:cNvPr id="33" name="Text 31"/>
+          <p:cNvPr id="36" name="Text 33"/>
           <p:cNvSpPr txBox="1"/>
           <p:nvPr/>
         </p:nvSpPr>
